--- a/modules/04-report-design-ux/assets/report-design-ux.pptx
+++ b/modules/04-report-design-ux/assets/report-design-ux.pptx
@@ -120,6 +120,1946 @@
     </a:lvl9pPr>
   </p:defaultTextStyle>
 </p:presentation>
+</file>
+
+<file path=ppt/notesMasters/notesMaster1.xml><?xml version="1.0" encoding="utf-8"?>
+<p:notesMaster xmlns:a="http://schemas.openxmlformats.org/drawingml/2006/main" xmlns:p="http://schemas.openxmlformats.org/presentationml/2006/main" xmlns:r="http://schemas.openxmlformats.org/officeDocument/2006/relationships">
+  <p:cSld>
+    <p:bg>
+      <p:bgRef idx="1001">
+        <a:schemeClr val="bg1"/>
+      </p:bgRef>
+    </p:bg>
+    <p:spTree>
+      <p:nvGrpSpPr>
+        <p:cNvPr id="1" name=""/>
+        <p:cNvGrpSpPr/>
+        <p:nvPr/>
+      </p:nvGrpSpPr>
+      <p:grpSpPr>
+        <a:xfrm>
+          <a:off x="0" y="0"/>
+          <a:ext cx="0" cy="0"/>
+          <a:chOff x="0" y="0"/>
+          <a:chExt cx="0" cy="0"/>
+        </a:xfrm>
+      </p:grpSpPr>
+      <p:sp>
+        <p:nvSpPr>
+          <p:cNvPr id="2" name="Header Placeholder 1"/>
+          <p:cNvSpPr>
+            <a:spLocks noGrp="1"/>
+          </p:cNvSpPr>
+          <p:nvPr>
+            <p:ph type="hdr" sz="quarter"/>
+          </p:nvPr>
+        </p:nvSpPr>
+        <p:spPr>
+          <a:xfrm>
+            <a:off x="0" y="0"/>
+            <a:ext cx="2971800" cy="457200"/>
+          </a:xfrm>
+          <a:prstGeom prst="rect">
+            <a:avLst/>
+          </a:prstGeom>
+        </p:spPr>
+        <p:txBody>
+          <a:bodyPr vert="horz" lIns="91440" tIns="45720" rIns="91440" bIns="45720" rtlCol="0"/>
+          <a:lstStyle>
+            <a:lvl1pPr algn="l">
+              <a:defRPr sz="1200"/>
+            </a:lvl1pPr>
+          </a:lstStyle>
+          <a:p>
+            <a:endParaRPr lang="en-US"/>
+          </a:p>
+        </p:txBody>
+      </p:sp>
+      <p:sp>
+        <p:nvSpPr>
+          <p:cNvPr id="3" name="Date Placeholder 2"/>
+          <p:cNvSpPr>
+            <a:spLocks noGrp="1"/>
+          </p:cNvSpPr>
+          <p:nvPr>
+            <p:ph type="dt" idx="1"/>
+          </p:nvPr>
+        </p:nvSpPr>
+        <p:spPr>
+          <a:xfrm>
+            <a:off x="3884613" y="0"/>
+            <a:ext cx="2971800" cy="457200"/>
+          </a:xfrm>
+          <a:prstGeom prst="rect">
+            <a:avLst/>
+          </a:prstGeom>
+        </p:spPr>
+        <p:txBody>
+          <a:bodyPr vert="horz" lIns="91440" tIns="45720" rIns="91440" bIns="45720" rtlCol="0"/>
+          <a:lstStyle>
+            <a:lvl1pPr algn="r">
+              <a:defRPr sz="1200"/>
+            </a:lvl1pPr>
+          </a:lstStyle>
+          <a:p>
+            <a:fld id="{0F89C1C7-3DCD-1040-A9CF-14679D8B5DDD}" type="datetimeFigureOut">
+              <a:rPr lang="en-US" smtClean="0"/>
+              <a:t>10/17/16</a:t>
+            </a:fld>
+            <a:endParaRPr lang="en-US"/>
+          </a:p>
+        </p:txBody>
+      </p:sp>
+      <p:sp>
+        <p:nvSpPr>
+          <p:cNvPr id="4" name="Slide Image Placeholder 3"/>
+          <p:cNvSpPr>
+            <a:spLocks noGrp="1" noRot="1" noChangeAspect="1"/>
+          </p:cNvSpPr>
+          <p:nvPr>
+            <p:ph type="sldImg" idx="2"/>
+          </p:nvPr>
+        </p:nvSpPr>
+        <p:spPr>
+          <a:xfrm>
+            <a:off x="1143000" y="685800"/>
+            <a:ext cx="4572000" cy="3429000"/>
+          </a:xfrm>
+          <a:prstGeom prst="rect">
+            <a:avLst/>
+          </a:prstGeom>
+          <a:noFill/>
+          <a:ln w="12700">
+            <a:solidFill>
+              <a:prstClr val="black"/>
+            </a:solidFill>
+          </a:ln>
+        </p:spPr>
+        <p:txBody>
+          <a:bodyPr vert="horz" lIns="91440" tIns="45720" rIns="91440" bIns="45720" rtlCol="0" anchor="ctr"/>
+          <a:lstStyle/>
+          <a:p>
+            <a:endParaRPr lang="en-US"/>
+          </a:p>
+        </p:txBody>
+      </p:sp>
+      <p:sp>
+        <p:nvSpPr>
+          <p:cNvPr id="5" name="Notes Placeholder 4"/>
+          <p:cNvSpPr>
+            <a:spLocks noGrp="1"/>
+          </p:cNvSpPr>
+          <p:nvPr>
+            <p:ph type="body" sz="quarter" idx="3"/>
+          </p:nvPr>
+        </p:nvSpPr>
+        <p:spPr>
+          <a:xfrm>
+            <a:off x="685800" y="4343400"/>
+            <a:ext cx="5486400" cy="4114800"/>
+          </a:xfrm>
+          <a:prstGeom prst="rect">
+            <a:avLst/>
+          </a:prstGeom>
+        </p:spPr>
+        <p:txBody>
+          <a:bodyPr vert="horz" lIns="91440" tIns="45720" rIns="91440" bIns="45720" rtlCol="0"/>
+          <a:lstStyle/>
+          <a:p>
+            <a:pPr lvl="0"/>
+            <a:r>
+              <a:rPr lang="en-US" smtClean="0"/>
+              <a:t>Click to edit Master text styles</a:t>
+            </a:r>
+          </a:p>
+          <a:p>
+            <a:pPr lvl="1"/>
+            <a:r>
+              <a:rPr lang="en-US" smtClean="0"/>
+              <a:t>Second level</a:t>
+            </a:r>
+          </a:p>
+          <a:p>
+            <a:pPr lvl="2"/>
+            <a:r>
+              <a:rPr lang="en-US" smtClean="0"/>
+              <a:t>Third level</a:t>
+            </a:r>
+          </a:p>
+          <a:p>
+            <a:pPr lvl="3"/>
+            <a:r>
+              <a:rPr lang="en-US" smtClean="0"/>
+              <a:t>Fourth level</a:t>
+            </a:r>
+          </a:p>
+          <a:p>
+            <a:pPr lvl="4"/>
+            <a:r>
+              <a:rPr lang="en-US" smtClean="0"/>
+              <a:t>Fifth level</a:t>
+            </a:r>
+            <a:endParaRPr lang="en-US"/>
+          </a:p>
+        </p:txBody>
+      </p:sp>
+      <p:sp>
+        <p:nvSpPr>
+          <p:cNvPr id="6" name="Footer Placeholder 5"/>
+          <p:cNvSpPr>
+            <a:spLocks noGrp="1"/>
+          </p:cNvSpPr>
+          <p:nvPr>
+            <p:ph type="ftr" sz="quarter" idx="4"/>
+          </p:nvPr>
+        </p:nvSpPr>
+        <p:spPr>
+          <a:xfrm>
+            <a:off x="0" y="8685213"/>
+            <a:ext cx="2971800" cy="457200"/>
+          </a:xfrm>
+          <a:prstGeom prst="rect">
+            <a:avLst/>
+          </a:prstGeom>
+        </p:spPr>
+        <p:txBody>
+          <a:bodyPr vert="horz" lIns="91440" tIns="45720" rIns="91440" bIns="45720" rtlCol="0" anchor="b"/>
+          <a:lstStyle>
+            <a:lvl1pPr algn="l">
+              <a:defRPr sz="1200"/>
+            </a:lvl1pPr>
+          </a:lstStyle>
+          <a:p>
+            <a:endParaRPr lang="en-US"/>
+          </a:p>
+        </p:txBody>
+      </p:sp>
+      <p:sp>
+        <p:nvSpPr>
+          <p:cNvPr id="7" name="Slide Number Placeholder 6"/>
+          <p:cNvSpPr>
+            <a:spLocks noGrp="1"/>
+          </p:cNvSpPr>
+          <p:nvPr>
+            <p:ph type="sldNum" sz="quarter" idx="5"/>
+          </p:nvPr>
+        </p:nvSpPr>
+        <p:spPr>
+          <a:xfrm>
+            <a:off x="3884613" y="8685213"/>
+            <a:ext cx="2971800" cy="457200"/>
+          </a:xfrm>
+          <a:prstGeom prst="rect">
+            <a:avLst/>
+          </a:prstGeom>
+        </p:spPr>
+        <p:txBody>
+          <a:bodyPr vert="horz" lIns="91440" tIns="45720" rIns="91440" bIns="45720" rtlCol="0" anchor="b"/>
+          <a:lstStyle>
+            <a:lvl1pPr algn="r">
+              <a:defRPr sz="1200"/>
+            </a:lvl1pPr>
+          </a:lstStyle>
+          <a:p>
+            <a:fld id="{BB5E49A5-4136-284D-997B-48E1D791AD67}" type="slidenum">
+              <a:rPr lang="en-US" smtClean="0"/>
+              <a:t>‹#›</a:t>
+            </a:fld>
+            <a:endParaRPr lang="en-US"/>
+          </a:p>
+        </p:txBody>
+      </p:sp>
+    </p:spTree>
+    <p:extLst>
+      <p:ext uri="{BB962C8B-B14F-4D97-AF65-F5344CB8AC3E}">
+        <p14:creationId xmlns:p14="http://schemas.microsoft.com/office/powerpoint/2010/main" val="2623252185"/>
+      </p:ext>
+    </p:extLst>
+  </p:cSld>
+  <p:clrMap bg1="lt1" tx1="dk1" bg2="lt2" tx2="dk2" accent1="accent1" accent2="accent2" accent3="accent3" accent4="accent4" accent5="accent5" accent6="accent6" hlink="hlink" folHlink="folHlink"/>
+  <p:notesStyle>
+    <a:lvl1pPr marL="0" algn="l" defTabSz="457200" rtl="0" eaLnBrk="1" latinLnBrk="0" hangingPunct="1">
+      <a:defRPr sz="1200" kern="1200">
+        <a:solidFill>
+          <a:schemeClr val="tx1"/>
+        </a:solidFill>
+        <a:latin typeface="+mn-lt"/>
+        <a:ea typeface="+mn-ea"/>
+        <a:cs typeface="+mn-cs"/>
+      </a:defRPr>
+    </a:lvl1pPr>
+    <a:lvl2pPr marL="457200" algn="l" defTabSz="457200" rtl="0" eaLnBrk="1" latinLnBrk="0" hangingPunct="1">
+      <a:defRPr sz="1200" kern="1200">
+        <a:solidFill>
+          <a:schemeClr val="tx1"/>
+        </a:solidFill>
+        <a:latin typeface="+mn-lt"/>
+        <a:ea typeface="+mn-ea"/>
+        <a:cs typeface="+mn-cs"/>
+      </a:defRPr>
+    </a:lvl2pPr>
+    <a:lvl3pPr marL="914400" algn="l" defTabSz="457200" rtl="0" eaLnBrk="1" latinLnBrk="0" hangingPunct="1">
+      <a:defRPr sz="1200" kern="1200">
+        <a:solidFill>
+          <a:schemeClr val="tx1"/>
+        </a:solidFill>
+        <a:latin typeface="+mn-lt"/>
+        <a:ea typeface="+mn-ea"/>
+        <a:cs typeface="+mn-cs"/>
+      </a:defRPr>
+    </a:lvl3pPr>
+    <a:lvl4pPr marL="1371600" algn="l" defTabSz="457200" rtl="0" eaLnBrk="1" latinLnBrk="0" hangingPunct="1">
+      <a:defRPr sz="1200" kern="1200">
+        <a:solidFill>
+          <a:schemeClr val="tx1"/>
+        </a:solidFill>
+        <a:latin typeface="+mn-lt"/>
+        <a:ea typeface="+mn-ea"/>
+        <a:cs typeface="+mn-cs"/>
+      </a:defRPr>
+    </a:lvl4pPr>
+    <a:lvl5pPr marL="1828800" algn="l" defTabSz="457200" rtl="0" eaLnBrk="1" latinLnBrk="0" hangingPunct="1">
+      <a:defRPr sz="1200" kern="1200">
+        <a:solidFill>
+          <a:schemeClr val="tx1"/>
+        </a:solidFill>
+        <a:latin typeface="+mn-lt"/>
+        <a:ea typeface="+mn-ea"/>
+        <a:cs typeface="+mn-cs"/>
+      </a:defRPr>
+    </a:lvl5pPr>
+    <a:lvl6pPr marL="2286000" algn="l" defTabSz="457200" rtl="0" eaLnBrk="1" latinLnBrk="0" hangingPunct="1">
+      <a:defRPr sz="1200" kern="1200">
+        <a:solidFill>
+          <a:schemeClr val="tx1"/>
+        </a:solidFill>
+        <a:latin typeface="+mn-lt"/>
+        <a:ea typeface="+mn-ea"/>
+        <a:cs typeface="+mn-cs"/>
+      </a:defRPr>
+    </a:lvl6pPr>
+    <a:lvl7pPr marL="2743200" algn="l" defTabSz="457200" rtl="0" eaLnBrk="1" latinLnBrk="0" hangingPunct="1">
+      <a:defRPr sz="1200" kern="1200">
+        <a:solidFill>
+          <a:schemeClr val="tx1"/>
+        </a:solidFill>
+        <a:latin typeface="+mn-lt"/>
+        <a:ea typeface="+mn-ea"/>
+        <a:cs typeface="+mn-cs"/>
+      </a:defRPr>
+    </a:lvl7pPr>
+    <a:lvl8pPr marL="3200400" algn="l" defTabSz="457200" rtl="0" eaLnBrk="1" latinLnBrk="0" hangingPunct="1">
+      <a:defRPr sz="1200" kern="1200">
+        <a:solidFill>
+          <a:schemeClr val="tx1"/>
+        </a:solidFill>
+        <a:latin typeface="+mn-lt"/>
+        <a:ea typeface="+mn-ea"/>
+        <a:cs typeface="+mn-cs"/>
+      </a:defRPr>
+    </a:lvl8pPr>
+    <a:lvl9pPr marL="3657600" algn="l" defTabSz="457200" rtl="0" eaLnBrk="1" latinLnBrk="0" hangingPunct="1">
+      <a:defRPr sz="1200" kern="1200">
+        <a:solidFill>
+          <a:schemeClr val="tx1"/>
+        </a:solidFill>
+        <a:latin typeface="+mn-lt"/>
+        <a:ea typeface="+mn-ea"/>
+        <a:cs typeface="+mn-cs"/>
+      </a:defRPr>
+    </a:lvl9pPr>
+  </p:notesStyle>
+</p:notesMaster>
+</file>
+
+<file path=ppt/notesSlides/notesSlide1.xml><?xml version="1.0" encoding="utf-8"?>
+<p:notes xmlns:a="http://schemas.openxmlformats.org/drawingml/2006/main" xmlns:p="http://schemas.openxmlformats.org/presentationml/2006/main" xmlns:r="http://schemas.openxmlformats.org/officeDocument/2006/relationships">
+  <p:cSld>
+    <p:spTree>
+      <p:nvGrpSpPr>
+        <p:cNvPr id="1" name=""/>
+        <p:cNvGrpSpPr/>
+        <p:nvPr/>
+      </p:nvGrpSpPr>
+      <p:grpSpPr>
+        <a:xfrm>
+          <a:off x="0" y="0"/>
+          <a:ext cx="0" cy="0"/>
+          <a:chOff x="0" y="0"/>
+          <a:chExt cx="0" cy="0"/>
+        </a:xfrm>
+      </p:grpSpPr>
+      <p:sp>
+        <p:nvSpPr>
+          <p:cNvPr id="2" name="Slide Image Placeholder 1"/>
+          <p:cNvSpPr>
+            <a:spLocks noGrp="1"/>
+          </p:cNvSpPr>
+          <p:nvPr>
+            <p:ph type="sldImg" idx="2"/>
+          </p:nvPr>
+        </p:nvSpPr>
+        <p:spPr/>
+      </p:sp>
+      <p:sp>
+        <p:nvSpPr>
+          <p:cNvPr id="3" name="Notes Placeholder 2"/>
+          <p:cNvSpPr>
+            <a:spLocks noGrp="1"/>
+          </p:cNvSpPr>
+          <p:nvPr>
+            <p:ph type="body" idx="3" sz="quarter"/>
+          </p:nvPr>
+        </p:nvSpPr>
+        <p:spPr/>
+        <p:txBody>
+          <a:bodyPr/>
+          <a:lstStyle/>
+          <a:p>
+            <a:r>
+              <a:t>Opening talk track: Welcome students to this module and explain that the goal is not to memorize features. The goal is to understand when a pattern helps authors build more trustworthy, maintainable, user-friendly Power BI solutions.</a:t>
+            </a:r>
+          </a:p>
+          <a:p>
+            <a:r>
+              <a:t>Module framing: Frame this module as decision experience design. Every interaction should reduce confusion and help users answer the next question.</a:t>
+            </a:r>
+          </a:p>
+          <a:p>
+            <a:r>
+              <a:t>Set expectations: presentation will introduce the theme, then the lab will let learners build or evaluate the pattern hands-on. Encourage questions about tradeoffs, not just button clicks.</a:t>
+            </a:r>
+          </a:p>
+          <a:p>
+            <a:r>
+              <a:t>Further learning: Report design guidance: https://learn.microsoft.com/power-bi/create-reports/ | Field parameters: https://learn.microsoft.com/power-bi/create-reports/power-bi-field-parameters | Accessibility: https://learn.microsoft.com/power-bi/create-reports/desktop-accessibility-overview</a:t>
+            </a:r>
+          </a:p>
+        </p:txBody>
+      </p:sp>
+      <p:sp>
+        <p:nvSpPr>
+          <p:cNvPr id="4" name="Slide Number Placeholder 3"/>
+          <p:cNvSpPr>
+            <a:spLocks noGrp="1"/>
+          </p:cNvSpPr>
+          <p:nvPr>
+            <p:ph type="sldNum" idx="5" sz="quarter"/>
+          </p:nvPr>
+        </p:nvSpPr>
+        <p:spPr/>
+      </p:sp>
+    </p:spTree>
+  </p:cSld>
+  <p:clrMapOvr>
+    <a:masterClrMapping/>
+  </p:clrMapOvr>
+</p:notes>
+</file>
+
+<file path=ppt/notesSlides/notesSlide10.xml><?xml version="1.0" encoding="utf-8"?>
+<p:notes xmlns:a="http://schemas.openxmlformats.org/drawingml/2006/main" xmlns:p="http://schemas.openxmlformats.org/presentationml/2006/main" xmlns:r="http://schemas.openxmlformats.org/officeDocument/2006/relationships">
+  <p:cSld>
+    <p:spTree>
+      <p:nvGrpSpPr>
+        <p:cNvPr id="1" name=""/>
+        <p:cNvGrpSpPr/>
+        <p:nvPr/>
+      </p:nvGrpSpPr>
+      <p:grpSpPr>
+        <a:xfrm>
+          <a:off x="0" y="0"/>
+          <a:ext cx="0" cy="0"/>
+          <a:chOff x="0" y="0"/>
+          <a:chExt cx="0" cy="0"/>
+        </a:xfrm>
+      </p:grpSpPr>
+      <p:sp>
+        <p:nvSpPr>
+          <p:cNvPr id="2" name="Slide Image Placeholder 1"/>
+          <p:cNvSpPr>
+            <a:spLocks noGrp="1"/>
+          </p:cNvSpPr>
+          <p:nvPr>
+            <p:ph type="sldImg" idx="2"/>
+          </p:nvPr>
+        </p:nvSpPr>
+        <p:spPr/>
+      </p:sp>
+      <p:sp>
+        <p:nvSpPr>
+          <p:cNvPr id="3" name="Notes Placeholder 2"/>
+          <p:cNvSpPr>
+            <a:spLocks noGrp="1"/>
+          </p:cNvSpPr>
+          <p:nvPr>
+            <p:ph type="body" idx="3" sz="quarter"/>
+          </p:nvPr>
+        </p:nvSpPr>
+        <p:spPr/>
+        <p:txBody>
+          <a:bodyPr/>
+          <a:lstStyle/>
+          <a:p>
+            <a:r>
+              <a:t>Core message: 8. Field parameters.</a:t>
+            </a:r>
+          </a:p>
+          <a:p>
+            <a:r>
+              <a:t>Talking points to expand: Talking points, learner value, and lab connection Talking points • Metric switching • Dimension switching Why it helps • Slicer-driven exploration • Controlled flexibility vs. duplicated pages Lab connection Coverage: Covered. Use the lab README to demonstrate or discuss this topic. Review terms: driven, duplicated. 10</a:t>
+            </a:r>
+          </a:p>
+          <a:p>
+            <a:r>
+              <a:t>Why it matters: Frame this module as decision experience design. Every interaction should reduce confusion and help users answer the next question.</a:t>
+            </a:r>
+          </a:p>
+          <a:p>
+            <a:r>
+              <a:t>How it helps users: connect the technical pattern to clearer decisions, fewer confusing report interactions, better trust in results, or easier support.</a:t>
+            </a:r>
+          </a:p>
+          <a:p>
+            <a:r>
+              <a:t>How it builds on prior lessons: reference the previous layer in the workshop, such as prepared data, a clean model, tested measures, or report UX conventions.</a:t>
+            </a:r>
+          </a:p>
+          <a:p>
+            <a:r>
+              <a:t>Lab connection: Show where this concept appears in the module lab. If the lab path is conceptual or Verify for Gov, explain what learners should document instead of building hands-on.</a:t>
+            </a:r>
+          </a:p>
+          <a:p>
+            <a:r>
+              <a:t>Instructor prompt: Ask one learner to describe the risk of skipping this pattern or using it without validation.</a:t>
+            </a:r>
+          </a:p>
+          <a:p>
+            <a:r>
+              <a:t>Further learning: Report design guidance: https://learn.microsoft.com/power-bi/create-reports/ | Field parameters: https://learn.microsoft.com/power-bi/create-reports/power-bi-field-parameters | Accessibility: https://learn.microsoft.com/power-bi/create-reports/desktop-accessibility-overview</a:t>
+            </a:r>
+          </a:p>
+        </p:txBody>
+      </p:sp>
+      <p:sp>
+        <p:nvSpPr>
+          <p:cNvPr id="4" name="Slide Number Placeholder 3"/>
+          <p:cNvSpPr>
+            <a:spLocks noGrp="1"/>
+          </p:cNvSpPr>
+          <p:nvPr>
+            <p:ph type="sldNum" idx="5" sz="quarter"/>
+          </p:nvPr>
+        </p:nvSpPr>
+        <p:spPr/>
+      </p:sp>
+    </p:spTree>
+  </p:cSld>
+  <p:clrMapOvr>
+    <a:masterClrMapping/>
+  </p:clrMapOvr>
+</p:notes>
+</file>
+
+<file path=ppt/notesSlides/notesSlide11.xml><?xml version="1.0" encoding="utf-8"?>
+<p:notes xmlns:a="http://schemas.openxmlformats.org/drawingml/2006/main" xmlns:p="http://schemas.openxmlformats.org/presentationml/2006/main" xmlns:r="http://schemas.openxmlformats.org/officeDocument/2006/relationships">
+  <p:cSld>
+    <p:spTree>
+      <p:nvGrpSpPr>
+        <p:cNvPr id="1" name=""/>
+        <p:cNvGrpSpPr/>
+        <p:nvPr/>
+      </p:nvGrpSpPr>
+      <p:grpSpPr>
+        <a:xfrm>
+          <a:off x="0" y="0"/>
+          <a:ext cx="0" cy="0"/>
+          <a:chOff x="0" y="0"/>
+          <a:chExt cx="0" cy="0"/>
+        </a:xfrm>
+      </p:grpSpPr>
+      <p:sp>
+        <p:nvSpPr>
+          <p:cNvPr id="2" name="Slide Image Placeholder 1"/>
+          <p:cNvSpPr>
+            <a:spLocks noGrp="1"/>
+          </p:cNvSpPr>
+          <p:nvPr>
+            <p:ph type="sldImg" idx="2"/>
+          </p:nvPr>
+        </p:nvSpPr>
+        <p:spPr/>
+      </p:sp>
+      <p:sp>
+        <p:nvSpPr>
+          <p:cNvPr id="3" name="Notes Placeholder 2"/>
+          <p:cNvSpPr>
+            <a:spLocks noGrp="1"/>
+          </p:cNvSpPr>
+          <p:nvPr>
+            <p:ph type="body" idx="3" sz="quarter"/>
+          </p:nvPr>
+        </p:nvSpPr>
+        <p:spPr/>
+        <p:txBody>
+          <a:bodyPr/>
+          <a:lstStyle/>
+          <a:p>
+            <a:r>
+              <a:t>Core message: 9. Conditional formatting.</a:t>
+            </a:r>
+          </a:p>
+          <a:p>
+            <a:r>
+              <a:t>Talking points to expand: Talking points, learner value, and lab connection Talking points • Business thresholds • Color meaning Why it helps • Icon and data bar usage • Avoiding over-formatting Lab connection Coverage: Covered. Use the lab README to demonstrate or discuss this topic. Review terms: avoiding, usage. 11</a:t>
+            </a:r>
+          </a:p>
+          <a:p>
+            <a:r>
+              <a:t>Why it matters: Frame this module as decision experience design. Every interaction should reduce confusion and help users answer the next question.</a:t>
+            </a:r>
+          </a:p>
+          <a:p>
+            <a:r>
+              <a:t>How it helps users: connect the technical pattern to clearer decisions, fewer confusing report interactions, better trust in results, or easier support.</a:t>
+            </a:r>
+          </a:p>
+          <a:p>
+            <a:r>
+              <a:t>How it builds on prior lessons: reference the previous layer in the workshop, such as prepared data, a clean model, tested measures, or report UX conventions.</a:t>
+            </a:r>
+          </a:p>
+          <a:p>
+            <a:r>
+              <a:t>Lab connection: Show where this concept appears in the module lab. If the lab path is conceptual or Verify for Gov, explain what learners should document instead of building hands-on.</a:t>
+            </a:r>
+          </a:p>
+          <a:p>
+            <a:r>
+              <a:t>Instructor prompt: Ask one learner to describe the risk of skipping this pattern or using it without validation.</a:t>
+            </a:r>
+          </a:p>
+          <a:p>
+            <a:r>
+              <a:t>Further learning: Report design guidance: https://learn.microsoft.com/power-bi/create-reports/ | Field parameters: https://learn.microsoft.com/power-bi/create-reports/power-bi-field-parameters | Accessibility: https://learn.microsoft.com/power-bi/create-reports/desktop-accessibility-overview</a:t>
+            </a:r>
+          </a:p>
+        </p:txBody>
+      </p:sp>
+      <p:sp>
+        <p:nvSpPr>
+          <p:cNvPr id="4" name="Slide Number Placeholder 3"/>
+          <p:cNvSpPr>
+            <a:spLocks noGrp="1"/>
+          </p:cNvSpPr>
+          <p:nvPr>
+            <p:ph type="sldNum" idx="5" sz="quarter"/>
+          </p:nvPr>
+        </p:nvSpPr>
+        <p:spPr/>
+      </p:sp>
+    </p:spTree>
+  </p:cSld>
+  <p:clrMapOvr>
+    <a:masterClrMapping/>
+  </p:clrMapOvr>
+</p:notes>
+</file>
+
+<file path=ppt/notesSlides/notesSlide12.xml><?xml version="1.0" encoding="utf-8"?>
+<p:notes xmlns:a="http://schemas.openxmlformats.org/drawingml/2006/main" xmlns:p="http://schemas.openxmlformats.org/presentationml/2006/main" xmlns:r="http://schemas.openxmlformats.org/officeDocument/2006/relationships">
+  <p:cSld>
+    <p:spTree>
+      <p:nvGrpSpPr>
+        <p:cNvPr id="1" name=""/>
+        <p:cNvGrpSpPr/>
+        <p:nvPr/>
+      </p:nvGrpSpPr>
+      <p:grpSpPr>
+        <a:xfrm>
+          <a:off x="0" y="0"/>
+          <a:ext cx="0" cy="0"/>
+          <a:chOff x="0" y="0"/>
+          <a:chExt cx="0" cy="0"/>
+        </a:xfrm>
+      </p:grpSpPr>
+      <p:sp>
+        <p:nvSpPr>
+          <p:cNvPr id="2" name="Slide Image Placeholder 1"/>
+          <p:cNvSpPr>
+            <a:spLocks noGrp="1"/>
+          </p:cNvSpPr>
+          <p:nvPr>
+            <p:ph type="sldImg" idx="2"/>
+          </p:nvPr>
+        </p:nvSpPr>
+        <p:spPr/>
+      </p:sp>
+      <p:sp>
+        <p:nvSpPr>
+          <p:cNvPr id="3" name="Notes Placeholder 2"/>
+          <p:cNvSpPr>
+            <a:spLocks noGrp="1"/>
+          </p:cNvSpPr>
+          <p:nvPr>
+            <p:ph type="body" idx="3" sz="quarter"/>
+          </p:nvPr>
+        </p:nvSpPr>
+        <p:spPr/>
+        <p:txBody>
+          <a:bodyPr/>
+          <a:lstStyle/>
+          <a:p>
+            <a:r>
+              <a:t>Core message: 10. Mobile layout.</a:t>
+            </a:r>
+          </a:p>
+          <a:p>
+            <a:r>
+              <a:t>Talking points to expand: Talking points, learner value, and lab connection Talking points • Mobile-specific design • Touch targets Why it helps • Visual prioritization • Validation Lab connection Coverage: Covered. Use the lab README to demonstrate or discuss this topic. Review terms: prioritization, specific, touch. 12</a:t>
+            </a:r>
+          </a:p>
+          <a:p>
+            <a:r>
+              <a:t>Why it matters: Frame this module as decision experience design. Every interaction should reduce confusion and help users answer the next question.</a:t>
+            </a:r>
+          </a:p>
+          <a:p>
+            <a:r>
+              <a:t>How it helps users: connect the technical pattern to clearer decisions, fewer confusing report interactions, better trust in results, or easier support.</a:t>
+            </a:r>
+          </a:p>
+          <a:p>
+            <a:r>
+              <a:t>How it builds on prior lessons: reference the previous layer in the workshop, such as prepared data, a clean model, tested measures, or report UX conventions.</a:t>
+            </a:r>
+          </a:p>
+          <a:p>
+            <a:r>
+              <a:t>Lab connection: Show where this concept appears in the module lab. If the lab path is conceptual or Verify for Gov, explain what learners should document instead of building hands-on.</a:t>
+            </a:r>
+          </a:p>
+          <a:p>
+            <a:r>
+              <a:t>Instructor prompt: Ask one learner to describe the risk of skipping this pattern or using it without validation.</a:t>
+            </a:r>
+          </a:p>
+          <a:p>
+            <a:r>
+              <a:t>Further learning: Report design guidance: https://learn.microsoft.com/power-bi/create-reports/ | Field parameters: https://learn.microsoft.com/power-bi/create-reports/power-bi-field-parameters | Accessibility: https://learn.microsoft.com/power-bi/create-reports/desktop-accessibility-overview</a:t>
+            </a:r>
+          </a:p>
+        </p:txBody>
+      </p:sp>
+      <p:sp>
+        <p:nvSpPr>
+          <p:cNvPr id="4" name="Slide Number Placeholder 3"/>
+          <p:cNvSpPr>
+            <a:spLocks noGrp="1"/>
+          </p:cNvSpPr>
+          <p:nvPr>
+            <p:ph type="sldNum" idx="5" sz="quarter"/>
+          </p:nvPr>
+        </p:nvSpPr>
+        <p:spPr/>
+      </p:sp>
+    </p:spTree>
+  </p:cSld>
+  <p:clrMapOvr>
+    <a:masterClrMapping/>
+  </p:clrMapOvr>
+</p:notes>
+</file>
+
+<file path=ppt/notesSlides/notesSlide13.xml><?xml version="1.0" encoding="utf-8"?>
+<p:notes xmlns:a="http://schemas.openxmlformats.org/drawingml/2006/main" xmlns:p="http://schemas.openxmlformats.org/presentationml/2006/main" xmlns:r="http://schemas.openxmlformats.org/officeDocument/2006/relationships">
+  <p:cSld>
+    <p:spTree>
+      <p:nvGrpSpPr>
+        <p:cNvPr id="1" name=""/>
+        <p:cNvGrpSpPr/>
+        <p:nvPr/>
+      </p:nvGrpSpPr>
+      <p:grpSpPr>
+        <a:xfrm>
+          <a:off x="0" y="0"/>
+          <a:ext cx="0" cy="0"/>
+          <a:chOff x="0" y="0"/>
+          <a:chExt cx="0" cy="0"/>
+        </a:xfrm>
+      </p:grpSpPr>
+      <p:sp>
+        <p:nvSpPr>
+          <p:cNvPr id="2" name="Slide Image Placeholder 1"/>
+          <p:cNvSpPr>
+            <a:spLocks noGrp="1"/>
+          </p:cNvSpPr>
+          <p:nvPr>
+            <p:ph type="sldImg" idx="2"/>
+          </p:nvPr>
+        </p:nvSpPr>
+        <p:spPr/>
+      </p:sp>
+      <p:sp>
+        <p:nvSpPr>
+          <p:cNvPr id="3" name="Notes Placeholder 2"/>
+          <p:cNvSpPr>
+            <a:spLocks noGrp="1"/>
+          </p:cNvSpPr>
+          <p:nvPr>
+            <p:ph type="body" idx="3" sz="quarter"/>
+          </p:nvPr>
+        </p:nvSpPr>
+        <p:spPr/>
+        <p:txBody>
+          <a:bodyPr/>
+          <a:lstStyle/>
+          <a:p>
+            <a:r>
+              <a:t>Core message: 11. Accessibility.</a:t>
+            </a:r>
+          </a:p>
+          <a:p>
+            <a:r>
+              <a:t>Talking points to expand: Talking points, learner value, and lab connection Talking points • Alt text • Tab order • Contrast Why it helps • Keyboard navigation • Clear visual titles Lab connection Coverage: Covered. Use the lab README to demonstrate or discuss this topic. Review terms: keyboard. 13</a:t>
+            </a:r>
+          </a:p>
+          <a:p>
+            <a:r>
+              <a:t>Why it matters: Frame this module as decision experience design. Every interaction should reduce confusion and help users answer the next question.</a:t>
+            </a:r>
+          </a:p>
+          <a:p>
+            <a:r>
+              <a:t>How it helps users: connect the technical pattern to clearer decisions, fewer confusing report interactions, better trust in results, or easier support.</a:t>
+            </a:r>
+          </a:p>
+          <a:p>
+            <a:r>
+              <a:t>How it builds on prior lessons: reference the previous layer in the workshop, such as prepared data, a clean model, tested measures, or report UX conventions.</a:t>
+            </a:r>
+          </a:p>
+          <a:p>
+            <a:r>
+              <a:t>Lab connection: Show where this concept appears in the module lab. If the lab path is conceptual or Verify for Gov, explain what learners should document instead of building hands-on.</a:t>
+            </a:r>
+          </a:p>
+          <a:p>
+            <a:r>
+              <a:t>Instructor prompt: Ask one learner to describe the risk of skipping this pattern or using it without validation.</a:t>
+            </a:r>
+          </a:p>
+          <a:p>
+            <a:r>
+              <a:t>Further learning: Report design guidance: https://learn.microsoft.com/power-bi/create-reports/ | Field parameters: https://learn.microsoft.com/power-bi/create-reports/power-bi-field-parameters | Accessibility: https://learn.microsoft.com/power-bi/create-reports/desktop-accessibility-overview</a:t>
+            </a:r>
+          </a:p>
+        </p:txBody>
+      </p:sp>
+      <p:sp>
+        <p:nvSpPr>
+          <p:cNvPr id="4" name="Slide Number Placeholder 3"/>
+          <p:cNvSpPr>
+            <a:spLocks noGrp="1"/>
+          </p:cNvSpPr>
+          <p:nvPr>
+            <p:ph type="sldNum" idx="5" sz="quarter"/>
+          </p:nvPr>
+        </p:nvSpPr>
+        <p:spPr/>
+      </p:sp>
+    </p:spTree>
+  </p:cSld>
+  <p:clrMapOvr>
+    <a:masterClrMapping/>
+  </p:clrMapOvr>
+</p:notes>
+</file>
+
+<file path=ppt/notesSlides/notesSlide14.xml><?xml version="1.0" encoding="utf-8"?>
+<p:notes xmlns:a="http://schemas.openxmlformats.org/drawingml/2006/main" xmlns:p="http://schemas.openxmlformats.org/presentationml/2006/main" xmlns:r="http://schemas.openxmlformats.org/officeDocument/2006/relationships">
+  <p:cSld>
+    <p:spTree>
+      <p:nvGrpSpPr>
+        <p:cNvPr id="1" name=""/>
+        <p:cNvGrpSpPr/>
+        <p:nvPr/>
+      </p:nvGrpSpPr>
+      <p:grpSpPr>
+        <a:xfrm>
+          <a:off x="0" y="0"/>
+          <a:ext cx="0" cy="0"/>
+          <a:chOff x="0" y="0"/>
+          <a:chExt cx="0" cy="0"/>
+        </a:xfrm>
+      </p:grpSpPr>
+      <p:sp>
+        <p:nvSpPr>
+          <p:cNvPr id="2" name="Slide Image Placeholder 1"/>
+          <p:cNvSpPr>
+            <a:spLocks noGrp="1"/>
+          </p:cNvSpPr>
+          <p:nvPr>
+            <p:ph type="sldImg" idx="2"/>
+          </p:nvPr>
+        </p:nvSpPr>
+        <p:spPr/>
+      </p:sp>
+      <p:sp>
+        <p:nvSpPr>
+          <p:cNvPr id="3" name="Notes Placeholder 2"/>
+          <p:cNvSpPr>
+            <a:spLocks noGrp="1"/>
+          </p:cNvSpPr>
+          <p:nvPr>
+            <p:ph type="body" idx="3" sz="quarter"/>
+          </p:nvPr>
+        </p:nvSpPr>
+        <p:spPr/>
+        <p:txBody>
+          <a:bodyPr/>
+          <a:lstStyle/>
+          <a:p>
+            <a:r>
+              <a:t>Core message: 12. Azure Government considerations.</a:t>
+            </a:r>
+          </a:p>
+          <a:p>
+            <a:r>
+              <a:t>Talking points to expand: Talking points, learner value, and lab connection Talking points • Core report interactions are Gov-ready. • Mobile depends on customer policy. Why it helps • Personalized visuals and AI visuals need validation. Lab connection Coverage: Covered. Use the lab README to demonstrate or discuss this topic. Review terms: considerations, depends, policy. 14</a:t>
+            </a:r>
+          </a:p>
+          <a:p>
+            <a:r>
+              <a:t>Why it matters: Frame this module as decision experience design. Every interaction should reduce confusion and help users answer the next question.</a:t>
+            </a:r>
+          </a:p>
+          <a:p>
+            <a:r>
+              <a:t>How it helps users: connect the technical pattern to clearer decisions, fewer confusing report interactions, better trust in results, or easier support.</a:t>
+            </a:r>
+          </a:p>
+          <a:p>
+            <a:r>
+              <a:t>How it builds on prior lessons: reference the previous layer in the workshop, such as prepared data, a clean model, tested measures, or report UX conventions.</a:t>
+            </a:r>
+          </a:p>
+          <a:p>
+            <a:r>
+              <a:t>Lab connection: Show where this concept appears in the module lab. If the lab path is conceptual or Verify for Gov, explain what learners should document instead of building hands-on.</a:t>
+            </a:r>
+          </a:p>
+          <a:p>
+            <a:r>
+              <a:t>Instructor prompt: Ask one learner to describe the risk of skipping this pattern or using it without validation.</a:t>
+            </a:r>
+          </a:p>
+          <a:p>
+            <a:r>
+              <a:t>Further learning: Report design guidance: https://learn.microsoft.com/power-bi/create-reports/ | Field parameters: https://learn.microsoft.com/power-bi/create-reports/power-bi-field-parameters | Accessibility: https://learn.microsoft.com/power-bi/create-reports/desktop-accessibility-overview</a:t>
+            </a:r>
+          </a:p>
+        </p:txBody>
+      </p:sp>
+      <p:sp>
+        <p:nvSpPr>
+          <p:cNvPr id="4" name="Slide Number Placeholder 3"/>
+          <p:cNvSpPr>
+            <a:spLocks noGrp="1"/>
+          </p:cNvSpPr>
+          <p:nvPr>
+            <p:ph type="sldNum" idx="5" sz="quarter"/>
+          </p:nvPr>
+        </p:nvSpPr>
+        <p:spPr/>
+      </p:sp>
+    </p:spTree>
+  </p:cSld>
+  <p:clrMapOvr>
+    <a:masterClrMapping/>
+  </p:clrMapOvr>
+</p:notes>
+</file>
+
+<file path=ppt/notesSlides/notesSlide15.xml><?xml version="1.0" encoding="utf-8"?>
+<p:notes xmlns:a="http://schemas.openxmlformats.org/drawingml/2006/main" xmlns:p="http://schemas.openxmlformats.org/presentationml/2006/main" xmlns:r="http://schemas.openxmlformats.org/officeDocument/2006/relationships">
+  <p:cSld>
+    <p:spTree>
+      <p:nvGrpSpPr>
+        <p:cNvPr id="1" name=""/>
+        <p:cNvGrpSpPr/>
+        <p:nvPr/>
+      </p:nvGrpSpPr>
+      <p:grpSpPr>
+        <a:xfrm>
+          <a:off x="0" y="0"/>
+          <a:ext cx="0" cy="0"/>
+          <a:chOff x="0" y="0"/>
+          <a:chExt cx="0" cy="0"/>
+        </a:xfrm>
+      </p:grpSpPr>
+      <p:sp>
+        <p:nvSpPr>
+          <p:cNvPr id="2" name="Slide Image Placeholder 1"/>
+          <p:cNvSpPr>
+            <a:spLocks noGrp="1"/>
+          </p:cNvSpPr>
+          <p:nvPr>
+            <p:ph type="sldImg" idx="2"/>
+          </p:nvPr>
+        </p:nvSpPr>
+        <p:spPr/>
+      </p:sp>
+      <p:sp>
+        <p:nvSpPr>
+          <p:cNvPr id="3" name="Notes Placeholder 2"/>
+          <p:cNvSpPr>
+            <a:spLocks noGrp="1"/>
+          </p:cNvSpPr>
+          <p:nvPr>
+            <p:ph type="body" idx="3" sz="quarter"/>
+          </p:nvPr>
+        </p:nvSpPr>
+        <p:spPr/>
+        <p:txBody>
+          <a:bodyPr/>
+          <a:lstStyle/>
+          <a:p>
+            <a:r>
+              <a:t>Speaker guidance: Treat this as a checkpoint. Ask learners to explain the pattern in their own words and identify where they would use it in a real report.</a:t>
+            </a:r>
+          </a:p>
+          <a:p>
+            <a:r>
+              <a:t>Validation prompt: What would prove this worked? Look for a simple visual, expected filter behavior, or a documented before/after result.</a:t>
+            </a:r>
+          </a:p>
+          <a:p>
+            <a:r>
+              <a:t>Further learning: Report design guidance: https://learn.microsoft.com/power-bi/create-reports/ | Field parameters: https://learn.microsoft.com/power-bi/create-reports/power-bi-field-parameters | Accessibility: https://learn.microsoft.com/power-bi/create-reports/desktop-accessibility-overview</a:t>
+            </a:r>
+          </a:p>
+        </p:txBody>
+      </p:sp>
+      <p:sp>
+        <p:nvSpPr>
+          <p:cNvPr id="4" name="Slide Number Placeholder 3"/>
+          <p:cNvSpPr>
+            <a:spLocks noGrp="1"/>
+          </p:cNvSpPr>
+          <p:nvPr>
+            <p:ph type="sldNum" idx="5" sz="quarter"/>
+          </p:nvPr>
+        </p:nvSpPr>
+        <p:spPr/>
+      </p:sp>
+    </p:spTree>
+  </p:cSld>
+  <p:clrMapOvr>
+    <a:masterClrMapping/>
+  </p:clrMapOvr>
+</p:notes>
+</file>
+
+<file path=ppt/notesSlides/notesSlide16.xml><?xml version="1.0" encoding="utf-8"?>
+<p:notes xmlns:a="http://schemas.openxmlformats.org/drawingml/2006/main" xmlns:p="http://schemas.openxmlformats.org/presentationml/2006/main" xmlns:r="http://schemas.openxmlformats.org/officeDocument/2006/relationships">
+  <p:cSld>
+    <p:spTree>
+      <p:nvGrpSpPr>
+        <p:cNvPr id="1" name=""/>
+        <p:cNvGrpSpPr/>
+        <p:nvPr/>
+      </p:nvGrpSpPr>
+      <p:grpSpPr>
+        <a:xfrm>
+          <a:off x="0" y="0"/>
+          <a:ext cx="0" cy="0"/>
+          <a:chOff x="0" y="0"/>
+          <a:chExt cx="0" cy="0"/>
+        </a:xfrm>
+      </p:grpSpPr>
+      <p:sp>
+        <p:nvSpPr>
+          <p:cNvPr id="2" name="Slide Image Placeholder 1"/>
+          <p:cNvSpPr>
+            <a:spLocks noGrp="1"/>
+          </p:cNvSpPr>
+          <p:nvPr>
+            <p:ph type="sldImg" idx="2"/>
+          </p:nvPr>
+        </p:nvSpPr>
+        <p:spPr/>
+      </p:sp>
+      <p:sp>
+        <p:nvSpPr>
+          <p:cNvPr id="3" name="Notes Placeholder 2"/>
+          <p:cNvSpPr>
+            <a:spLocks noGrp="1"/>
+          </p:cNvSpPr>
+          <p:nvPr>
+            <p:ph type="body" idx="3" sz="quarter"/>
+          </p:nvPr>
+        </p:nvSpPr>
+        <p:spPr/>
+        <p:txBody>
+          <a:bodyPr/>
+          <a:lstStyle/>
+          <a:p>
+            <a:r>
+              <a:t>Speaker guidance: Use this slide as the handoff for self-study. Do not read every link aloud. Point out which source is most relevant to the lab just completed and which source helps learners go deeper after class.</a:t>
+            </a:r>
+          </a:p>
+          <a:p>
+            <a:r>
+              <a:t>Suggested prompt: Ask learners to bookmark the source that best matches the skill they want to improve next.</a:t>
+            </a:r>
+          </a:p>
+          <a:p>
+            <a:r>
+              <a:t>Further learning: Report design guidance: https://learn.microsoft.com/power-bi/create-reports/ | Field parameters: https://learn.microsoft.com/power-bi/create-reports/power-bi-field-parameters | Accessibility: https://learn.microsoft.com/power-bi/create-reports/desktop-accessibility-overview</a:t>
+            </a:r>
+          </a:p>
+        </p:txBody>
+      </p:sp>
+      <p:sp>
+        <p:nvSpPr>
+          <p:cNvPr id="4" name="Slide Number Placeholder 3"/>
+          <p:cNvSpPr>
+            <a:spLocks noGrp="1"/>
+          </p:cNvSpPr>
+          <p:nvPr>
+            <p:ph type="sldNum" idx="5" sz="quarter"/>
+          </p:nvPr>
+        </p:nvSpPr>
+        <p:spPr/>
+      </p:sp>
+    </p:spTree>
+  </p:cSld>
+  <p:clrMapOvr>
+    <a:masterClrMapping/>
+  </p:clrMapOvr>
+</p:notes>
+</file>
+
+<file path=ppt/notesSlides/notesSlide2.xml><?xml version="1.0" encoding="utf-8"?>
+<p:notes xmlns:a="http://schemas.openxmlformats.org/drawingml/2006/main" xmlns:p="http://schemas.openxmlformats.org/presentationml/2006/main" xmlns:r="http://schemas.openxmlformats.org/officeDocument/2006/relationships">
+  <p:cSld>
+    <p:spTree>
+      <p:nvGrpSpPr>
+        <p:cNvPr id="1" name=""/>
+        <p:cNvGrpSpPr/>
+        <p:nvPr/>
+      </p:nvGrpSpPr>
+      <p:grpSpPr>
+        <a:xfrm>
+          <a:off x="0" y="0"/>
+          <a:ext cx="0" cy="0"/>
+          <a:chOff x="0" y="0"/>
+          <a:chExt cx="0" cy="0"/>
+        </a:xfrm>
+      </p:grpSpPr>
+      <p:sp>
+        <p:nvSpPr>
+          <p:cNvPr id="2" name="Slide Image Placeholder 1"/>
+          <p:cNvSpPr>
+            <a:spLocks noGrp="1"/>
+          </p:cNvSpPr>
+          <p:nvPr>
+            <p:ph type="sldImg" idx="2"/>
+          </p:nvPr>
+        </p:nvSpPr>
+        <p:spPr/>
+      </p:sp>
+      <p:sp>
+        <p:nvSpPr>
+          <p:cNvPr id="3" name="Notes Placeholder 2"/>
+          <p:cNvSpPr>
+            <a:spLocks noGrp="1"/>
+          </p:cNvSpPr>
+          <p:nvPr>
+            <p:ph type="body" idx="3" sz="quarter"/>
+          </p:nvPr>
+        </p:nvSpPr>
+        <p:spPr/>
+        <p:txBody>
+          <a:bodyPr/>
+          <a:lstStyle/>
+          <a:p>
+            <a:r>
+              <a:t>Speaker guidance: Emphasize sequence and dependency. Explain what students should already know from prior modules and what this module adds on top.</a:t>
+            </a:r>
+          </a:p>
+          <a:p>
+            <a:r>
+              <a:t>Module framing: Frame this module as decision experience design. Every interaction should reduce confusion and help users answer the next question.</a:t>
+            </a:r>
+          </a:p>
+          <a:p>
+            <a:r>
+              <a:t>Transition: After this slide, move from the concept map into the specific pattern or lab activity.</a:t>
+            </a:r>
+          </a:p>
+          <a:p>
+            <a:r>
+              <a:t>Further learning: Report design guidance: https://learn.microsoft.com/power-bi/create-reports/ | Field parameters: https://learn.microsoft.com/power-bi/create-reports/power-bi-field-parameters | Accessibility: https://learn.microsoft.com/power-bi/create-reports/desktop-accessibility-overview</a:t>
+            </a:r>
+          </a:p>
+        </p:txBody>
+      </p:sp>
+      <p:sp>
+        <p:nvSpPr>
+          <p:cNvPr id="4" name="Slide Number Placeholder 3"/>
+          <p:cNvSpPr>
+            <a:spLocks noGrp="1"/>
+          </p:cNvSpPr>
+          <p:nvPr>
+            <p:ph type="sldNum" idx="5" sz="quarter"/>
+          </p:nvPr>
+        </p:nvSpPr>
+        <p:spPr/>
+      </p:sp>
+    </p:spTree>
+  </p:cSld>
+  <p:clrMapOvr>
+    <a:masterClrMapping/>
+  </p:clrMapOvr>
+</p:notes>
+</file>
+
+<file path=ppt/notesSlides/notesSlide3.xml><?xml version="1.0" encoding="utf-8"?>
+<p:notes xmlns:a="http://schemas.openxmlformats.org/drawingml/2006/main" xmlns:p="http://schemas.openxmlformats.org/presentationml/2006/main" xmlns:r="http://schemas.openxmlformats.org/officeDocument/2006/relationships">
+  <p:cSld>
+    <p:spTree>
+      <p:nvGrpSpPr>
+        <p:cNvPr id="1" name=""/>
+        <p:cNvGrpSpPr/>
+        <p:nvPr/>
+      </p:nvGrpSpPr>
+      <p:grpSpPr>
+        <a:xfrm>
+          <a:off x="0" y="0"/>
+          <a:ext cx="0" cy="0"/>
+          <a:chOff x="0" y="0"/>
+          <a:chExt cx="0" cy="0"/>
+        </a:xfrm>
+      </p:grpSpPr>
+      <p:sp>
+        <p:nvSpPr>
+          <p:cNvPr id="2" name="Slide Image Placeholder 1"/>
+          <p:cNvSpPr>
+            <a:spLocks noGrp="1"/>
+          </p:cNvSpPr>
+          <p:nvPr>
+            <p:ph type="sldImg" idx="2"/>
+          </p:nvPr>
+        </p:nvSpPr>
+        <p:spPr/>
+      </p:sp>
+      <p:sp>
+        <p:nvSpPr>
+          <p:cNvPr id="3" name="Notes Placeholder 2"/>
+          <p:cNvSpPr>
+            <a:spLocks noGrp="1"/>
+          </p:cNvSpPr>
+          <p:nvPr>
+            <p:ph type="body" idx="3" sz="quarter"/>
+          </p:nvPr>
+        </p:nvSpPr>
+        <p:spPr/>
+        <p:txBody>
+          <a:bodyPr/>
+          <a:lstStyle/>
+          <a:p>
+            <a:r>
+              <a:t>Core message: 1. Advanced report UX principles.</a:t>
+            </a:r>
+          </a:p>
+          <a:p>
+            <a:r>
+              <a:t>Talking points to expand: Talking points, learner value, and lab connection Talking points • Reports are decision interfaces. • Layout should follow audience and task. Why it helps • Interactivity should reduce cognitive load. Lab connection Coverage: Partial. Use the lab README to demonstrate or discuss this topic. Review terms: cognitive, decision, follow, interactivity, interfaces. 03</a:t>
+            </a:r>
+          </a:p>
+          <a:p>
+            <a:r>
+              <a:t>Why it matters: Frame this module as decision experience design. Every interaction should reduce confusion and help users answer the next question.</a:t>
+            </a:r>
+          </a:p>
+          <a:p>
+            <a:r>
+              <a:t>How it helps users: connect the technical pattern to clearer decisions, fewer confusing report interactions, better trust in results, or easier support.</a:t>
+            </a:r>
+          </a:p>
+          <a:p>
+            <a:r>
+              <a:t>How it builds on prior lessons: reference the previous layer in the workshop, such as prepared data, a clean model, tested measures, or report UX conventions.</a:t>
+            </a:r>
+          </a:p>
+          <a:p>
+            <a:r>
+              <a:t>Lab connection: Show where this concept appears in the module lab. If the lab path is conceptual or Verify for Gov, explain what learners should document instead of building hands-on.</a:t>
+            </a:r>
+          </a:p>
+          <a:p>
+            <a:r>
+              <a:t>Instructor prompt: Ask one learner to describe the risk of skipping this pattern or using it without validation.</a:t>
+            </a:r>
+          </a:p>
+          <a:p>
+            <a:r>
+              <a:t>Further learning: Report design guidance: https://learn.microsoft.com/power-bi/create-reports/ | Field parameters: https://learn.microsoft.com/power-bi/create-reports/power-bi-field-parameters | Accessibility: https://learn.microsoft.com/power-bi/create-reports/desktop-accessibility-overview</a:t>
+            </a:r>
+          </a:p>
+        </p:txBody>
+      </p:sp>
+      <p:sp>
+        <p:nvSpPr>
+          <p:cNvPr id="4" name="Slide Number Placeholder 3"/>
+          <p:cNvSpPr>
+            <a:spLocks noGrp="1"/>
+          </p:cNvSpPr>
+          <p:nvPr>
+            <p:ph type="sldNum" idx="5" sz="quarter"/>
+          </p:nvPr>
+        </p:nvSpPr>
+        <p:spPr/>
+      </p:sp>
+    </p:spTree>
+  </p:cSld>
+  <p:clrMapOvr>
+    <a:masterClrMapping/>
+  </p:clrMapOvr>
+</p:notes>
+</file>
+
+<file path=ppt/notesSlides/notesSlide4.xml><?xml version="1.0" encoding="utf-8"?>
+<p:notes xmlns:a="http://schemas.openxmlformats.org/drawingml/2006/main" xmlns:p="http://schemas.openxmlformats.org/presentationml/2006/main" xmlns:r="http://schemas.openxmlformats.org/officeDocument/2006/relationships">
+  <p:cSld>
+    <p:spTree>
+      <p:nvGrpSpPr>
+        <p:cNvPr id="1" name=""/>
+        <p:cNvGrpSpPr/>
+        <p:nvPr/>
+      </p:nvGrpSpPr>
+      <p:grpSpPr>
+        <a:xfrm>
+          <a:off x="0" y="0"/>
+          <a:ext cx="0" cy="0"/>
+          <a:chOff x="0" y="0"/>
+          <a:chExt cx="0" cy="0"/>
+        </a:xfrm>
+      </p:grpSpPr>
+      <p:sp>
+        <p:nvSpPr>
+          <p:cNvPr id="2" name="Slide Image Placeholder 1"/>
+          <p:cNvSpPr>
+            <a:spLocks noGrp="1"/>
+          </p:cNvSpPr>
+          <p:nvPr>
+            <p:ph type="sldImg" idx="2"/>
+          </p:nvPr>
+        </p:nvSpPr>
+        <p:spPr/>
+      </p:sp>
+      <p:sp>
+        <p:nvSpPr>
+          <p:cNvPr id="3" name="Notes Placeholder 2"/>
+          <p:cNvSpPr>
+            <a:spLocks noGrp="1"/>
+          </p:cNvSpPr>
+          <p:nvPr>
+            <p:ph type="body" idx="3" sz="quarter"/>
+          </p:nvPr>
+        </p:nvSpPr>
+        <p:spPr/>
+        <p:txBody>
+          <a:bodyPr/>
+          <a:lstStyle/>
+          <a:p>
+            <a:r>
+              <a:t>Core message: 2. Audience-driven design.</a:t>
+            </a:r>
+          </a:p>
+          <a:p>
+            <a:r>
+              <a:t>Talking points to expand: Talking points, learner value, and lab connection Talking points • Executive summary • Analyst exploration Why it helps • Operational monitoring • Detail and exception handling Lab connection Coverage: Partial. Use the lab README to demonstrate or discuss this topic. Review terms: analyst, driven, executive, handling, monitoring. 04</a:t>
+            </a:r>
+          </a:p>
+          <a:p>
+            <a:r>
+              <a:t>Why it matters: Frame this module as decision experience design. Every interaction should reduce confusion and help users answer the next question.</a:t>
+            </a:r>
+          </a:p>
+          <a:p>
+            <a:r>
+              <a:t>How it helps users: connect the technical pattern to clearer decisions, fewer confusing report interactions, better trust in results, or easier support.</a:t>
+            </a:r>
+          </a:p>
+          <a:p>
+            <a:r>
+              <a:t>How it builds on prior lessons: reference the previous layer in the workshop, such as prepared data, a clean model, tested measures, or report UX conventions.</a:t>
+            </a:r>
+          </a:p>
+          <a:p>
+            <a:r>
+              <a:t>Lab connection: Show where this concept appears in the module lab. If the lab path is conceptual or Verify for Gov, explain what learners should document instead of building hands-on.</a:t>
+            </a:r>
+          </a:p>
+          <a:p>
+            <a:r>
+              <a:t>Instructor prompt: Ask one learner to describe the risk of skipping this pattern or using it without validation.</a:t>
+            </a:r>
+          </a:p>
+          <a:p>
+            <a:r>
+              <a:t>Further learning: Report design guidance: https://learn.microsoft.com/power-bi/create-reports/ | Field parameters: https://learn.microsoft.com/power-bi/create-reports/power-bi-field-parameters | Accessibility: https://learn.microsoft.com/power-bi/create-reports/desktop-accessibility-overview</a:t>
+            </a:r>
+          </a:p>
+        </p:txBody>
+      </p:sp>
+      <p:sp>
+        <p:nvSpPr>
+          <p:cNvPr id="4" name="Slide Number Placeholder 3"/>
+          <p:cNvSpPr>
+            <a:spLocks noGrp="1"/>
+          </p:cNvSpPr>
+          <p:nvPr>
+            <p:ph type="sldNum" idx="5" sz="quarter"/>
+          </p:nvPr>
+        </p:nvSpPr>
+        <p:spPr/>
+      </p:sp>
+    </p:spTree>
+  </p:cSld>
+  <p:clrMapOvr>
+    <a:masterClrMapping/>
+  </p:clrMapOvr>
+</p:notes>
+</file>
+
+<file path=ppt/notesSlides/notesSlide5.xml><?xml version="1.0" encoding="utf-8"?>
+<p:notes xmlns:a="http://schemas.openxmlformats.org/drawingml/2006/main" xmlns:p="http://schemas.openxmlformats.org/presentationml/2006/main" xmlns:r="http://schemas.openxmlformats.org/officeDocument/2006/relationships">
+  <p:cSld>
+    <p:spTree>
+      <p:nvGrpSpPr>
+        <p:cNvPr id="1" name=""/>
+        <p:cNvGrpSpPr/>
+        <p:nvPr/>
+      </p:nvGrpSpPr>
+      <p:grpSpPr>
+        <a:xfrm>
+          <a:off x="0" y="0"/>
+          <a:ext cx="0" cy="0"/>
+          <a:chOff x="0" y="0"/>
+          <a:chExt cx="0" cy="0"/>
+        </a:xfrm>
+      </p:grpSpPr>
+      <p:sp>
+        <p:nvSpPr>
+          <p:cNvPr id="2" name="Slide Image Placeholder 1"/>
+          <p:cNvSpPr>
+            <a:spLocks noGrp="1"/>
+          </p:cNvSpPr>
+          <p:nvPr>
+            <p:ph type="sldImg" idx="2"/>
+          </p:nvPr>
+        </p:nvSpPr>
+        <p:spPr/>
+      </p:sp>
+      <p:sp>
+        <p:nvSpPr>
+          <p:cNvPr id="3" name="Notes Placeholder 2"/>
+          <p:cNvSpPr>
+            <a:spLocks noGrp="1"/>
+          </p:cNvSpPr>
+          <p:nvPr>
+            <p:ph type="body" idx="3" sz="quarter"/>
+          </p:nvPr>
+        </p:nvSpPr>
+        <p:spPr/>
+        <p:txBody>
+          <a:bodyPr/>
+          <a:lstStyle/>
+          <a:p>
+            <a:r>
+              <a:t>Core message: 3. Slicers and filters.</a:t>
+            </a:r>
+          </a:p>
+          <a:p>
+            <a:r>
+              <a:t>Talking points to expand: Talking points, learner value, and lab connection Talking points • Page filters vs. visual filters • Slicer placement Why it helps • Sync slicers • Avoiding filter confusion Lab connection Coverage: Partial. Use the lab README to demonstrate or discuss this topic. Review terms: avoiding, confusion, filters, slicers. 05</a:t>
+            </a:r>
+          </a:p>
+          <a:p>
+            <a:r>
+              <a:t>Why it matters: Frame this module as decision experience design. Every interaction should reduce confusion and help users answer the next question.</a:t>
+            </a:r>
+          </a:p>
+          <a:p>
+            <a:r>
+              <a:t>How it helps users: connect the technical pattern to clearer decisions, fewer confusing report interactions, better trust in results, or easier support.</a:t>
+            </a:r>
+          </a:p>
+          <a:p>
+            <a:r>
+              <a:t>How it builds on prior lessons: reference the previous layer in the workshop, such as prepared data, a clean model, tested measures, or report UX conventions.</a:t>
+            </a:r>
+          </a:p>
+          <a:p>
+            <a:r>
+              <a:t>Lab connection: Show where this concept appears in the module lab. If the lab path is conceptual or Verify for Gov, explain what learners should document instead of building hands-on.</a:t>
+            </a:r>
+          </a:p>
+          <a:p>
+            <a:r>
+              <a:t>Instructor prompt: Ask one learner to describe the risk of skipping this pattern or using it without validation.</a:t>
+            </a:r>
+          </a:p>
+          <a:p>
+            <a:r>
+              <a:t>Further learning: Report design guidance: https://learn.microsoft.com/power-bi/create-reports/ | Field parameters: https://learn.microsoft.com/power-bi/create-reports/power-bi-field-parameters | Accessibility: https://learn.microsoft.com/power-bi/create-reports/desktop-accessibility-overview</a:t>
+            </a:r>
+          </a:p>
+        </p:txBody>
+      </p:sp>
+      <p:sp>
+        <p:nvSpPr>
+          <p:cNvPr id="4" name="Slide Number Placeholder 3"/>
+          <p:cNvSpPr>
+            <a:spLocks noGrp="1"/>
+          </p:cNvSpPr>
+          <p:nvPr>
+            <p:ph type="sldNum" idx="5" sz="quarter"/>
+          </p:nvPr>
+        </p:nvSpPr>
+        <p:spPr/>
+      </p:sp>
+    </p:spTree>
+  </p:cSld>
+  <p:clrMapOvr>
+    <a:masterClrMapping/>
+  </p:clrMapOvr>
+</p:notes>
+</file>
+
+<file path=ppt/notesSlides/notesSlide6.xml><?xml version="1.0" encoding="utf-8"?>
+<p:notes xmlns:a="http://schemas.openxmlformats.org/drawingml/2006/main" xmlns:p="http://schemas.openxmlformats.org/presentationml/2006/main" xmlns:r="http://schemas.openxmlformats.org/officeDocument/2006/relationships">
+  <p:cSld>
+    <p:spTree>
+      <p:nvGrpSpPr>
+        <p:cNvPr id="1" name=""/>
+        <p:cNvGrpSpPr/>
+        <p:nvPr/>
+      </p:nvGrpSpPr>
+      <p:grpSpPr>
+        <a:xfrm>
+          <a:off x="0" y="0"/>
+          <a:ext cx="0" cy="0"/>
+          <a:chOff x="0" y="0"/>
+          <a:chExt cx="0" cy="0"/>
+        </a:xfrm>
+      </p:grpSpPr>
+      <p:sp>
+        <p:nvSpPr>
+          <p:cNvPr id="2" name="Slide Image Placeholder 1"/>
+          <p:cNvSpPr>
+            <a:spLocks noGrp="1"/>
+          </p:cNvSpPr>
+          <p:nvPr>
+            <p:ph type="sldImg" idx="2"/>
+          </p:nvPr>
+        </p:nvSpPr>
+        <p:spPr/>
+      </p:sp>
+      <p:sp>
+        <p:nvSpPr>
+          <p:cNvPr id="3" name="Notes Placeholder 2"/>
+          <p:cNvSpPr>
+            <a:spLocks noGrp="1"/>
+          </p:cNvSpPr>
+          <p:nvPr>
+            <p:ph type="body" idx="3" sz="quarter"/>
+          </p:nvPr>
+        </p:nvSpPr>
+        <p:spPr/>
+        <p:txBody>
+          <a:bodyPr/>
+          <a:lstStyle/>
+          <a:p>
+            <a:r>
+              <a:t>Core message: 4. Drillthrough.</a:t>
+            </a:r>
+          </a:p>
+          <a:p>
+            <a:r>
+              <a:t>Talking points to expand: Talking points, learner value, and lab connection Talking points • Summary-to-detail analysis • Drillthrough fields Why it helps • Back button • Detail page design Lab connection Coverage: Covered. Use the lab README to demonstrate or discuss this topic. Review terms: none. 06</a:t>
+            </a:r>
+          </a:p>
+          <a:p>
+            <a:r>
+              <a:t>Why it matters: Frame this module as decision experience design. Every interaction should reduce confusion and help users answer the next question.</a:t>
+            </a:r>
+          </a:p>
+          <a:p>
+            <a:r>
+              <a:t>How it helps users: connect the technical pattern to clearer decisions, fewer confusing report interactions, better trust in results, or easier support.</a:t>
+            </a:r>
+          </a:p>
+          <a:p>
+            <a:r>
+              <a:t>How it builds on prior lessons: reference the previous layer in the workshop, such as prepared data, a clean model, tested measures, or report UX conventions.</a:t>
+            </a:r>
+          </a:p>
+          <a:p>
+            <a:r>
+              <a:t>Lab connection: Show where this concept appears in the module lab. If the lab path is conceptual or Verify for Gov, explain what learners should document instead of building hands-on.</a:t>
+            </a:r>
+          </a:p>
+          <a:p>
+            <a:r>
+              <a:t>Instructor prompt: Ask one learner to describe the risk of skipping this pattern or using it without validation.</a:t>
+            </a:r>
+          </a:p>
+          <a:p>
+            <a:r>
+              <a:t>Further learning: Report design guidance: https://learn.microsoft.com/power-bi/create-reports/ | Field parameters: https://learn.microsoft.com/power-bi/create-reports/power-bi-field-parameters | Accessibility: https://learn.microsoft.com/power-bi/create-reports/desktop-accessibility-overview</a:t>
+            </a:r>
+          </a:p>
+        </p:txBody>
+      </p:sp>
+      <p:sp>
+        <p:nvSpPr>
+          <p:cNvPr id="4" name="Slide Number Placeholder 3"/>
+          <p:cNvSpPr>
+            <a:spLocks noGrp="1"/>
+          </p:cNvSpPr>
+          <p:nvPr>
+            <p:ph type="sldNum" idx="5" sz="quarter"/>
+          </p:nvPr>
+        </p:nvSpPr>
+        <p:spPr/>
+      </p:sp>
+    </p:spTree>
+  </p:cSld>
+  <p:clrMapOvr>
+    <a:masterClrMapping/>
+  </p:clrMapOvr>
+</p:notes>
+</file>
+
+<file path=ppt/notesSlides/notesSlide7.xml><?xml version="1.0" encoding="utf-8"?>
+<p:notes xmlns:a="http://schemas.openxmlformats.org/drawingml/2006/main" xmlns:p="http://schemas.openxmlformats.org/presentationml/2006/main" xmlns:r="http://schemas.openxmlformats.org/officeDocument/2006/relationships">
+  <p:cSld>
+    <p:spTree>
+      <p:nvGrpSpPr>
+        <p:cNvPr id="1" name=""/>
+        <p:cNvGrpSpPr/>
+        <p:nvPr/>
+      </p:nvGrpSpPr>
+      <p:grpSpPr>
+        <a:xfrm>
+          <a:off x="0" y="0"/>
+          <a:ext cx="0" cy="0"/>
+          <a:chOff x="0" y="0"/>
+          <a:chExt cx="0" cy="0"/>
+        </a:xfrm>
+      </p:grpSpPr>
+      <p:sp>
+        <p:nvSpPr>
+          <p:cNvPr id="2" name="Slide Image Placeholder 1"/>
+          <p:cNvSpPr>
+            <a:spLocks noGrp="1"/>
+          </p:cNvSpPr>
+          <p:nvPr>
+            <p:ph type="sldImg" idx="2"/>
+          </p:nvPr>
+        </p:nvSpPr>
+        <p:spPr/>
+      </p:sp>
+      <p:sp>
+        <p:nvSpPr>
+          <p:cNvPr id="3" name="Notes Placeholder 2"/>
+          <p:cNvSpPr>
+            <a:spLocks noGrp="1"/>
+          </p:cNvSpPr>
+          <p:nvPr>
+            <p:ph type="body" idx="3" sz="quarter"/>
+          </p:nvPr>
+        </p:nvSpPr>
+        <p:spPr/>
+        <p:txBody>
+          <a:bodyPr/>
+          <a:lstStyle/>
+          <a:p>
+            <a:r>
+              <a:t>Core message: 5. Report page tooltips.</a:t>
+            </a:r>
+          </a:p>
+          <a:p>
+            <a:r>
+              <a:t>Talking points to expand: Talking points, learner value, and lab connection Talking points • Context without clutter • Tooltip page size Why it helps • Tooltip assignment • Design constraints Lab connection Coverage: Covered. Use the lab README to demonstrate or discuss this topic. Review terms: assignment, constraints. 07</a:t>
+            </a:r>
+          </a:p>
+          <a:p>
+            <a:r>
+              <a:t>Why it matters: Frame this module as decision experience design. Every interaction should reduce confusion and help users answer the next question.</a:t>
+            </a:r>
+          </a:p>
+          <a:p>
+            <a:r>
+              <a:t>How it helps users: connect the technical pattern to clearer decisions, fewer confusing report interactions, better trust in results, or easier support.</a:t>
+            </a:r>
+          </a:p>
+          <a:p>
+            <a:r>
+              <a:t>How it builds on prior lessons: reference the previous layer in the workshop, such as prepared data, a clean model, tested measures, or report UX conventions.</a:t>
+            </a:r>
+          </a:p>
+          <a:p>
+            <a:r>
+              <a:t>Lab connection: Show where this concept appears in the module lab. If the lab path is conceptual or Verify for Gov, explain what learners should document instead of building hands-on.</a:t>
+            </a:r>
+          </a:p>
+          <a:p>
+            <a:r>
+              <a:t>Instructor prompt: Ask one learner to describe the risk of skipping this pattern or using it without validation.</a:t>
+            </a:r>
+          </a:p>
+          <a:p>
+            <a:r>
+              <a:t>Further learning: Report design guidance: https://learn.microsoft.com/power-bi/create-reports/ | Field parameters: https://learn.microsoft.com/power-bi/create-reports/power-bi-field-parameters | Accessibility: https://learn.microsoft.com/power-bi/create-reports/desktop-accessibility-overview</a:t>
+            </a:r>
+          </a:p>
+        </p:txBody>
+      </p:sp>
+      <p:sp>
+        <p:nvSpPr>
+          <p:cNvPr id="4" name="Slide Number Placeholder 3"/>
+          <p:cNvSpPr>
+            <a:spLocks noGrp="1"/>
+          </p:cNvSpPr>
+          <p:nvPr>
+            <p:ph type="sldNum" idx="5" sz="quarter"/>
+          </p:nvPr>
+        </p:nvSpPr>
+        <p:spPr/>
+      </p:sp>
+    </p:spTree>
+  </p:cSld>
+  <p:clrMapOvr>
+    <a:masterClrMapping/>
+  </p:clrMapOvr>
+</p:notes>
+</file>
+
+<file path=ppt/notesSlides/notesSlide8.xml><?xml version="1.0" encoding="utf-8"?>
+<p:notes xmlns:a="http://schemas.openxmlformats.org/drawingml/2006/main" xmlns:p="http://schemas.openxmlformats.org/presentationml/2006/main" xmlns:r="http://schemas.openxmlformats.org/officeDocument/2006/relationships">
+  <p:cSld>
+    <p:spTree>
+      <p:nvGrpSpPr>
+        <p:cNvPr id="1" name=""/>
+        <p:cNvGrpSpPr/>
+        <p:nvPr/>
+      </p:nvGrpSpPr>
+      <p:grpSpPr>
+        <a:xfrm>
+          <a:off x="0" y="0"/>
+          <a:ext cx="0" cy="0"/>
+          <a:chOff x="0" y="0"/>
+          <a:chExt cx="0" cy="0"/>
+        </a:xfrm>
+      </p:grpSpPr>
+      <p:sp>
+        <p:nvSpPr>
+          <p:cNvPr id="2" name="Slide Image Placeholder 1"/>
+          <p:cNvSpPr>
+            <a:spLocks noGrp="1"/>
+          </p:cNvSpPr>
+          <p:nvPr>
+            <p:ph type="sldImg" idx="2"/>
+          </p:nvPr>
+        </p:nvSpPr>
+        <p:spPr/>
+      </p:sp>
+      <p:sp>
+        <p:nvSpPr>
+          <p:cNvPr id="3" name="Notes Placeholder 2"/>
+          <p:cNvSpPr>
+            <a:spLocks noGrp="1"/>
+          </p:cNvSpPr>
+          <p:nvPr>
+            <p:ph type="body" idx="3" sz="quarter"/>
+          </p:nvPr>
+        </p:nvSpPr>
+        <p:spPr/>
+        <p:txBody>
+          <a:bodyPr/>
+          <a:lstStyle/>
+          <a:p>
+            <a:r>
+              <a:t>Core message: 6. Bookmarks and buttons.</a:t>
+            </a:r>
+          </a:p>
+          <a:p>
+            <a:r>
+              <a:t>Talking points to expand: Talking points, learner value, and lab connection Talking points • Guided experiences • Show/hide panels Why it helps • Reset filters • Bookmark options Lab connection Coverage: Covered. Use the lab README to demonstrate or discuss this topic. Review terms: experiences, filters, panels. 08</a:t>
+            </a:r>
+          </a:p>
+          <a:p>
+            <a:r>
+              <a:t>Why it matters: Frame this module as decision experience design. Every interaction should reduce confusion and help users answer the next question.</a:t>
+            </a:r>
+          </a:p>
+          <a:p>
+            <a:r>
+              <a:t>How it helps users: connect the technical pattern to clearer decisions, fewer confusing report interactions, better trust in results, or easier support.</a:t>
+            </a:r>
+          </a:p>
+          <a:p>
+            <a:r>
+              <a:t>How it builds on prior lessons: reference the previous layer in the workshop, such as prepared data, a clean model, tested measures, or report UX conventions.</a:t>
+            </a:r>
+          </a:p>
+          <a:p>
+            <a:r>
+              <a:t>Lab connection: Show where this concept appears in the module lab. If the lab path is conceptual or Verify for Gov, explain what learners should document instead of building hands-on.</a:t>
+            </a:r>
+          </a:p>
+          <a:p>
+            <a:r>
+              <a:t>Instructor prompt: Ask one learner to describe the risk of skipping this pattern or using it without validation.</a:t>
+            </a:r>
+          </a:p>
+          <a:p>
+            <a:r>
+              <a:t>Further learning: Report design guidance: https://learn.microsoft.com/power-bi/create-reports/ | Field parameters: https://learn.microsoft.com/power-bi/create-reports/power-bi-field-parameters | Accessibility: https://learn.microsoft.com/power-bi/create-reports/desktop-accessibility-overview</a:t>
+            </a:r>
+          </a:p>
+        </p:txBody>
+      </p:sp>
+      <p:sp>
+        <p:nvSpPr>
+          <p:cNvPr id="4" name="Slide Number Placeholder 3"/>
+          <p:cNvSpPr>
+            <a:spLocks noGrp="1"/>
+          </p:cNvSpPr>
+          <p:nvPr>
+            <p:ph type="sldNum" idx="5" sz="quarter"/>
+          </p:nvPr>
+        </p:nvSpPr>
+        <p:spPr/>
+      </p:sp>
+    </p:spTree>
+  </p:cSld>
+  <p:clrMapOvr>
+    <a:masterClrMapping/>
+  </p:clrMapOvr>
+</p:notes>
+</file>
+
+<file path=ppt/notesSlides/notesSlide9.xml><?xml version="1.0" encoding="utf-8"?>
+<p:notes xmlns:a="http://schemas.openxmlformats.org/drawingml/2006/main" xmlns:p="http://schemas.openxmlformats.org/presentationml/2006/main" xmlns:r="http://schemas.openxmlformats.org/officeDocument/2006/relationships">
+  <p:cSld>
+    <p:spTree>
+      <p:nvGrpSpPr>
+        <p:cNvPr id="1" name=""/>
+        <p:cNvGrpSpPr/>
+        <p:nvPr/>
+      </p:nvGrpSpPr>
+      <p:grpSpPr>
+        <a:xfrm>
+          <a:off x="0" y="0"/>
+          <a:ext cx="0" cy="0"/>
+          <a:chOff x="0" y="0"/>
+          <a:chExt cx="0" cy="0"/>
+        </a:xfrm>
+      </p:grpSpPr>
+      <p:sp>
+        <p:nvSpPr>
+          <p:cNvPr id="2" name="Slide Image Placeholder 1"/>
+          <p:cNvSpPr>
+            <a:spLocks noGrp="1"/>
+          </p:cNvSpPr>
+          <p:nvPr>
+            <p:ph type="sldImg" idx="2"/>
+          </p:nvPr>
+        </p:nvSpPr>
+        <p:spPr/>
+      </p:sp>
+      <p:sp>
+        <p:nvSpPr>
+          <p:cNvPr id="3" name="Notes Placeholder 2"/>
+          <p:cNvSpPr>
+            <a:spLocks noGrp="1"/>
+          </p:cNvSpPr>
+          <p:nvPr>
+            <p:ph type="body" idx="3" sz="quarter"/>
+          </p:nvPr>
+        </p:nvSpPr>
+        <p:spPr/>
+        <p:txBody>
+          <a:bodyPr/>
+          <a:lstStyle/>
+          <a:p>
+            <a:r>
+              <a:t>Core message: 7. Dynamic navigation.</a:t>
+            </a:r>
+          </a:p>
+          <a:p>
+            <a:r>
+              <a:t>Talking points to expand: Talking points, learner value, and lab connection Talking points • Page navigation buttons • Navigator visuals Why it helps • Conditional navigation concepts • Navigation labels Lab connection Coverage: Covered. Use the lab README to demonstrate or discuss this topic. Review terms: concepts. 09</a:t>
+            </a:r>
+          </a:p>
+          <a:p>
+            <a:r>
+              <a:t>Why it matters: Frame this module as decision experience design. Every interaction should reduce confusion and help users answer the next question.</a:t>
+            </a:r>
+          </a:p>
+          <a:p>
+            <a:r>
+              <a:t>How it helps users: connect the technical pattern to clearer decisions, fewer confusing report interactions, better trust in results, or easier support.</a:t>
+            </a:r>
+          </a:p>
+          <a:p>
+            <a:r>
+              <a:t>How it builds on prior lessons: reference the previous layer in the workshop, such as prepared data, a clean model, tested measures, or report UX conventions.</a:t>
+            </a:r>
+          </a:p>
+          <a:p>
+            <a:r>
+              <a:t>Lab connection: Show where this concept appears in the module lab. If the lab path is conceptual or Verify for Gov, explain what learners should document instead of building hands-on.</a:t>
+            </a:r>
+          </a:p>
+          <a:p>
+            <a:r>
+              <a:t>Instructor prompt: Ask one learner to describe the risk of skipping this pattern or using it without validation.</a:t>
+            </a:r>
+          </a:p>
+          <a:p>
+            <a:r>
+              <a:t>Further learning: Report design guidance: https://learn.microsoft.com/power-bi/create-reports/ | Field parameters: https://learn.microsoft.com/power-bi/create-reports/power-bi-field-parameters | Accessibility: https://learn.microsoft.com/power-bi/create-reports/desktop-accessibility-overview</a:t>
+            </a:r>
+          </a:p>
+        </p:txBody>
+      </p:sp>
+      <p:sp>
+        <p:nvSpPr>
+          <p:cNvPr id="4" name="Slide Number Placeholder 3"/>
+          <p:cNvSpPr>
+            <a:spLocks noGrp="1"/>
+          </p:cNvSpPr>
+          <p:nvPr>
+            <p:ph type="sldNum" idx="5" sz="quarter"/>
+          </p:nvPr>
+        </p:nvSpPr>
+        <p:spPr/>
+      </p:sp>
+    </p:spTree>
+  </p:cSld>
+  <p:clrMapOvr>
+    <a:masterClrMapping/>
+  </p:clrMapOvr>
+</p:notes>
 </file>
 
 <file path=ppt/slideLayouts/slideLayout1.xml><?xml version="1.0" encoding="utf-8"?>
@@ -13860,4 +15800,324 @@
   </a:objectDefaults>
   <a:extraClrSchemeLst/>
 </a:theme>
+</file>
+
+<file path=ppt/theme/theme2.xml><?xml version="1.0" encoding="utf-8"?>
+<a:theme xmlns:a="http://schemas.openxmlformats.org/drawingml/2006/main" name="Office Theme">
+  <a:themeElements>
+    <a:clrScheme name="Office">
+      <a:dk1>
+        <a:sysClr val="windowText" lastClr="000000"/>
+      </a:dk1>
+      <a:lt1>
+        <a:sysClr val="window" lastClr="FFFFFF"/>
+      </a:lt1>
+      <a:dk2>
+        <a:srgbClr val="1F497D"/>
+      </a:dk2>
+      <a:lt2>
+        <a:srgbClr val="EEECE1"/>
+      </a:lt2>
+      <a:accent1>
+        <a:srgbClr val="4F81BD"/>
+      </a:accent1>
+      <a:accent2>
+        <a:srgbClr val="C0504D"/>
+      </a:accent2>
+      <a:accent3>
+        <a:srgbClr val="9BBB59"/>
+      </a:accent3>
+      <a:accent4>
+        <a:srgbClr val="8064A2"/>
+      </a:accent4>
+      <a:accent5>
+        <a:srgbClr val="4BACC6"/>
+      </a:accent5>
+      <a:accent6>
+        <a:srgbClr val="F79646"/>
+      </a:accent6>
+      <a:hlink>
+        <a:srgbClr val="0000FF"/>
+      </a:hlink>
+      <a:folHlink>
+        <a:srgbClr val="800080"/>
+      </a:folHlink>
+    </a:clrScheme>
+    <a:fontScheme name="Office">
+      <a:majorFont>
+        <a:latin typeface="Calibri"/>
+        <a:ea typeface=""/>
+        <a:cs typeface=""/>
+        <a:font script="Jpan" typeface="ＭＳ Ｐゴシック"/>
+        <a:font script="Hang" typeface="맑은 고딕"/>
+        <a:font script="Hans" typeface="宋体"/>
+        <a:font script="Hant" typeface="新細明體"/>
+        <a:font script="Arab" typeface="Times New Roman"/>
+        <a:font script="Hebr" typeface="Times New Roman"/>
+        <a:font script="Thai" typeface="Angsana New"/>
+        <a:font script="Ethi" typeface="Nyala"/>
+        <a:font script="Beng" typeface="Vrinda"/>
+        <a:font script="Gujr" typeface="Shruti"/>
+        <a:font script="Khmr" typeface="MoolBoran"/>
+        <a:font script="Knda" typeface="Tunga"/>
+        <a:font script="Guru" typeface="Raavi"/>
+        <a:font script="Cans" typeface="Euphemia"/>
+        <a:font script="Cher" typeface="Plantagenet Cherokee"/>
+        <a:font script="Yiii" typeface="Microsoft Yi Baiti"/>
+        <a:font script="Tibt" typeface="Microsoft Himalaya"/>
+        <a:font script="Thaa" typeface="MV Boli"/>
+        <a:font script="Deva" typeface="Mangal"/>
+        <a:font script="Telu" typeface="Gautami"/>
+        <a:font script="Taml" typeface="Latha"/>
+        <a:font script="Syrc" typeface="Estrangelo Edessa"/>
+        <a:font script="Orya" typeface="Kalinga"/>
+        <a:font script="Mlym" typeface="Kartika"/>
+        <a:font script="Laoo" typeface="DokChampa"/>
+        <a:font script="Sinh" typeface="Iskoola Pota"/>
+        <a:font script="Mong" typeface="Mongolian Baiti"/>
+        <a:font script="Viet" typeface="Times New Roman"/>
+        <a:font script="Uigh" typeface="Microsoft Uighur"/>
+        <a:font script="Geor" typeface="Sylfaen"/>
+      </a:majorFont>
+      <a:minorFont>
+        <a:latin typeface="Calibri"/>
+        <a:ea typeface=""/>
+        <a:cs typeface=""/>
+        <a:font script="Jpan" typeface="ＭＳ Ｐゴシック"/>
+        <a:font script="Hang" typeface="맑은 고딕"/>
+        <a:font script="Hans" typeface="宋体"/>
+        <a:font script="Hant" typeface="新細明體"/>
+        <a:font script="Arab" typeface="Arial"/>
+        <a:font script="Hebr" typeface="Arial"/>
+        <a:font script="Thai" typeface="Cordia New"/>
+        <a:font script="Ethi" typeface="Nyala"/>
+        <a:font script="Beng" typeface="Vrinda"/>
+        <a:font script="Gujr" typeface="Shruti"/>
+        <a:font script="Khmr" typeface="DaunPenh"/>
+        <a:font script="Knda" typeface="Tunga"/>
+        <a:font script="Guru" typeface="Raavi"/>
+        <a:font script="Cans" typeface="Euphemia"/>
+        <a:font script="Cher" typeface="Plantagenet Cherokee"/>
+        <a:font script="Yiii" typeface="Microsoft Yi Baiti"/>
+        <a:font script="Tibt" typeface="Microsoft Himalaya"/>
+        <a:font script="Thaa" typeface="MV Boli"/>
+        <a:font script="Deva" typeface="Mangal"/>
+        <a:font script="Telu" typeface="Gautami"/>
+        <a:font script="Taml" typeface="Latha"/>
+        <a:font script="Syrc" typeface="Estrangelo Edessa"/>
+        <a:font script="Orya" typeface="Kalinga"/>
+        <a:font script="Mlym" typeface="Kartika"/>
+        <a:font script="Laoo" typeface="DokChampa"/>
+        <a:font script="Sinh" typeface="Iskoola Pota"/>
+        <a:font script="Mong" typeface="Mongolian Baiti"/>
+        <a:font script="Viet" typeface="Arial"/>
+        <a:font script="Uigh" typeface="Microsoft Uighur"/>
+        <a:font script="Geor" typeface="Sylfaen"/>
+      </a:minorFont>
+    </a:fontScheme>
+    <a:fmtScheme name="Office">
+      <a:fillStyleLst>
+        <a:solidFill>
+          <a:schemeClr val="phClr"/>
+        </a:solidFill>
+        <a:gradFill rotWithShape="1">
+          <a:gsLst>
+            <a:gs pos="0">
+              <a:schemeClr val="phClr">
+                <a:tint val="50000"/>
+                <a:satMod val="300000"/>
+              </a:schemeClr>
+            </a:gs>
+            <a:gs pos="35000">
+              <a:schemeClr val="phClr">
+                <a:tint val="37000"/>
+                <a:satMod val="300000"/>
+              </a:schemeClr>
+            </a:gs>
+            <a:gs pos="100000">
+              <a:schemeClr val="phClr">
+                <a:tint val="15000"/>
+                <a:satMod val="350000"/>
+              </a:schemeClr>
+            </a:gs>
+          </a:gsLst>
+          <a:lin ang="16200000" scaled="1"/>
+        </a:gradFill>
+        <a:gradFill rotWithShape="1">
+          <a:gsLst>
+            <a:gs pos="0">
+              <a:schemeClr val="phClr">
+                <a:tint val="100000"/>
+                <a:shade val="100000"/>
+                <a:satMod val="130000"/>
+              </a:schemeClr>
+            </a:gs>
+            <a:gs pos="100000">
+              <a:schemeClr val="phClr">
+                <a:tint val="50000"/>
+                <a:shade val="100000"/>
+                <a:satMod val="350000"/>
+              </a:schemeClr>
+            </a:gs>
+          </a:gsLst>
+          <a:lin ang="16200000" scaled="0"/>
+        </a:gradFill>
+      </a:fillStyleLst>
+      <a:lnStyleLst>
+        <a:ln w="9525" cap="flat" cmpd="sng" algn="ctr">
+          <a:solidFill>
+            <a:schemeClr val="phClr">
+              <a:shade val="95000"/>
+              <a:satMod val="105000"/>
+            </a:schemeClr>
+          </a:solidFill>
+          <a:prstDash val="solid"/>
+        </a:ln>
+        <a:ln w="25400" cap="flat" cmpd="sng" algn="ctr">
+          <a:solidFill>
+            <a:schemeClr val="phClr"/>
+          </a:solidFill>
+          <a:prstDash val="solid"/>
+        </a:ln>
+        <a:ln w="38100" cap="flat" cmpd="sng" algn="ctr">
+          <a:solidFill>
+            <a:schemeClr val="phClr"/>
+          </a:solidFill>
+          <a:prstDash val="solid"/>
+        </a:ln>
+      </a:lnStyleLst>
+      <a:effectStyleLst>
+        <a:effectStyle>
+          <a:effectLst>
+            <a:outerShdw blurRad="40000" dist="20000" dir="5400000" rotWithShape="0">
+              <a:srgbClr val="000000">
+                <a:alpha val="38000"/>
+              </a:srgbClr>
+            </a:outerShdw>
+          </a:effectLst>
+        </a:effectStyle>
+        <a:effectStyle>
+          <a:effectLst>
+            <a:outerShdw blurRad="40000" dist="23000" dir="5400000" rotWithShape="0">
+              <a:srgbClr val="000000">
+                <a:alpha val="35000"/>
+              </a:srgbClr>
+            </a:outerShdw>
+          </a:effectLst>
+        </a:effectStyle>
+        <a:effectStyle>
+          <a:effectLst>
+            <a:outerShdw blurRad="40000" dist="23000" dir="5400000" rotWithShape="0">
+              <a:srgbClr val="000000">
+                <a:alpha val="35000"/>
+              </a:srgbClr>
+            </a:outerShdw>
+          </a:effectLst>
+          <a:scene3d>
+            <a:camera prst="orthographicFront">
+              <a:rot lat="0" lon="0" rev="0"/>
+            </a:camera>
+            <a:lightRig rig="threePt" dir="t">
+              <a:rot lat="0" lon="0" rev="1200000"/>
+            </a:lightRig>
+          </a:scene3d>
+          <a:sp3d>
+            <a:bevelT w="63500" h="25400"/>
+          </a:sp3d>
+        </a:effectStyle>
+      </a:effectStyleLst>
+      <a:bgFillStyleLst>
+        <a:solidFill>
+          <a:schemeClr val="phClr"/>
+        </a:solidFill>
+        <a:gradFill rotWithShape="1">
+          <a:gsLst>
+            <a:gs pos="0">
+              <a:schemeClr val="phClr">
+                <a:tint val="40000"/>
+                <a:satMod val="350000"/>
+              </a:schemeClr>
+            </a:gs>
+            <a:gs pos="40000">
+              <a:schemeClr val="phClr">
+                <a:tint val="45000"/>
+                <a:shade val="99000"/>
+                <a:satMod val="350000"/>
+              </a:schemeClr>
+            </a:gs>
+            <a:gs pos="100000">
+              <a:schemeClr val="phClr">
+                <a:shade val="20000"/>
+                <a:satMod val="255000"/>
+              </a:schemeClr>
+            </a:gs>
+          </a:gsLst>
+          <a:path path="circle">
+            <a:fillToRect l="50000" t="-80000" r="50000" b="180000"/>
+          </a:path>
+        </a:gradFill>
+        <a:gradFill rotWithShape="1">
+          <a:gsLst>
+            <a:gs pos="0">
+              <a:schemeClr val="phClr">
+                <a:tint val="80000"/>
+                <a:satMod val="300000"/>
+              </a:schemeClr>
+            </a:gs>
+            <a:gs pos="100000">
+              <a:schemeClr val="phClr">
+                <a:shade val="30000"/>
+                <a:satMod val="200000"/>
+              </a:schemeClr>
+            </a:gs>
+          </a:gsLst>
+          <a:path path="circle">
+            <a:fillToRect l="50000" t="50000" r="50000" b="50000"/>
+          </a:path>
+        </a:gradFill>
+      </a:bgFillStyleLst>
+    </a:fmtScheme>
+  </a:themeElements>
+  <a:objectDefaults>
+    <a:spDef>
+      <a:spPr/>
+      <a:bodyPr/>
+      <a:lstStyle/>
+      <a:style>
+        <a:lnRef idx="1">
+          <a:schemeClr val="accent1"/>
+        </a:lnRef>
+        <a:fillRef idx="3">
+          <a:schemeClr val="accent1"/>
+        </a:fillRef>
+        <a:effectRef idx="2">
+          <a:schemeClr val="accent1"/>
+        </a:effectRef>
+        <a:fontRef idx="minor">
+          <a:schemeClr val="lt1"/>
+        </a:fontRef>
+      </a:style>
+    </a:spDef>
+    <a:lnDef>
+      <a:spPr/>
+      <a:bodyPr/>
+      <a:lstStyle/>
+      <a:style>
+        <a:lnRef idx="2">
+          <a:schemeClr val="accent1"/>
+        </a:lnRef>
+        <a:fillRef idx="0">
+          <a:schemeClr val="accent1"/>
+        </a:fillRef>
+        <a:effectRef idx="1">
+          <a:schemeClr val="accent1"/>
+        </a:effectRef>
+        <a:fontRef idx="minor">
+          <a:schemeClr val="tx1"/>
+        </a:fontRef>
+      </a:style>
+    </a:lnDef>
+  </a:objectDefaults>
+  <a:extraClrSchemeLst/>
+</a:theme>
 </file>
--- a/modules/04-report-design-ux/assets/report-design-ux.pptx
+++ b/modules/04-report-design-ux/assets/report-design-ux.pptx
@@ -5153,7 +5153,7 @@
               </a:defRPr>
             </a:pPr>
             <a:r>
-              <a:t>Power BI Advanced Factory teaching deck</a:t>
+              <a:t>Student module overview</a:t>
             </a:r>
           </a:p>
         </p:txBody>
@@ -5677,42 +5677,6 @@
       </p:sp>
       <p:sp>
         <p:nvSpPr>
-          <p:cNvPr id="4" name="TextBox 3"/>
-          <p:cNvSpPr txBox="1"/>
-          <p:nvPr/>
-        </p:nvSpPr>
-        <p:spPr>
-          <a:xfrm>
-            <a:off x="530352" y="914400"/>
-            <a:ext cx="10515600" cy="320040"/>
-          </a:xfrm>
-          <a:prstGeom prst="rect">
-            <a:avLst/>
-          </a:prstGeom>
-          <a:noFill/>
-        </p:spPr>
-        <p:txBody>
-          <a:bodyPr wrap="none">
-            <a:spAutoFit/>
-          </a:bodyPr>
-          <a:lstStyle/>
-          <a:p>
-            <a:pPr>
-              <a:defRPr sz="1200">
-                <a:solidFill>
-                  <a:srgbClr val="5C5C5C"/>
-                </a:solidFill>
-                <a:latin typeface="Aptos"/>
-              </a:defRPr>
-            </a:pPr>
-            <a:r>
-              <a:t>Talking points, learner value, and lab connection</a:t>
-            </a:r>
-          </a:p>
-        </p:txBody>
-      </p:sp>
-      <p:sp>
-        <p:nvSpPr>
           <p:cNvPr id="5" name="Rounded Rectangle 4"/>
           <p:cNvSpPr/>
           <p:nvPr/>
@@ -5830,7 +5794,139 @@
               </a:defRPr>
             </a:pPr>
             <a:r>
-              <a:t>Talking points</a:t>
+              <a:t>Key ideas</a:t>
+            </a:r>
+            <a:br/>
+            <a:r>
+              <a:t>• Metric switching</a:t>
+            </a:r>
+            <a:br/>
+            <a:r>
+              <a:t>• Dimension switching</a:t>
+            </a:r>
+          </a:p>
+        </p:txBody>
+      </p:sp>
+      <p:sp>
+        <p:nvSpPr>
+          <p:cNvPr id="8" name="Rounded Rectangle 7"/>
+          <p:cNvSpPr/>
+          <p:nvPr/>
+        </p:nvSpPr>
+        <p:spPr>
+          <a:xfrm>
+            <a:off x="6263640" y="1234440"/>
+            <a:ext cx="5303520" cy="1828800"/>
+          </a:xfrm>
+          <a:prstGeom prst="roundRect">
+            <a:avLst/>
+          </a:prstGeom>
+          <a:solidFill>
+            <a:srgbClr val="FFFFFF"/>
+          </a:solidFill>
+          <a:ln>
+            <a:solidFill>
+              <a:srgbClr val="DCDCDC"/>
+            </a:solidFill>
+          </a:ln>
+        </p:spPr>
+        <p:style>
+          <a:lnRef idx="1">
+            <a:schemeClr val="accent1"/>
+          </a:lnRef>
+          <a:fillRef idx="3">
+            <a:schemeClr val="accent1"/>
+          </a:fillRef>
+          <a:effectRef idx="2">
+            <a:schemeClr val="accent1"/>
+          </a:effectRef>
+          <a:fontRef idx="minor">
+            <a:schemeClr val="lt1"/>
+          </a:fontRef>
+        </p:style>
+        <p:txBody>
+          <a:bodyPr rtlCol="0" anchor="ctr"/>
+          <a:lstStyle/>
+          <a:p>
+            <a:pPr algn="ctr"/>
+          </a:p>
+        </p:txBody>
+      </p:sp>
+      <p:sp>
+        <p:nvSpPr>
+          <p:cNvPr id="9" name="Rectangle 8"/>
+          <p:cNvSpPr/>
+          <p:nvPr/>
+        </p:nvSpPr>
+        <p:spPr>
+          <a:xfrm>
+            <a:off x="6263640" y="1234440"/>
+            <a:ext cx="91440" cy="1828800"/>
+          </a:xfrm>
+          <a:prstGeom prst="rect">
+            <a:avLst/>
+          </a:prstGeom>
+          <a:solidFill>
+            <a:srgbClr val="02C39A"/>
+          </a:solidFill>
+          <a:ln>
+            <a:noFill/>
+          </a:ln>
+        </p:spPr>
+        <p:style>
+          <a:lnRef idx="1">
+            <a:schemeClr val="accent1"/>
+          </a:lnRef>
+          <a:fillRef idx="3">
+            <a:schemeClr val="accent1"/>
+          </a:fillRef>
+          <a:effectRef idx="2">
+            <a:schemeClr val="accent1"/>
+          </a:effectRef>
+          <a:fontRef idx="minor">
+            <a:schemeClr val="lt1"/>
+          </a:fontRef>
+        </p:style>
+        <p:txBody>
+          <a:bodyPr rtlCol="0" anchor="ctr"/>
+          <a:lstStyle/>
+          <a:p>
+            <a:pPr algn="ctr"/>
+          </a:p>
+        </p:txBody>
+      </p:sp>
+      <p:sp>
+        <p:nvSpPr>
+          <p:cNvPr id="10" name="TextBox 9"/>
+          <p:cNvSpPr txBox="1"/>
+          <p:nvPr/>
+        </p:nvSpPr>
+        <p:spPr>
+          <a:xfrm>
+            <a:off x="6446520" y="1344168"/>
+            <a:ext cx="4983480" cy="1664208"/>
+          </a:xfrm>
+          <a:prstGeom prst="rect">
+            <a:avLst/>
+          </a:prstGeom>
+          <a:noFill/>
+        </p:spPr>
+        <p:txBody>
+          <a:bodyPr wrap="square" lIns="0" rIns="0">
+            <a:spAutoFit/>
+          </a:bodyPr>
+          <a:lstStyle/>
+          <a:p>
+            <a:pPr>
+              <a:defRPr b="1" sz="1500">
+                <a:solidFill>
+                  <a:srgbClr val="1E2761"/>
+                </a:solidFill>
+                <a:latin typeface="Aptos Display"/>
+              </a:defRPr>
+            </a:pPr>
+            <a:r>
+              <a:t>Why it helps</a:t>
             </a:r>
           </a:p>
           <a:p>
@@ -5846,25 +5942,25 @@
               </a:defRPr>
             </a:pPr>
             <a:r>
-              <a:t>• Metric switching</a:t>
+              <a:t>• Slicer-driven exploration</a:t>
             </a:r>
             <a:br/>
             <a:r>
-              <a:t>• Dimension switching</a:t>
-            </a:r>
-          </a:p>
-        </p:txBody>
-      </p:sp>
-      <p:sp>
-        <p:nvSpPr>
-          <p:cNvPr id="8" name="Rounded Rectangle 7"/>
+              <a:t>• Controlled flexibility vs. duplicated pages</a:t>
+            </a:r>
+          </a:p>
+        </p:txBody>
+      </p:sp>
+      <p:sp>
+        <p:nvSpPr>
+          <p:cNvPr id="11" name="Rounded Rectangle 10"/>
           <p:cNvSpPr/>
           <p:nvPr/>
         </p:nvSpPr>
         <p:spPr>
           <a:xfrm>
-            <a:off x="6263640" y="1234440"/>
-            <a:ext cx="5303520" cy="1828800"/>
+            <a:off x="822960" y="4160520"/>
+            <a:ext cx="10424160" cy="868680"/>
           </a:xfrm>
           <a:prstGeom prst="roundRect">
             <a:avLst/>
@@ -5902,20 +5998,20 @@
       </p:sp>
       <p:sp>
         <p:nvSpPr>
-          <p:cNvPr id="9" name="Rectangle 8"/>
+          <p:cNvPr id="12" name="Rectangle 11"/>
           <p:cNvSpPr/>
           <p:nvPr/>
         </p:nvSpPr>
         <p:spPr>
           <a:xfrm>
-            <a:off x="6263640" y="1234440"/>
-            <a:ext cx="91440" cy="1828800"/>
+            <a:off x="822960" y="4160520"/>
+            <a:ext cx="91440" cy="868680"/>
           </a:xfrm>
           <a:prstGeom prst="rect">
             <a:avLst/>
           </a:prstGeom>
           <a:solidFill>
-            <a:srgbClr val="02C39A"/>
+            <a:srgbClr val="F9B700"/>
           </a:solidFill>
           <a:ln>
             <a:noFill/>
@@ -5945,14 +6041,14 @@
       </p:sp>
       <p:sp>
         <p:nvSpPr>
-          <p:cNvPr id="10" name="TextBox 9"/>
+          <p:cNvPr id="13" name="TextBox 12"/>
           <p:cNvSpPr txBox="1"/>
           <p:nvPr/>
         </p:nvSpPr>
         <p:spPr>
           <a:xfrm>
-            <a:off x="6446520" y="1344168"/>
-            <a:ext cx="4983480" cy="1664208"/>
+            <a:off x="1005840" y="4270248"/>
+            <a:ext cx="10104120" cy="704088"/>
           </a:xfrm>
           <a:prstGeom prst="rect">
             <a:avLst/>
@@ -5974,167 +6070,7 @@
               </a:defRPr>
             </a:pPr>
             <a:r>
-              <a:t>Why it helps</a:t>
-            </a:r>
-          </a:p>
-          <a:p>
-            <a:pPr>
-              <a:spcBef>
-                <a:spcPts val="400"/>
-              </a:spcBef>
-              <a:defRPr sz="1050">
-                <a:solidFill>
-                  <a:srgbClr val="242424"/>
-                </a:solidFill>
-                <a:latin typeface="Aptos"/>
-              </a:defRPr>
-            </a:pPr>
-            <a:r>
-              <a:t>• Slicer-driven exploration</a:t>
-            </a:r>
-            <a:br/>
-            <a:r>
-              <a:t>• Controlled flexibility vs. duplicated pages</a:t>
-            </a:r>
-          </a:p>
-        </p:txBody>
-      </p:sp>
-      <p:sp>
-        <p:nvSpPr>
-          <p:cNvPr id="11" name="Rounded Rectangle 10"/>
-          <p:cNvSpPr/>
-          <p:nvPr/>
-        </p:nvSpPr>
-        <p:spPr>
-          <a:xfrm>
-            <a:off x="822960" y="4160520"/>
-            <a:ext cx="10424160" cy="868680"/>
-          </a:xfrm>
-          <a:prstGeom prst="roundRect">
-            <a:avLst/>
-          </a:prstGeom>
-          <a:solidFill>
-            <a:srgbClr val="FFFFFF"/>
-          </a:solidFill>
-          <a:ln>
-            <a:solidFill>
-              <a:srgbClr val="DCDCDC"/>
-            </a:solidFill>
-          </a:ln>
-        </p:spPr>
-        <p:style>
-          <a:lnRef idx="1">
-            <a:schemeClr val="accent1"/>
-          </a:lnRef>
-          <a:fillRef idx="3">
-            <a:schemeClr val="accent1"/>
-          </a:fillRef>
-          <a:effectRef idx="2">
-            <a:schemeClr val="accent1"/>
-          </a:effectRef>
-          <a:fontRef idx="minor">
-            <a:schemeClr val="lt1"/>
-          </a:fontRef>
-        </p:style>
-        <p:txBody>
-          <a:bodyPr rtlCol="0" anchor="ctr"/>
-          <a:lstStyle/>
-          <a:p>
-            <a:pPr algn="ctr"/>
-          </a:p>
-        </p:txBody>
-      </p:sp>
-      <p:sp>
-        <p:nvSpPr>
-          <p:cNvPr id="12" name="Rectangle 11"/>
-          <p:cNvSpPr/>
-          <p:nvPr/>
-        </p:nvSpPr>
-        <p:spPr>
-          <a:xfrm>
-            <a:off x="822960" y="4160520"/>
-            <a:ext cx="91440" cy="868680"/>
-          </a:xfrm>
-          <a:prstGeom prst="rect">
-            <a:avLst/>
-          </a:prstGeom>
-          <a:solidFill>
-            <a:srgbClr val="F9B700"/>
-          </a:solidFill>
-          <a:ln>
-            <a:noFill/>
-          </a:ln>
-        </p:spPr>
-        <p:style>
-          <a:lnRef idx="1">
-            <a:schemeClr val="accent1"/>
-          </a:lnRef>
-          <a:fillRef idx="3">
-            <a:schemeClr val="accent1"/>
-          </a:fillRef>
-          <a:effectRef idx="2">
-            <a:schemeClr val="accent1"/>
-          </a:effectRef>
-          <a:fontRef idx="minor">
-            <a:schemeClr val="lt1"/>
-          </a:fontRef>
-        </p:style>
-        <p:txBody>
-          <a:bodyPr rtlCol="0" anchor="ctr"/>
-          <a:lstStyle/>
-          <a:p>
-            <a:pPr algn="ctr"/>
-          </a:p>
-        </p:txBody>
-      </p:sp>
-      <p:sp>
-        <p:nvSpPr>
-          <p:cNvPr id="13" name="TextBox 12"/>
-          <p:cNvSpPr txBox="1"/>
-          <p:nvPr/>
-        </p:nvSpPr>
-        <p:spPr>
-          <a:xfrm>
-            <a:off x="1005840" y="4270248"/>
-            <a:ext cx="10104120" cy="704088"/>
-          </a:xfrm>
-          <a:prstGeom prst="rect">
-            <a:avLst/>
-          </a:prstGeom>
-          <a:noFill/>
-        </p:spPr>
-        <p:txBody>
-          <a:bodyPr wrap="square" lIns="0" rIns="0">
-            <a:spAutoFit/>
-          </a:bodyPr>
-          <a:lstStyle/>
-          <a:p>
-            <a:pPr>
-              <a:defRPr b="1" sz="1500">
-                <a:solidFill>
-                  <a:srgbClr val="1E2761"/>
-                </a:solidFill>
-                <a:latin typeface="Aptos Display"/>
-              </a:defRPr>
-            </a:pPr>
-            <a:r>
-              <a:t>Lab connection</a:t>
-            </a:r>
-          </a:p>
-          <a:p>
-            <a:pPr>
-              <a:spcBef>
-                <a:spcPts val="400"/>
-              </a:spcBef>
-              <a:defRPr sz="1050">
-                <a:solidFill>
-                  <a:srgbClr val="242424"/>
-                </a:solidFill>
-                <a:latin typeface="Aptos"/>
-              </a:defRPr>
-            </a:pPr>
-            <a:r>
-              <a:t>Coverage: Covered. Use the lab README to demonstrate or discuss this topic. Review terms: driven, duplicated.</a:t>
+              <a:t>In the lab, you will apply this pattern, validate the expected behavior, and discuss where it fits in a real Power BI solution.</a:t>
             </a:r>
           </a:p>
         </p:txBody>
@@ -6273,42 +6209,6 @@
       </p:sp>
       <p:sp>
         <p:nvSpPr>
-          <p:cNvPr id="4" name="TextBox 3"/>
-          <p:cNvSpPr txBox="1"/>
-          <p:nvPr/>
-        </p:nvSpPr>
-        <p:spPr>
-          <a:xfrm>
-            <a:off x="530352" y="914400"/>
-            <a:ext cx="10515600" cy="320040"/>
-          </a:xfrm>
-          <a:prstGeom prst="rect">
-            <a:avLst/>
-          </a:prstGeom>
-          <a:noFill/>
-        </p:spPr>
-        <p:txBody>
-          <a:bodyPr wrap="none">
-            <a:spAutoFit/>
-          </a:bodyPr>
-          <a:lstStyle/>
-          <a:p>
-            <a:pPr>
-              <a:defRPr sz="1200">
-                <a:solidFill>
-                  <a:srgbClr val="5C5C5C"/>
-                </a:solidFill>
-                <a:latin typeface="Aptos"/>
-              </a:defRPr>
-            </a:pPr>
-            <a:r>
-              <a:t>Talking points, learner value, and lab connection</a:t>
-            </a:r>
-          </a:p>
-        </p:txBody>
-      </p:sp>
-      <p:sp>
-        <p:nvSpPr>
           <p:cNvPr id="5" name="Rounded Rectangle 4"/>
           <p:cNvSpPr/>
           <p:nvPr/>
@@ -6426,7 +6326,139 @@
               </a:defRPr>
             </a:pPr>
             <a:r>
-              <a:t>Talking points</a:t>
+              <a:t>Key ideas</a:t>
+            </a:r>
+            <a:br/>
+            <a:r>
+              <a:t>• Business thresholds</a:t>
+            </a:r>
+            <a:br/>
+            <a:r>
+              <a:t>• Color meaning</a:t>
+            </a:r>
+          </a:p>
+        </p:txBody>
+      </p:sp>
+      <p:sp>
+        <p:nvSpPr>
+          <p:cNvPr id="8" name="Rounded Rectangle 7"/>
+          <p:cNvSpPr/>
+          <p:nvPr/>
+        </p:nvSpPr>
+        <p:spPr>
+          <a:xfrm>
+            <a:off x="6263640" y="1234440"/>
+            <a:ext cx="5303520" cy="1828800"/>
+          </a:xfrm>
+          <a:prstGeom prst="roundRect">
+            <a:avLst/>
+          </a:prstGeom>
+          <a:solidFill>
+            <a:srgbClr val="FFFFFF"/>
+          </a:solidFill>
+          <a:ln>
+            <a:solidFill>
+              <a:srgbClr val="DCDCDC"/>
+            </a:solidFill>
+          </a:ln>
+        </p:spPr>
+        <p:style>
+          <a:lnRef idx="1">
+            <a:schemeClr val="accent1"/>
+          </a:lnRef>
+          <a:fillRef idx="3">
+            <a:schemeClr val="accent1"/>
+          </a:fillRef>
+          <a:effectRef idx="2">
+            <a:schemeClr val="accent1"/>
+          </a:effectRef>
+          <a:fontRef idx="minor">
+            <a:schemeClr val="lt1"/>
+          </a:fontRef>
+        </p:style>
+        <p:txBody>
+          <a:bodyPr rtlCol="0" anchor="ctr"/>
+          <a:lstStyle/>
+          <a:p>
+            <a:pPr algn="ctr"/>
+          </a:p>
+        </p:txBody>
+      </p:sp>
+      <p:sp>
+        <p:nvSpPr>
+          <p:cNvPr id="9" name="Rectangle 8"/>
+          <p:cNvSpPr/>
+          <p:nvPr/>
+        </p:nvSpPr>
+        <p:spPr>
+          <a:xfrm>
+            <a:off x="6263640" y="1234440"/>
+            <a:ext cx="91440" cy="1828800"/>
+          </a:xfrm>
+          <a:prstGeom prst="rect">
+            <a:avLst/>
+          </a:prstGeom>
+          <a:solidFill>
+            <a:srgbClr val="02C39A"/>
+          </a:solidFill>
+          <a:ln>
+            <a:noFill/>
+          </a:ln>
+        </p:spPr>
+        <p:style>
+          <a:lnRef idx="1">
+            <a:schemeClr val="accent1"/>
+          </a:lnRef>
+          <a:fillRef idx="3">
+            <a:schemeClr val="accent1"/>
+          </a:fillRef>
+          <a:effectRef idx="2">
+            <a:schemeClr val="accent1"/>
+          </a:effectRef>
+          <a:fontRef idx="minor">
+            <a:schemeClr val="lt1"/>
+          </a:fontRef>
+        </p:style>
+        <p:txBody>
+          <a:bodyPr rtlCol="0" anchor="ctr"/>
+          <a:lstStyle/>
+          <a:p>
+            <a:pPr algn="ctr"/>
+          </a:p>
+        </p:txBody>
+      </p:sp>
+      <p:sp>
+        <p:nvSpPr>
+          <p:cNvPr id="10" name="TextBox 9"/>
+          <p:cNvSpPr txBox="1"/>
+          <p:nvPr/>
+        </p:nvSpPr>
+        <p:spPr>
+          <a:xfrm>
+            <a:off x="6446520" y="1344168"/>
+            <a:ext cx="4983480" cy="1664208"/>
+          </a:xfrm>
+          <a:prstGeom prst="rect">
+            <a:avLst/>
+          </a:prstGeom>
+          <a:noFill/>
+        </p:spPr>
+        <p:txBody>
+          <a:bodyPr wrap="square" lIns="0" rIns="0">
+            <a:spAutoFit/>
+          </a:bodyPr>
+          <a:lstStyle/>
+          <a:p>
+            <a:pPr>
+              <a:defRPr b="1" sz="1500">
+                <a:solidFill>
+                  <a:srgbClr val="1E2761"/>
+                </a:solidFill>
+                <a:latin typeface="Aptos Display"/>
+              </a:defRPr>
+            </a:pPr>
+            <a:r>
+              <a:t>Why it helps</a:t>
             </a:r>
           </a:p>
           <a:p>
@@ -6442,25 +6474,25 @@
               </a:defRPr>
             </a:pPr>
             <a:r>
-              <a:t>• Business thresholds</a:t>
+              <a:t>• Icon and data bar usage</a:t>
             </a:r>
             <a:br/>
             <a:r>
-              <a:t>• Color meaning</a:t>
-            </a:r>
-          </a:p>
-        </p:txBody>
-      </p:sp>
-      <p:sp>
-        <p:nvSpPr>
-          <p:cNvPr id="8" name="Rounded Rectangle 7"/>
+              <a:t>• Avoiding over-formatting</a:t>
+            </a:r>
+          </a:p>
+        </p:txBody>
+      </p:sp>
+      <p:sp>
+        <p:nvSpPr>
+          <p:cNvPr id="11" name="Rounded Rectangle 10"/>
           <p:cNvSpPr/>
           <p:nvPr/>
         </p:nvSpPr>
         <p:spPr>
           <a:xfrm>
-            <a:off x="6263640" y="1234440"/>
-            <a:ext cx="5303520" cy="1828800"/>
+            <a:off x="822960" y="4160520"/>
+            <a:ext cx="10424160" cy="868680"/>
           </a:xfrm>
           <a:prstGeom prst="roundRect">
             <a:avLst/>
@@ -6498,20 +6530,20 @@
       </p:sp>
       <p:sp>
         <p:nvSpPr>
-          <p:cNvPr id="9" name="Rectangle 8"/>
+          <p:cNvPr id="12" name="Rectangle 11"/>
           <p:cNvSpPr/>
           <p:nvPr/>
         </p:nvSpPr>
         <p:spPr>
           <a:xfrm>
-            <a:off x="6263640" y="1234440"/>
-            <a:ext cx="91440" cy="1828800"/>
+            <a:off x="822960" y="4160520"/>
+            <a:ext cx="91440" cy="868680"/>
           </a:xfrm>
           <a:prstGeom prst="rect">
             <a:avLst/>
           </a:prstGeom>
           <a:solidFill>
-            <a:srgbClr val="02C39A"/>
+            <a:srgbClr val="F9B700"/>
           </a:solidFill>
           <a:ln>
             <a:noFill/>
@@ -6541,14 +6573,14 @@
       </p:sp>
       <p:sp>
         <p:nvSpPr>
-          <p:cNvPr id="10" name="TextBox 9"/>
+          <p:cNvPr id="13" name="TextBox 12"/>
           <p:cNvSpPr txBox="1"/>
           <p:nvPr/>
         </p:nvSpPr>
         <p:spPr>
           <a:xfrm>
-            <a:off x="6446520" y="1344168"/>
-            <a:ext cx="4983480" cy="1664208"/>
+            <a:off x="1005840" y="4270248"/>
+            <a:ext cx="10104120" cy="704088"/>
           </a:xfrm>
           <a:prstGeom prst="rect">
             <a:avLst/>
@@ -6570,167 +6602,7 @@
               </a:defRPr>
             </a:pPr>
             <a:r>
-              <a:t>Why it helps</a:t>
-            </a:r>
-          </a:p>
-          <a:p>
-            <a:pPr>
-              <a:spcBef>
-                <a:spcPts val="400"/>
-              </a:spcBef>
-              <a:defRPr sz="1050">
-                <a:solidFill>
-                  <a:srgbClr val="242424"/>
-                </a:solidFill>
-                <a:latin typeface="Aptos"/>
-              </a:defRPr>
-            </a:pPr>
-            <a:r>
-              <a:t>• Icon and data bar usage</a:t>
-            </a:r>
-            <a:br/>
-            <a:r>
-              <a:t>• Avoiding over-formatting</a:t>
-            </a:r>
-          </a:p>
-        </p:txBody>
-      </p:sp>
-      <p:sp>
-        <p:nvSpPr>
-          <p:cNvPr id="11" name="Rounded Rectangle 10"/>
-          <p:cNvSpPr/>
-          <p:nvPr/>
-        </p:nvSpPr>
-        <p:spPr>
-          <a:xfrm>
-            <a:off x="822960" y="4160520"/>
-            <a:ext cx="10424160" cy="868680"/>
-          </a:xfrm>
-          <a:prstGeom prst="roundRect">
-            <a:avLst/>
-          </a:prstGeom>
-          <a:solidFill>
-            <a:srgbClr val="FFFFFF"/>
-          </a:solidFill>
-          <a:ln>
-            <a:solidFill>
-              <a:srgbClr val="DCDCDC"/>
-            </a:solidFill>
-          </a:ln>
-        </p:spPr>
-        <p:style>
-          <a:lnRef idx="1">
-            <a:schemeClr val="accent1"/>
-          </a:lnRef>
-          <a:fillRef idx="3">
-            <a:schemeClr val="accent1"/>
-          </a:fillRef>
-          <a:effectRef idx="2">
-            <a:schemeClr val="accent1"/>
-          </a:effectRef>
-          <a:fontRef idx="minor">
-            <a:schemeClr val="lt1"/>
-          </a:fontRef>
-        </p:style>
-        <p:txBody>
-          <a:bodyPr rtlCol="0" anchor="ctr"/>
-          <a:lstStyle/>
-          <a:p>
-            <a:pPr algn="ctr"/>
-          </a:p>
-        </p:txBody>
-      </p:sp>
-      <p:sp>
-        <p:nvSpPr>
-          <p:cNvPr id="12" name="Rectangle 11"/>
-          <p:cNvSpPr/>
-          <p:nvPr/>
-        </p:nvSpPr>
-        <p:spPr>
-          <a:xfrm>
-            <a:off x="822960" y="4160520"/>
-            <a:ext cx="91440" cy="868680"/>
-          </a:xfrm>
-          <a:prstGeom prst="rect">
-            <a:avLst/>
-          </a:prstGeom>
-          <a:solidFill>
-            <a:srgbClr val="F9B700"/>
-          </a:solidFill>
-          <a:ln>
-            <a:noFill/>
-          </a:ln>
-        </p:spPr>
-        <p:style>
-          <a:lnRef idx="1">
-            <a:schemeClr val="accent1"/>
-          </a:lnRef>
-          <a:fillRef idx="3">
-            <a:schemeClr val="accent1"/>
-          </a:fillRef>
-          <a:effectRef idx="2">
-            <a:schemeClr val="accent1"/>
-          </a:effectRef>
-          <a:fontRef idx="minor">
-            <a:schemeClr val="lt1"/>
-          </a:fontRef>
-        </p:style>
-        <p:txBody>
-          <a:bodyPr rtlCol="0" anchor="ctr"/>
-          <a:lstStyle/>
-          <a:p>
-            <a:pPr algn="ctr"/>
-          </a:p>
-        </p:txBody>
-      </p:sp>
-      <p:sp>
-        <p:nvSpPr>
-          <p:cNvPr id="13" name="TextBox 12"/>
-          <p:cNvSpPr txBox="1"/>
-          <p:nvPr/>
-        </p:nvSpPr>
-        <p:spPr>
-          <a:xfrm>
-            <a:off x="1005840" y="4270248"/>
-            <a:ext cx="10104120" cy="704088"/>
-          </a:xfrm>
-          <a:prstGeom prst="rect">
-            <a:avLst/>
-          </a:prstGeom>
-          <a:noFill/>
-        </p:spPr>
-        <p:txBody>
-          <a:bodyPr wrap="square" lIns="0" rIns="0">
-            <a:spAutoFit/>
-          </a:bodyPr>
-          <a:lstStyle/>
-          <a:p>
-            <a:pPr>
-              <a:defRPr b="1" sz="1500">
-                <a:solidFill>
-                  <a:srgbClr val="1E2761"/>
-                </a:solidFill>
-                <a:latin typeface="Aptos Display"/>
-              </a:defRPr>
-            </a:pPr>
-            <a:r>
-              <a:t>Lab connection</a:t>
-            </a:r>
-          </a:p>
-          <a:p>
-            <a:pPr>
-              <a:spcBef>
-                <a:spcPts val="400"/>
-              </a:spcBef>
-              <a:defRPr sz="1050">
-                <a:solidFill>
-                  <a:srgbClr val="242424"/>
-                </a:solidFill>
-                <a:latin typeface="Aptos"/>
-              </a:defRPr>
-            </a:pPr>
-            <a:r>
-              <a:t>Coverage: Covered. Use the lab README to demonstrate or discuss this topic. Review terms: avoiding, usage.</a:t>
+              <a:t>In the lab, you will apply this pattern, validate the expected behavior, and discuss where it fits in a real Power BI solution.</a:t>
             </a:r>
           </a:p>
         </p:txBody>
@@ -6869,42 +6741,6 @@
       </p:sp>
       <p:sp>
         <p:nvSpPr>
-          <p:cNvPr id="4" name="TextBox 3"/>
-          <p:cNvSpPr txBox="1"/>
-          <p:nvPr/>
-        </p:nvSpPr>
-        <p:spPr>
-          <a:xfrm>
-            <a:off x="530352" y="914400"/>
-            <a:ext cx="10515600" cy="320040"/>
-          </a:xfrm>
-          <a:prstGeom prst="rect">
-            <a:avLst/>
-          </a:prstGeom>
-          <a:noFill/>
-        </p:spPr>
-        <p:txBody>
-          <a:bodyPr wrap="none">
-            <a:spAutoFit/>
-          </a:bodyPr>
-          <a:lstStyle/>
-          <a:p>
-            <a:pPr>
-              <a:defRPr sz="1200">
-                <a:solidFill>
-                  <a:srgbClr val="5C5C5C"/>
-                </a:solidFill>
-                <a:latin typeface="Aptos"/>
-              </a:defRPr>
-            </a:pPr>
-            <a:r>
-              <a:t>Talking points, learner value, and lab connection</a:t>
-            </a:r>
-          </a:p>
-        </p:txBody>
-      </p:sp>
-      <p:sp>
-        <p:nvSpPr>
           <p:cNvPr id="5" name="Rounded Rectangle 4"/>
           <p:cNvSpPr/>
           <p:nvPr/>
@@ -7022,7 +6858,139 @@
               </a:defRPr>
             </a:pPr>
             <a:r>
-              <a:t>Talking points</a:t>
+              <a:t>Key ideas</a:t>
+            </a:r>
+            <a:br/>
+            <a:r>
+              <a:t>• Mobile-specific design</a:t>
+            </a:r>
+            <a:br/>
+            <a:r>
+              <a:t>• Touch targets</a:t>
+            </a:r>
+          </a:p>
+        </p:txBody>
+      </p:sp>
+      <p:sp>
+        <p:nvSpPr>
+          <p:cNvPr id="8" name="Rounded Rectangle 7"/>
+          <p:cNvSpPr/>
+          <p:nvPr/>
+        </p:nvSpPr>
+        <p:spPr>
+          <a:xfrm>
+            <a:off x="6263640" y="1234440"/>
+            <a:ext cx="5303520" cy="1828800"/>
+          </a:xfrm>
+          <a:prstGeom prst="roundRect">
+            <a:avLst/>
+          </a:prstGeom>
+          <a:solidFill>
+            <a:srgbClr val="FFFFFF"/>
+          </a:solidFill>
+          <a:ln>
+            <a:solidFill>
+              <a:srgbClr val="DCDCDC"/>
+            </a:solidFill>
+          </a:ln>
+        </p:spPr>
+        <p:style>
+          <a:lnRef idx="1">
+            <a:schemeClr val="accent1"/>
+          </a:lnRef>
+          <a:fillRef idx="3">
+            <a:schemeClr val="accent1"/>
+          </a:fillRef>
+          <a:effectRef idx="2">
+            <a:schemeClr val="accent1"/>
+          </a:effectRef>
+          <a:fontRef idx="minor">
+            <a:schemeClr val="lt1"/>
+          </a:fontRef>
+        </p:style>
+        <p:txBody>
+          <a:bodyPr rtlCol="0" anchor="ctr"/>
+          <a:lstStyle/>
+          <a:p>
+            <a:pPr algn="ctr"/>
+          </a:p>
+        </p:txBody>
+      </p:sp>
+      <p:sp>
+        <p:nvSpPr>
+          <p:cNvPr id="9" name="Rectangle 8"/>
+          <p:cNvSpPr/>
+          <p:nvPr/>
+        </p:nvSpPr>
+        <p:spPr>
+          <a:xfrm>
+            <a:off x="6263640" y="1234440"/>
+            <a:ext cx="91440" cy="1828800"/>
+          </a:xfrm>
+          <a:prstGeom prst="rect">
+            <a:avLst/>
+          </a:prstGeom>
+          <a:solidFill>
+            <a:srgbClr val="02C39A"/>
+          </a:solidFill>
+          <a:ln>
+            <a:noFill/>
+          </a:ln>
+        </p:spPr>
+        <p:style>
+          <a:lnRef idx="1">
+            <a:schemeClr val="accent1"/>
+          </a:lnRef>
+          <a:fillRef idx="3">
+            <a:schemeClr val="accent1"/>
+          </a:fillRef>
+          <a:effectRef idx="2">
+            <a:schemeClr val="accent1"/>
+          </a:effectRef>
+          <a:fontRef idx="minor">
+            <a:schemeClr val="lt1"/>
+          </a:fontRef>
+        </p:style>
+        <p:txBody>
+          <a:bodyPr rtlCol="0" anchor="ctr"/>
+          <a:lstStyle/>
+          <a:p>
+            <a:pPr algn="ctr"/>
+          </a:p>
+        </p:txBody>
+      </p:sp>
+      <p:sp>
+        <p:nvSpPr>
+          <p:cNvPr id="10" name="TextBox 9"/>
+          <p:cNvSpPr txBox="1"/>
+          <p:nvPr/>
+        </p:nvSpPr>
+        <p:spPr>
+          <a:xfrm>
+            <a:off x="6446520" y="1344168"/>
+            <a:ext cx="4983480" cy="1664208"/>
+          </a:xfrm>
+          <a:prstGeom prst="rect">
+            <a:avLst/>
+          </a:prstGeom>
+          <a:noFill/>
+        </p:spPr>
+        <p:txBody>
+          <a:bodyPr wrap="square" lIns="0" rIns="0">
+            <a:spAutoFit/>
+          </a:bodyPr>
+          <a:lstStyle/>
+          <a:p>
+            <a:pPr>
+              <a:defRPr b="1" sz="1500">
+                <a:solidFill>
+                  <a:srgbClr val="1E2761"/>
+                </a:solidFill>
+                <a:latin typeface="Aptos Display"/>
+              </a:defRPr>
+            </a:pPr>
+            <a:r>
+              <a:t>Why it helps</a:t>
             </a:r>
           </a:p>
           <a:p>
@@ -7038,25 +7006,25 @@
               </a:defRPr>
             </a:pPr>
             <a:r>
-              <a:t>• Mobile-specific design</a:t>
+              <a:t>• Visual prioritization</a:t>
             </a:r>
             <a:br/>
             <a:r>
-              <a:t>• Touch targets</a:t>
-            </a:r>
-          </a:p>
-        </p:txBody>
-      </p:sp>
-      <p:sp>
-        <p:nvSpPr>
-          <p:cNvPr id="8" name="Rounded Rectangle 7"/>
+              <a:t>• Validation</a:t>
+            </a:r>
+          </a:p>
+        </p:txBody>
+      </p:sp>
+      <p:sp>
+        <p:nvSpPr>
+          <p:cNvPr id="11" name="Rounded Rectangle 10"/>
           <p:cNvSpPr/>
           <p:nvPr/>
         </p:nvSpPr>
         <p:spPr>
           <a:xfrm>
-            <a:off x="6263640" y="1234440"/>
-            <a:ext cx="5303520" cy="1828800"/>
+            <a:off x="822960" y="4160520"/>
+            <a:ext cx="10424160" cy="868680"/>
           </a:xfrm>
           <a:prstGeom prst="roundRect">
             <a:avLst/>
@@ -7094,20 +7062,20 @@
       </p:sp>
       <p:sp>
         <p:nvSpPr>
-          <p:cNvPr id="9" name="Rectangle 8"/>
+          <p:cNvPr id="12" name="Rectangle 11"/>
           <p:cNvSpPr/>
           <p:nvPr/>
         </p:nvSpPr>
         <p:spPr>
           <a:xfrm>
-            <a:off x="6263640" y="1234440"/>
-            <a:ext cx="91440" cy="1828800"/>
+            <a:off x="822960" y="4160520"/>
+            <a:ext cx="91440" cy="868680"/>
           </a:xfrm>
           <a:prstGeom prst="rect">
             <a:avLst/>
           </a:prstGeom>
           <a:solidFill>
-            <a:srgbClr val="02C39A"/>
+            <a:srgbClr val="F9B700"/>
           </a:solidFill>
           <a:ln>
             <a:noFill/>
@@ -7137,14 +7105,14 @@
       </p:sp>
       <p:sp>
         <p:nvSpPr>
-          <p:cNvPr id="10" name="TextBox 9"/>
+          <p:cNvPr id="13" name="TextBox 12"/>
           <p:cNvSpPr txBox="1"/>
           <p:nvPr/>
         </p:nvSpPr>
         <p:spPr>
           <a:xfrm>
-            <a:off x="6446520" y="1344168"/>
-            <a:ext cx="4983480" cy="1664208"/>
+            <a:off x="1005840" y="4270248"/>
+            <a:ext cx="10104120" cy="704088"/>
           </a:xfrm>
           <a:prstGeom prst="rect">
             <a:avLst/>
@@ -7166,167 +7134,7 @@
               </a:defRPr>
             </a:pPr>
             <a:r>
-              <a:t>Why it helps</a:t>
-            </a:r>
-          </a:p>
-          <a:p>
-            <a:pPr>
-              <a:spcBef>
-                <a:spcPts val="400"/>
-              </a:spcBef>
-              <a:defRPr sz="1050">
-                <a:solidFill>
-                  <a:srgbClr val="242424"/>
-                </a:solidFill>
-                <a:latin typeface="Aptos"/>
-              </a:defRPr>
-            </a:pPr>
-            <a:r>
-              <a:t>• Visual prioritization</a:t>
-            </a:r>
-            <a:br/>
-            <a:r>
-              <a:t>• Validation</a:t>
-            </a:r>
-          </a:p>
-        </p:txBody>
-      </p:sp>
-      <p:sp>
-        <p:nvSpPr>
-          <p:cNvPr id="11" name="Rounded Rectangle 10"/>
-          <p:cNvSpPr/>
-          <p:nvPr/>
-        </p:nvSpPr>
-        <p:spPr>
-          <a:xfrm>
-            <a:off x="822960" y="4160520"/>
-            <a:ext cx="10424160" cy="868680"/>
-          </a:xfrm>
-          <a:prstGeom prst="roundRect">
-            <a:avLst/>
-          </a:prstGeom>
-          <a:solidFill>
-            <a:srgbClr val="FFFFFF"/>
-          </a:solidFill>
-          <a:ln>
-            <a:solidFill>
-              <a:srgbClr val="DCDCDC"/>
-            </a:solidFill>
-          </a:ln>
-        </p:spPr>
-        <p:style>
-          <a:lnRef idx="1">
-            <a:schemeClr val="accent1"/>
-          </a:lnRef>
-          <a:fillRef idx="3">
-            <a:schemeClr val="accent1"/>
-          </a:fillRef>
-          <a:effectRef idx="2">
-            <a:schemeClr val="accent1"/>
-          </a:effectRef>
-          <a:fontRef idx="minor">
-            <a:schemeClr val="lt1"/>
-          </a:fontRef>
-        </p:style>
-        <p:txBody>
-          <a:bodyPr rtlCol="0" anchor="ctr"/>
-          <a:lstStyle/>
-          <a:p>
-            <a:pPr algn="ctr"/>
-          </a:p>
-        </p:txBody>
-      </p:sp>
-      <p:sp>
-        <p:nvSpPr>
-          <p:cNvPr id="12" name="Rectangle 11"/>
-          <p:cNvSpPr/>
-          <p:nvPr/>
-        </p:nvSpPr>
-        <p:spPr>
-          <a:xfrm>
-            <a:off x="822960" y="4160520"/>
-            <a:ext cx="91440" cy="868680"/>
-          </a:xfrm>
-          <a:prstGeom prst="rect">
-            <a:avLst/>
-          </a:prstGeom>
-          <a:solidFill>
-            <a:srgbClr val="F9B700"/>
-          </a:solidFill>
-          <a:ln>
-            <a:noFill/>
-          </a:ln>
-        </p:spPr>
-        <p:style>
-          <a:lnRef idx="1">
-            <a:schemeClr val="accent1"/>
-          </a:lnRef>
-          <a:fillRef idx="3">
-            <a:schemeClr val="accent1"/>
-          </a:fillRef>
-          <a:effectRef idx="2">
-            <a:schemeClr val="accent1"/>
-          </a:effectRef>
-          <a:fontRef idx="minor">
-            <a:schemeClr val="lt1"/>
-          </a:fontRef>
-        </p:style>
-        <p:txBody>
-          <a:bodyPr rtlCol="0" anchor="ctr"/>
-          <a:lstStyle/>
-          <a:p>
-            <a:pPr algn="ctr"/>
-          </a:p>
-        </p:txBody>
-      </p:sp>
-      <p:sp>
-        <p:nvSpPr>
-          <p:cNvPr id="13" name="TextBox 12"/>
-          <p:cNvSpPr txBox="1"/>
-          <p:nvPr/>
-        </p:nvSpPr>
-        <p:spPr>
-          <a:xfrm>
-            <a:off x="1005840" y="4270248"/>
-            <a:ext cx="10104120" cy="704088"/>
-          </a:xfrm>
-          <a:prstGeom prst="rect">
-            <a:avLst/>
-          </a:prstGeom>
-          <a:noFill/>
-        </p:spPr>
-        <p:txBody>
-          <a:bodyPr wrap="square" lIns="0" rIns="0">
-            <a:spAutoFit/>
-          </a:bodyPr>
-          <a:lstStyle/>
-          <a:p>
-            <a:pPr>
-              <a:defRPr b="1" sz="1500">
-                <a:solidFill>
-                  <a:srgbClr val="1E2761"/>
-                </a:solidFill>
-                <a:latin typeface="Aptos Display"/>
-              </a:defRPr>
-            </a:pPr>
-            <a:r>
-              <a:t>Lab connection</a:t>
-            </a:r>
-          </a:p>
-          <a:p>
-            <a:pPr>
-              <a:spcBef>
-                <a:spcPts val="400"/>
-              </a:spcBef>
-              <a:defRPr sz="1050">
-                <a:solidFill>
-                  <a:srgbClr val="242424"/>
-                </a:solidFill>
-                <a:latin typeface="Aptos"/>
-              </a:defRPr>
-            </a:pPr>
-            <a:r>
-              <a:t>Coverage: Covered. Use the lab README to demonstrate or discuss this topic. Review terms: prioritization, specific, touch.</a:t>
+              <a:t>In the lab, you will apply this pattern, validate the expected behavior, and discuss where it fits in a real Power BI solution.</a:t>
             </a:r>
           </a:p>
         </p:txBody>
@@ -7465,42 +7273,6 @@
       </p:sp>
       <p:sp>
         <p:nvSpPr>
-          <p:cNvPr id="4" name="TextBox 3"/>
-          <p:cNvSpPr txBox="1"/>
-          <p:nvPr/>
-        </p:nvSpPr>
-        <p:spPr>
-          <a:xfrm>
-            <a:off x="530352" y="914400"/>
-            <a:ext cx="10515600" cy="320040"/>
-          </a:xfrm>
-          <a:prstGeom prst="rect">
-            <a:avLst/>
-          </a:prstGeom>
-          <a:noFill/>
-        </p:spPr>
-        <p:txBody>
-          <a:bodyPr wrap="none">
-            <a:spAutoFit/>
-          </a:bodyPr>
-          <a:lstStyle/>
-          <a:p>
-            <a:pPr>
-              <a:defRPr sz="1200">
-                <a:solidFill>
-                  <a:srgbClr val="5C5C5C"/>
-                </a:solidFill>
-                <a:latin typeface="Aptos"/>
-              </a:defRPr>
-            </a:pPr>
-            <a:r>
-              <a:t>Talking points, learner value, and lab connection</a:t>
-            </a:r>
-          </a:p>
-        </p:txBody>
-      </p:sp>
-      <p:sp>
-        <p:nvSpPr>
           <p:cNvPr id="5" name="Rounded Rectangle 4"/>
           <p:cNvSpPr/>
           <p:nvPr/>
@@ -7618,7 +7390,143 @@
               </a:defRPr>
             </a:pPr>
             <a:r>
-              <a:t>Talking points</a:t>
+              <a:t>Key ideas</a:t>
+            </a:r>
+            <a:br/>
+            <a:r>
+              <a:t>• Alt text</a:t>
+            </a:r>
+            <a:br/>
+            <a:r>
+              <a:t>• Tab order</a:t>
+            </a:r>
+            <a:br/>
+            <a:r>
+              <a:t>• Contrast</a:t>
+            </a:r>
+          </a:p>
+        </p:txBody>
+      </p:sp>
+      <p:sp>
+        <p:nvSpPr>
+          <p:cNvPr id="8" name="Rounded Rectangle 7"/>
+          <p:cNvSpPr/>
+          <p:nvPr/>
+        </p:nvSpPr>
+        <p:spPr>
+          <a:xfrm>
+            <a:off x="6263640" y="1234440"/>
+            <a:ext cx="5303520" cy="1828800"/>
+          </a:xfrm>
+          <a:prstGeom prst="roundRect">
+            <a:avLst/>
+          </a:prstGeom>
+          <a:solidFill>
+            <a:srgbClr val="FFFFFF"/>
+          </a:solidFill>
+          <a:ln>
+            <a:solidFill>
+              <a:srgbClr val="DCDCDC"/>
+            </a:solidFill>
+          </a:ln>
+        </p:spPr>
+        <p:style>
+          <a:lnRef idx="1">
+            <a:schemeClr val="accent1"/>
+          </a:lnRef>
+          <a:fillRef idx="3">
+            <a:schemeClr val="accent1"/>
+          </a:fillRef>
+          <a:effectRef idx="2">
+            <a:schemeClr val="accent1"/>
+          </a:effectRef>
+          <a:fontRef idx="minor">
+            <a:schemeClr val="lt1"/>
+          </a:fontRef>
+        </p:style>
+        <p:txBody>
+          <a:bodyPr rtlCol="0" anchor="ctr"/>
+          <a:lstStyle/>
+          <a:p>
+            <a:pPr algn="ctr"/>
+          </a:p>
+        </p:txBody>
+      </p:sp>
+      <p:sp>
+        <p:nvSpPr>
+          <p:cNvPr id="9" name="Rectangle 8"/>
+          <p:cNvSpPr/>
+          <p:nvPr/>
+        </p:nvSpPr>
+        <p:spPr>
+          <a:xfrm>
+            <a:off x="6263640" y="1234440"/>
+            <a:ext cx="91440" cy="1828800"/>
+          </a:xfrm>
+          <a:prstGeom prst="rect">
+            <a:avLst/>
+          </a:prstGeom>
+          <a:solidFill>
+            <a:srgbClr val="02C39A"/>
+          </a:solidFill>
+          <a:ln>
+            <a:noFill/>
+          </a:ln>
+        </p:spPr>
+        <p:style>
+          <a:lnRef idx="1">
+            <a:schemeClr val="accent1"/>
+          </a:lnRef>
+          <a:fillRef idx="3">
+            <a:schemeClr val="accent1"/>
+          </a:fillRef>
+          <a:effectRef idx="2">
+            <a:schemeClr val="accent1"/>
+          </a:effectRef>
+          <a:fontRef idx="minor">
+            <a:schemeClr val="lt1"/>
+          </a:fontRef>
+        </p:style>
+        <p:txBody>
+          <a:bodyPr rtlCol="0" anchor="ctr"/>
+          <a:lstStyle/>
+          <a:p>
+            <a:pPr algn="ctr"/>
+          </a:p>
+        </p:txBody>
+      </p:sp>
+      <p:sp>
+        <p:nvSpPr>
+          <p:cNvPr id="10" name="TextBox 9"/>
+          <p:cNvSpPr txBox="1"/>
+          <p:nvPr/>
+        </p:nvSpPr>
+        <p:spPr>
+          <a:xfrm>
+            <a:off x="6446520" y="1344168"/>
+            <a:ext cx="4983480" cy="1664208"/>
+          </a:xfrm>
+          <a:prstGeom prst="rect">
+            <a:avLst/>
+          </a:prstGeom>
+          <a:noFill/>
+        </p:spPr>
+        <p:txBody>
+          <a:bodyPr wrap="square" lIns="0" rIns="0">
+            <a:spAutoFit/>
+          </a:bodyPr>
+          <a:lstStyle/>
+          <a:p>
+            <a:pPr>
+              <a:defRPr b="1" sz="1500">
+                <a:solidFill>
+                  <a:srgbClr val="1E2761"/>
+                </a:solidFill>
+                <a:latin typeface="Aptos Display"/>
+              </a:defRPr>
+            </a:pPr>
+            <a:r>
+              <a:t>Why it helps</a:t>
             </a:r>
           </a:p>
           <a:p>
@@ -7634,29 +7542,25 @@
               </a:defRPr>
             </a:pPr>
             <a:r>
-              <a:t>• Alt text</a:t>
+              <a:t>• Keyboard navigation</a:t>
             </a:r>
             <a:br/>
             <a:r>
-              <a:t>• Tab order</a:t>
-            </a:r>
-            <a:br/>
-            <a:r>
-              <a:t>• Contrast</a:t>
-            </a:r>
-          </a:p>
-        </p:txBody>
-      </p:sp>
-      <p:sp>
-        <p:nvSpPr>
-          <p:cNvPr id="8" name="Rounded Rectangle 7"/>
+              <a:t>• Clear visual titles</a:t>
+            </a:r>
+          </a:p>
+        </p:txBody>
+      </p:sp>
+      <p:sp>
+        <p:nvSpPr>
+          <p:cNvPr id="11" name="Rounded Rectangle 10"/>
           <p:cNvSpPr/>
           <p:nvPr/>
         </p:nvSpPr>
         <p:spPr>
           <a:xfrm>
-            <a:off x="6263640" y="1234440"/>
-            <a:ext cx="5303520" cy="1828800"/>
+            <a:off x="822960" y="4160520"/>
+            <a:ext cx="10424160" cy="868680"/>
           </a:xfrm>
           <a:prstGeom prst="roundRect">
             <a:avLst/>
@@ -7694,20 +7598,20 @@
       </p:sp>
       <p:sp>
         <p:nvSpPr>
-          <p:cNvPr id="9" name="Rectangle 8"/>
+          <p:cNvPr id="12" name="Rectangle 11"/>
           <p:cNvSpPr/>
           <p:nvPr/>
         </p:nvSpPr>
         <p:spPr>
           <a:xfrm>
-            <a:off x="6263640" y="1234440"/>
-            <a:ext cx="91440" cy="1828800"/>
+            <a:off x="822960" y="4160520"/>
+            <a:ext cx="91440" cy="868680"/>
           </a:xfrm>
           <a:prstGeom prst="rect">
             <a:avLst/>
           </a:prstGeom>
           <a:solidFill>
-            <a:srgbClr val="02C39A"/>
+            <a:srgbClr val="F9B700"/>
           </a:solidFill>
           <a:ln>
             <a:noFill/>
@@ -7737,14 +7641,14 @@
       </p:sp>
       <p:sp>
         <p:nvSpPr>
-          <p:cNvPr id="10" name="TextBox 9"/>
+          <p:cNvPr id="13" name="TextBox 12"/>
           <p:cNvSpPr txBox="1"/>
           <p:nvPr/>
         </p:nvSpPr>
         <p:spPr>
           <a:xfrm>
-            <a:off x="6446520" y="1344168"/>
-            <a:ext cx="4983480" cy="1664208"/>
+            <a:off x="1005840" y="4270248"/>
+            <a:ext cx="10104120" cy="704088"/>
           </a:xfrm>
           <a:prstGeom prst="rect">
             <a:avLst/>
@@ -7766,167 +7670,7 @@
               </a:defRPr>
             </a:pPr>
             <a:r>
-              <a:t>Why it helps</a:t>
-            </a:r>
-          </a:p>
-          <a:p>
-            <a:pPr>
-              <a:spcBef>
-                <a:spcPts val="400"/>
-              </a:spcBef>
-              <a:defRPr sz="1050">
-                <a:solidFill>
-                  <a:srgbClr val="242424"/>
-                </a:solidFill>
-                <a:latin typeface="Aptos"/>
-              </a:defRPr>
-            </a:pPr>
-            <a:r>
-              <a:t>• Keyboard navigation</a:t>
-            </a:r>
-            <a:br/>
-            <a:r>
-              <a:t>• Clear visual titles</a:t>
-            </a:r>
-          </a:p>
-        </p:txBody>
-      </p:sp>
-      <p:sp>
-        <p:nvSpPr>
-          <p:cNvPr id="11" name="Rounded Rectangle 10"/>
-          <p:cNvSpPr/>
-          <p:nvPr/>
-        </p:nvSpPr>
-        <p:spPr>
-          <a:xfrm>
-            <a:off x="822960" y="4160520"/>
-            <a:ext cx="10424160" cy="868680"/>
-          </a:xfrm>
-          <a:prstGeom prst="roundRect">
-            <a:avLst/>
-          </a:prstGeom>
-          <a:solidFill>
-            <a:srgbClr val="FFFFFF"/>
-          </a:solidFill>
-          <a:ln>
-            <a:solidFill>
-              <a:srgbClr val="DCDCDC"/>
-            </a:solidFill>
-          </a:ln>
-        </p:spPr>
-        <p:style>
-          <a:lnRef idx="1">
-            <a:schemeClr val="accent1"/>
-          </a:lnRef>
-          <a:fillRef idx="3">
-            <a:schemeClr val="accent1"/>
-          </a:fillRef>
-          <a:effectRef idx="2">
-            <a:schemeClr val="accent1"/>
-          </a:effectRef>
-          <a:fontRef idx="minor">
-            <a:schemeClr val="lt1"/>
-          </a:fontRef>
-        </p:style>
-        <p:txBody>
-          <a:bodyPr rtlCol="0" anchor="ctr"/>
-          <a:lstStyle/>
-          <a:p>
-            <a:pPr algn="ctr"/>
-          </a:p>
-        </p:txBody>
-      </p:sp>
-      <p:sp>
-        <p:nvSpPr>
-          <p:cNvPr id="12" name="Rectangle 11"/>
-          <p:cNvSpPr/>
-          <p:nvPr/>
-        </p:nvSpPr>
-        <p:spPr>
-          <a:xfrm>
-            <a:off x="822960" y="4160520"/>
-            <a:ext cx="91440" cy="868680"/>
-          </a:xfrm>
-          <a:prstGeom prst="rect">
-            <a:avLst/>
-          </a:prstGeom>
-          <a:solidFill>
-            <a:srgbClr val="F9B700"/>
-          </a:solidFill>
-          <a:ln>
-            <a:noFill/>
-          </a:ln>
-        </p:spPr>
-        <p:style>
-          <a:lnRef idx="1">
-            <a:schemeClr val="accent1"/>
-          </a:lnRef>
-          <a:fillRef idx="3">
-            <a:schemeClr val="accent1"/>
-          </a:fillRef>
-          <a:effectRef idx="2">
-            <a:schemeClr val="accent1"/>
-          </a:effectRef>
-          <a:fontRef idx="minor">
-            <a:schemeClr val="lt1"/>
-          </a:fontRef>
-        </p:style>
-        <p:txBody>
-          <a:bodyPr rtlCol="0" anchor="ctr"/>
-          <a:lstStyle/>
-          <a:p>
-            <a:pPr algn="ctr"/>
-          </a:p>
-        </p:txBody>
-      </p:sp>
-      <p:sp>
-        <p:nvSpPr>
-          <p:cNvPr id="13" name="TextBox 12"/>
-          <p:cNvSpPr txBox="1"/>
-          <p:nvPr/>
-        </p:nvSpPr>
-        <p:spPr>
-          <a:xfrm>
-            <a:off x="1005840" y="4270248"/>
-            <a:ext cx="10104120" cy="704088"/>
-          </a:xfrm>
-          <a:prstGeom prst="rect">
-            <a:avLst/>
-          </a:prstGeom>
-          <a:noFill/>
-        </p:spPr>
-        <p:txBody>
-          <a:bodyPr wrap="square" lIns="0" rIns="0">
-            <a:spAutoFit/>
-          </a:bodyPr>
-          <a:lstStyle/>
-          <a:p>
-            <a:pPr>
-              <a:defRPr b="1" sz="1500">
-                <a:solidFill>
-                  <a:srgbClr val="1E2761"/>
-                </a:solidFill>
-                <a:latin typeface="Aptos Display"/>
-              </a:defRPr>
-            </a:pPr>
-            <a:r>
-              <a:t>Lab connection</a:t>
-            </a:r>
-          </a:p>
-          <a:p>
-            <a:pPr>
-              <a:spcBef>
-                <a:spcPts val="400"/>
-              </a:spcBef>
-              <a:defRPr sz="1050">
-                <a:solidFill>
-                  <a:srgbClr val="242424"/>
-                </a:solidFill>
-                <a:latin typeface="Aptos"/>
-              </a:defRPr>
-            </a:pPr>
-            <a:r>
-              <a:t>Coverage: Covered. Use the lab README to demonstrate or discuss this topic. Review terms: keyboard.</a:t>
+              <a:t>In the lab, you will apply this pattern, validate the expected behavior, and discuss where it fits in a real Power BI solution.</a:t>
             </a:r>
           </a:p>
         </p:txBody>
@@ -8065,42 +7809,6 @@
       </p:sp>
       <p:sp>
         <p:nvSpPr>
-          <p:cNvPr id="4" name="TextBox 3"/>
-          <p:cNvSpPr txBox="1"/>
-          <p:nvPr/>
-        </p:nvSpPr>
-        <p:spPr>
-          <a:xfrm>
-            <a:off x="530352" y="914400"/>
-            <a:ext cx="10515600" cy="320040"/>
-          </a:xfrm>
-          <a:prstGeom prst="rect">
-            <a:avLst/>
-          </a:prstGeom>
-          <a:noFill/>
-        </p:spPr>
-        <p:txBody>
-          <a:bodyPr wrap="none">
-            <a:spAutoFit/>
-          </a:bodyPr>
-          <a:lstStyle/>
-          <a:p>
-            <a:pPr>
-              <a:defRPr sz="1200">
-                <a:solidFill>
-                  <a:srgbClr val="5C5C5C"/>
-                </a:solidFill>
-                <a:latin typeface="Aptos"/>
-              </a:defRPr>
-            </a:pPr>
-            <a:r>
-              <a:t>Talking points, learner value, and lab connection</a:t>
-            </a:r>
-          </a:p>
-        </p:txBody>
-      </p:sp>
-      <p:sp>
-        <p:nvSpPr>
           <p:cNvPr id="5" name="Rounded Rectangle 4"/>
           <p:cNvSpPr/>
           <p:nvPr/>
@@ -8218,7 +7926,139 @@
               </a:defRPr>
             </a:pPr>
             <a:r>
-              <a:t>Talking points</a:t>
+              <a:t>Key ideas</a:t>
+            </a:r>
+            <a:br/>
+            <a:r>
+              <a:t>• Core report interactions are Gov-ready.</a:t>
+            </a:r>
+            <a:br/>
+            <a:r>
+              <a:t>• Mobile depends on customer policy.</a:t>
+            </a:r>
+          </a:p>
+        </p:txBody>
+      </p:sp>
+      <p:sp>
+        <p:nvSpPr>
+          <p:cNvPr id="8" name="Rounded Rectangle 7"/>
+          <p:cNvSpPr/>
+          <p:nvPr/>
+        </p:nvSpPr>
+        <p:spPr>
+          <a:xfrm>
+            <a:off x="6263640" y="1234440"/>
+            <a:ext cx="5303520" cy="1828800"/>
+          </a:xfrm>
+          <a:prstGeom prst="roundRect">
+            <a:avLst/>
+          </a:prstGeom>
+          <a:solidFill>
+            <a:srgbClr val="FFFFFF"/>
+          </a:solidFill>
+          <a:ln>
+            <a:solidFill>
+              <a:srgbClr val="DCDCDC"/>
+            </a:solidFill>
+          </a:ln>
+        </p:spPr>
+        <p:style>
+          <a:lnRef idx="1">
+            <a:schemeClr val="accent1"/>
+          </a:lnRef>
+          <a:fillRef idx="3">
+            <a:schemeClr val="accent1"/>
+          </a:fillRef>
+          <a:effectRef idx="2">
+            <a:schemeClr val="accent1"/>
+          </a:effectRef>
+          <a:fontRef idx="minor">
+            <a:schemeClr val="lt1"/>
+          </a:fontRef>
+        </p:style>
+        <p:txBody>
+          <a:bodyPr rtlCol="0" anchor="ctr"/>
+          <a:lstStyle/>
+          <a:p>
+            <a:pPr algn="ctr"/>
+          </a:p>
+        </p:txBody>
+      </p:sp>
+      <p:sp>
+        <p:nvSpPr>
+          <p:cNvPr id="9" name="Rectangle 8"/>
+          <p:cNvSpPr/>
+          <p:nvPr/>
+        </p:nvSpPr>
+        <p:spPr>
+          <a:xfrm>
+            <a:off x="6263640" y="1234440"/>
+            <a:ext cx="91440" cy="1828800"/>
+          </a:xfrm>
+          <a:prstGeom prst="rect">
+            <a:avLst/>
+          </a:prstGeom>
+          <a:solidFill>
+            <a:srgbClr val="02C39A"/>
+          </a:solidFill>
+          <a:ln>
+            <a:noFill/>
+          </a:ln>
+        </p:spPr>
+        <p:style>
+          <a:lnRef idx="1">
+            <a:schemeClr val="accent1"/>
+          </a:lnRef>
+          <a:fillRef idx="3">
+            <a:schemeClr val="accent1"/>
+          </a:fillRef>
+          <a:effectRef idx="2">
+            <a:schemeClr val="accent1"/>
+          </a:effectRef>
+          <a:fontRef idx="minor">
+            <a:schemeClr val="lt1"/>
+          </a:fontRef>
+        </p:style>
+        <p:txBody>
+          <a:bodyPr rtlCol="0" anchor="ctr"/>
+          <a:lstStyle/>
+          <a:p>
+            <a:pPr algn="ctr"/>
+          </a:p>
+        </p:txBody>
+      </p:sp>
+      <p:sp>
+        <p:nvSpPr>
+          <p:cNvPr id="10" name="TextBox 9"/>
+          <p:cNvSpPr txBox="1"/>
+          <p:nvPr/>
+        </p:nvSpPr>
+        <p:spPr>
+          <a:xfrm>
+            <a:off x="6446520" y="1344168"/>
+            <a:ext cx="4983480" cy="1664208"/>
+          </a:xfrm>
+          <a:prstGeom prst="rect">
+            <a:avLst/>
+          </a:prstGeom>
+          <a:noFill/>
+        </p:spPr>
+        <p:txBody>
+          <a:bodyPr wrap="square" lIns="0" rIns="0">
+            <a:spAutoFit/>
+          </a:bodyPr>
+          <a:lstStyle/>
+          <a:p>
+            <a:pPr>
+              <a:defRPr b="1" sz="1500">
+                <a:solidFill>
+                  <a:srgbClr val="1E2761"/>
+                </a:solidFill>
+                <a:latin typeface="Aptos Display"/>
+              </a:defRPr>
+            </a:pPr>
+            <a:r>
+              <a:t>Why it helps</a:t>
             </a:r>
           </a:p>
           <a:p>
@@ -8234,25 +8074,21 @@
               </a:defRPr>
             </a:pPr>
             <a:r>
-              <a:t>• Core report interactions are Gov-ready.</a:t>
-            </a:r>
-            <a:br/>
-            <a:r>
-              <a:t>• Mobile depends on customer policy.</a:t>
-            </a:r>
-          </a:p>
-        </p:txBody>
-      </p:sp>
-      <p:sp>
-        <p:nvSpPr>
-          <p:cNvPr id="8" name="Rounded Rectangle 7"/>
+              <a:t>• Personalized visuals and AI visuals need validation.</a:t>
+            </a:r>
+          </a:p>
+        </p:txBody>
+      </p:sp>
+      <p:sp>
+        <p:nvSpPr>
+          <p:cNvPr id="11" name="Rounded Rectangle 10"/>
           <p:cNvSpPr/>
           <p:nvPr/>
         </p:nvSpPr>
         <p:spPr>
           <a:xfrm>
-            <a:off x="6263640" y="1234440"/>
-            <a:ext cx="5303520" cy="1828800"/>
+            <a:off x="822960" y="4160520"/>
+            <a:ext cx="10424160" cy="868680"/>
           </a:xfrm>
           <a:prstGeom prst="roundRect">
             <a:avLst/>
@@ -8290,20 +8126,20 @@
       </p:sp>
       <p:sp>
         <p:nvSpPr>
-          <p:cNvPr id="9" name="Rectangle 8"/>
+          <p:cNvPr id="12" name="Rectangle 11"/>
           <p:cNvSpPr/>
           <p:nvPr/>
         </p:nvSpPr>
         <p:spPr>
           <a:xfrm>
-            <a:off x="6263640" y="1234440"/>
-            <a:ext cx="91440" cy="1828800"/>
+            <a:off x="822960" y="4160520"/>
+            <a:ext cx="91440" cy="868680"/>
           </a:xfrm>
           <a:prstGeom prst="rect">
             <a:avLst/>
           </a:prstGeom>
           <a:solidFill>
-            <a:srgbClr val="02C39A"/>
+            <a:srgbClr val="F9B700"/>
           </a:solidFill>
           <a:ln>
             <a:noFill/>
@@ -8333,14 +8169,14 @@
       </p:sp>
       <p:sp>
         <p:nvSpPr>
-          <p:cNvPr id="10" name="TextBox 9"/>
+          <p:cNvPr id="13" name="TextBox 12"/>
           <p:cNvSpPr txBox="1"/>
           <p:nvPr/>
         </p:nvSpPr>
         <p:spPr>
           <a:xfrm>
-            <a:off x="6446520" y="1344168"/>
-            <a:ext cx="4983480" cy="1664208"/>
+            <a:off x="1005840" y="4270248"/>
+            <a:ext cx="10104120" cy="704088"/>
           </a:xfrm>
           <a:prstGeom prst="rect">
             <a:avLst/>
@@ -8362,163 +8198,7 @@
               </a:defRPr>
             </a:pPr>
             <a:r>
-              <a:t>Why it helps</a:t>
-            </a:r>
-          </a:p>
-          <a:p>
-            <a:pPr>
-              <a:spcBef>
-                <a:spcPts val="400"/>
-              </a:spcBef>
-              <a:defRPr sz="1050">
-                <a:solidFill>
-                  <a:srgbClr val="242424"/>
-                </a:solidFill>
-                <a:latin typeface="Aptos"/>
-              </a:defRPr>
-            </a:pPr>
-            <a:r>
-              <a:t>• Personalized visuals and AI visuals need validation.</a:t>
-            </a:r>
-          </a:p>
-        </p:txBody>
-      </p:sp>
-      <p:sp>
-        <p:nvSpPr>
-          <p:cNvPr id="11" name="Rounded Rectangle 10"/>
-          <p:cNvSpPr/>
-          <p:nvPr/>
-        </p:nvSpPr>
-        <p:spPr>
-          <a:xfrm>
-            <a:off x="822960" y="4160520"/>
-            <a:ext cx="10424160" cy="868680"/>
-          </a:xfrm>
-          <a:prstGeom prst="roundRect">
-            <a:avLst/>
-          </a:prstGeom>
-          <a:solidFill>
-            <a:srgbClr val="FFFFFF"/>
-          </a:solidFill>
-          <a:ln>
-            <a:solidFill>
-              <a:srgbClr val="DCDCDC"/>
-            </a:solidFill>
-          </a:ln>
-        </p:spPr>
-        <p:style>
-          <a:lnRef idx="1">
-            <a:schemeClr val="accent1"/>
-          </a:lnRef>
-          <a:fillRef idx="3">
-            <a:schemeClr val="accent1"/>
-          </a:fillRef>
-          <a:effectRef idx="2">
-            <a:schemeClr val="accent1"/>
-          </a:effectRef>
-          <a:fontRef idx="minor">
-            <a:schemeClr val="lt1"/>
-          </a:fontRef>
-        </p:style>
-        <p:txBody>
-          <a:bodyPr rtlCol="0" anchor="ctr"/>
-          <a:lstStyle/>
-          <a:p>
-            <a:pPr algn="ctr"/>
-          </a:p>
-        </p:txBody>
-      </p:sp>
-      <p:sp>
-        <p:nvSpPr>
-          <p:cNvPr id="12" name="Rectangle 11"/>
-          <p:cNvSpPr/>
-          <p:nvPr/>
-        </p:nvSpPr>
-        <p:spPr>
-          <a:xfrm>
-            <a:off x="822960" y="4160520"/>
-            <a:ext cx="91440" cy="868680"/>
-          </a:xfrm>
-          <a:prstGeom prst="rect">
-            <a:avLst/>
-          </a:prstGeom>
-          <a:solidFill>
-            <a:srgbClr val="F9B700"/>
-          </a:solidFill>
-          <a:ln>
-            <a:noFill/>
-          </a:ln>
-        </p:spPr>
-        <p:style>
-          <a:lnRef idx="1">
-            <a:schemeClr val="accent1"/>
-          </a:lnRef>
-          <a:fillRef idx="3">
-            <a:schemeClr val="accent1"/>
-          </a:fillRef>
-          <a:effectRef idx="2">
-            <a:schemeClr val="accent1"/>
-          </a:effectRef>
-          <a:fontRef idx="minor">
-            <a:schemeClr val="lt1"/>
-          </a:fontRef>
-        </p:style>
-        <p:txBody>
-          <a:bodyPr rtlCol="0" anchor="ctr"/>
-          <a:lstStyle/>
-          <a:p>
-            <a:pPr algn="ctr"/>
-          </a:p>
-        </p:txBody>
-      </p:sp>
-      <p:sp>
-        <p:nvSpPr>
-          <p:cNvPr id="13" name="TextBox 12"/>
-          <p:cNvSpPr txBox="1"/>
-          <p:nvPr/>
-        </p:nvSpPr>
-        <p:spPr>
-          <a:xfrm>
-            <a:off x="1005840" y="4270248"/>
-            <a:ext cx="10104120" cy="704088"/>
-          </a:xfrm>
-          <a:prstGeom prst="rect">
-            <a:avLst/>
-          </a:prstGeom>
-          <a:noFill/>
-        </p:spPr>
-        <p:txBody>
-          <a:bodyPr wrap="square" lIns="0" rIns="0">
-            <a:spAutoFit/>
-          </a:bodyPr>
-          <a:lstStyle/>
-          <a:p>
-            <a:pPr>
-              <a:defRPr b="1" sz="1500">
-                <a:solidFill>
-                  <a:srgbClr val="1E2761"/>
-                </a:solidFill>
-                <a:latin typeface="Aptos Display"/>
-              </a:defRPr>
-            </a:pPr>
-            <a:r>
-              <a:t>Lab connection</a:t>
-            </a:r>
-          </a:p>
-          <a:p>
-            <a:pPr>
-              <a:spcBef>
-                <a:spcPts val="400"/>
-              </a:spcBef>
-              <a:defRPr sz="1050">
-                <a:solidFill>
-                  <a:srgbClr val="242424"/>
-                </a:solidFill>
-                <a:latin typeface="Aptos"/>
-              </a:defRPr>
-            </a:pPr>
-            <a:r>
-              <a:t>Coverage: Covered. Use the lab README to demonstrate or discuss this topic. Review terms: considerations, depends, policy.</a:t>
+              <a:t>In the lab, you will apply this pattern, validate the expected behavior, and discuss where it fits in a real Power BI solution.</a:t>
             </a:r>
           </a:p>
         </p:txBody>
@@ -8657,42 +8337,6 @@
       </p:sp>
       <p:sp>
         <p:nvSpPr>
-          <p:cNvPr id="4" name="TextBox 3"/>
-          <p:cNvSpPr txBox="1"/>
-          <p:nvPr/>
-        </p:nvSpPr>
-        <p:spPr>
-          <a:xfrm>
-            <a:off x="530352" y="914400"/>
-            <a:ext cx="10515600" cy="320040"/>
-          </a:xfrm>
-          <a:prstGeom prst="rect">
-            <a:avLst/>
-          </a:prstGeom>
-          <a:noFill/>
-        </p:spPr>
-        <p:txBody>
-          <a:bodyPr wrap="none">
-            <a:spAutoFit/>
-          </a:bodyPr>
-          <a:lstStyle/>
-          <a:p>
-            <a:pPr>
-              <a:defRPr sz="1200">
-                <a:solidFill>
-                  <a:srgbClr val="5C5C5C"/>
-                </a:solidFill>
-                <a:latin typeface="Aptos"/>
-              </a:defRPr>
-            </a:pPr>
-            <a:r>
-              <a:t>Talking points, learner value, and lab connection</a:t>
-            </a:r>
-          </a:p>
-        </p:txBody>
-      </p:sp>
-      <p:sp>
-        <p:nvSpPr>
           <p:cNvPr id="5" name="Rounded Rectangle 4"/>
           <p:cNvSpPr/>
           <p:nvPr/>
@@ -8810,7 +8454,139 @@
               </a:defRPr>
             </a:pPr>
             <a:r>
-              <a:t>Talking points</a:t>
+              <a:t>Key ideas</a:t>
+            </a:r>
+            <a:br/>
+            <a:r>
+              <a:t>• UX validation checklist</a:t>
+            </a:r>
+            <a:br/>
+            <a:r>
+              <a:t>• Screenshot capture</a:t>
+            </a:r>
+          </a:p>
+        </p:txBody>
+      </p:sp>
+      <p:sp>
+        <p:nvSpPr>
+          <p:cNvPr id="8" name="Rounded Rectangle 7"/>
+          <p:cNvSpPr/>
+          <p:nvPr/>
+        </p:nvSpPr>
+        <p:spPr>
+          <a:xfrm>
+            <a:off x="6263640" y="1234440"/>
+            <a:ext cx="5303520" cy="1828800"/>
+          </a:xfrm>
+          <a:prstGeom prst="roundRect">
+            <a:avLst/>
+          </a:prstGeom>
+          <a:solidFill>
+            <a:srgbClr val="FFFFFF"/>
+          </a:solidFill>
+          <a:ln>
+            <a:solidFill>
+              <a:srgbClr val="DCDCDC"/>
+            </a:solidFill>
+          </a:ln>
+        </p:spPr>
+        <p:style>
+          <a:lnRef idx="1">
+            <a:schemeClr val="accent1"/>
+          </a:lnRef>
+          <a:fillRef idx="3">
+            <a:schemeClr val="accent1"/>
+          </a:fillRef>
+          <a:effectRef idx="2">
+            <a:schemeClr val="accent1"/>
+          </a:effectRef>
+          <a:fontRef idx="minor">
+            <a:schemeClr val="lt1"/>
+          </a:fontRef>
+        </p:style>
+        <p:txBody>
+          <a:bodyPr rtlCol="0" anchor="ctr"/>
+          <a:lstStyle/>
+          <a:p>
+            <a:pPr algn="ctr"/>
+          </a:p>
+        </p:txBody>
+      </p:sp>
+      <p:sp>
+        <p:nvSpPr>
+          <p:cNvPr id="9" name="Rectangle 8"/>
+          <p:cNvSpPr/>
+          <p:nvPr/>
+        </p:nvSpPr>
+        <p:spPr>
+          <a:xfrm>
+            <a:off x="6263640" y="1234440"/>
+            <a:ext cx="91440" cy="1828800"/>
+          </a:xfrm>
+          <a:prstGeom prst="rect">
+            <a:avLst/>
+          </a:prstGeom>
+          <a:solidFill>
+            <a:srgbClr val="02C39A"/>
+          </a:solidFill>
+          <a:ln>
+            <a:noFill/>
+          </a:ln>
+        </p:spPr>
+        <p:style>
+          <a:lnRef idx="1">
+            <a:schemeClr val="accent1"/>
+          </a:lnRef>
+          <a:fillRef idx="3">
+            <a:schemeClr val="accent1"/>
+          </a:fillRef>
+          <a:effectRef idx="2">
+            <a:schemeClr val="accent1"/>
+          </a:effectRef>
+          <a:fontRef idx="minor">
+            <a:schemeClr val="lt1"/>
+          </a:fontRef>
+        </p:style>
+        <p:txBody>
+          <a:bodyPr rtlCol="0" anchor="ctr"/>
+          <a:lstStyle/>
+          <a:p>
+            <a:pPr algn="ctr"/>
+          </a:p>
+        </p:txBody>
+      </p:sp>
+      <p:sp>
+        <p:nvSpPr>
+          <p:cNvPr id="10" name="TextBox 9"/>
+          <p:cNvSpPr txBox="1"/>
+          <p:nvPr/>
+        </p:nvSpPr>
+        <p:spPr>
+          <a:xfrm>
+            <a:off x="6446520" y="1344168"/>
+            <a:ext cx="4983480" cy="1664208"/>
+          </a:xfrm>
+          <a:prstGeom prst="rect">
+            <a:avLst/>
+          </a:prstGeom>
+          <a:noFill/>
+        </p:spPr>
+        <p:txBody>
+          <a:bodyPr wrap="square" lIns="0" rIns="0">
+            <a:spAutoFit/>
+          </a:bodyPr>
+          <a:lstStyle/>
+          <a:p>
+            <a:pPr>
+              <a:defRPr b="1" sz="1500">
+                <a:solidFill>
+                  <a:srgbClr val="1E2761"/>
+                </a:solidFill>
+                <a:latin typeface="Aptos Display"/>
+              </a:defRPr>
+            </a:pPr>
+            <a:r>
+              <a:t>Why it helps</a:t>
             </a:r>
           </a:p>
           <a:p>
@@ -8826,25 +8602,21 @@
               </a:defRPr>
             </a:pPr>
             <a:r>
-              <a:t>• UX validation checklist</a:t>
-            </a:r>
-            <a:br/>
-            <a:r>
-              <a:t>• Screenshot capture</a:t>
-            </a:r>
-          </a:p>
-        </p:txBody>
-      </p:sp>
-      <p:sp>
-        <p:nvSpPr>
-          <p:cNvPr id="8" name="Rounded Rectangle 7"/>
+              <a:t>• Production readiness</a:t>
+            </a:r>
+          </a:p>
+        </p:txBody>
+      </p:sp>
+      <p:sp>
+        <p:nvSpPr>
+          <p:cNvPr id="11" name="Rounded Rectangle 10"/>
           <p:cNvSpPr/>
           <p:nvPr/>
         </p:nvSpPr>
         <p:spPr>
           <a:xfrm>
-            <a:off x="6263640" y="1234440"/>
-            <a:ext cx="5303520" cy="1828800"/>
+            <a:off x="822960" y="4160520"/>
+            <a:ext cx="10424160" cy="868680"/>
           </a:xfrm>
           <a:prstGeom prst="roundRect">
             <a:avLst/>
@@ -8882,20 +8654,20 @@
       </p:sp>
       <p:sp>
         <p:nvSpPr>
-          <p:cNvPr id="9" name="Rectangle 8"/>
+          <p:cNvPr id="12" name="Rectangle 11"/>
           <p:cNvSpPr/>
           <p:nvPr/>
         </p:nvSpPr>
         <p:spPr>
           <a:xfrm>
-            <a:off x="6263640" y="1234440"/>
-            <a:ext cx="91440" cy="1828800"/>
+            <a:off x="822960" y="4160520"/>
+            <a:ext cx="91440" cy="868680"/>
           </a:xfrm>
           <a:prstGeom prst="rect">
             <a:avLst/>
           </a:prstGeom>
           <a:solidFill>
-            <a:srgbClr val="02C39A"/>
+            <a:srgbClr val="F9B700"/>
           </a:solidFill>
           <a:ln>
             <a:noFill/>
@@ -8925,14 +8697,14 @@
       </p:sp>
       <p:sp>
         <p:nvSpPr>
-          <p:cNvPr id="10" name="TextBox 9"/>
+          <p:cNvPr id="13" name="TextBox 12"/>
           <p:cNvSpPr txBox="1"/>
           <p:nvPr/>
         </p:nvSpPr>
         <p:spPr>
           <a:xfrm>
-            <a:off x="6446520" y="1344168"/>
-            <a:ext cx="4983480" cy="1664208"/>
+            <a:off x="1005840" y="4270248"/>
+            <a:ext cx="10104120" cy="704088"/>
           </a:xfrm>
           <a:prstGeom prst="rect">
             <a:avLst/>
@@ -8954,163 +8726,7 @@
               </a:defRPr>
             </a:pPr>
             <a:r>
-              <a:t>Why it helps</a:t>
-            </a:r>
-          </a:p>
-          <a:p>
-            <a:pPr>
-              <a:spcBef>
-                <a:spcPts val="400"/>
-              </a:spcBef>
-              <a:defRPr sz="1050">
-                <a:solidFill>
-                  <a:srgbClr val="242424"/>
-                </a:solidFill>
-                <a:latin typeface="Aptos"/>
-              </a:defRPr>
-            </a:pPr>
-            <a:r>
-              <a:t>• Production readiness</a:t>
-            </a:r>
-          </a:p>
-        </p:txBody>
-      </p:sp>
-      <p:sp>
-        <p:nvSpPr>
-          <p:cNvPr id="11" name="Rounded Rectangle 10"/>
-          <p:cNvSpPr/>
-          <p:nvPr/>
-        </p:nvSpPr>
-        <p:spPr>
-          <a:xfrm>
-            <a:off x="822960" y="4160520"/>
-            <a:ext cx="10424160" cy="868680"/>
-          </a:xfrm>
-          <a:prstGeom prst="roundRect">
-            <a:avLst/>
-          </a:prstGeom>
-          <a:solidFill>
-            <a:srgbClr val="FFFFFF"/>
-          </a:solidFill>
-          <a:ln>
-            <a:solidFill>
-              <a:srgbClr val="DCDCDC"/>
-            </a:solidFill>
-          </a:ln>
-        </p:spPr>
-        <p:style>
-          <a:lnRef idx="1">
-            <a:schemeClr val="accent1"/>
-          </a:lnRef>
-          <a:fillRef idx="3">
-            <a:schemeClr val="accent1"/>
-          </a:fillRef>
-          <a:effectRef idx="2">
-            <a:schemeClr val="accent1"/>
-          </a:effectRef>
-          <a:fontRef idx="minor">
-            <a:schemeClr val="lt1"/>
-          </a:fontRef>
-        </p:style>
-        <p:txBody>
-          <a:bodyPr rtlCol="0" anchor="ctr"/>
-          <a:lstStyle/>
-          <a:p>
-            <a:pPr algn="ctr"/>
-          </a:p>
-        </p:txBody>
-      </p:sp>
-      <p:sp>
-        <p:nvSpPr>
-          <p:cNvPr id="12" name="Rectangle 11"/>
-          <p:cNvSpPr/>
-          <p:nvPr/>
-        </p:nvSpPr>
-        <p:spPr>
-          <a:xfrm>
-            <a:off x="822960" y="4160520"/>
-            <a:ext cx="91440" cy="868680"/>
-          </a:xfrm>
-          <a:prstGeom prst="rect">
-            <a:avLst/>
-          </a:prstGeom>
-          <a:solidFill>
-            <a:srgbClr val="F9B700"/>
-          </a:solidFill>
-          <a:ln>
-            <a:noFill/>
-          </a:ln>
-        </p:spPr>
-        <p:style>
-          <a:lnRef idx="1">
-            <a:schemeClr val="accent1"/>
-          </a:lnRef>
-          <a:fillRef idx="3">
-            <a:schemeClr val="accent1"/>
-          </a:fillRef>
-          <a:effectRef idx="2">
-            <a:schemeClr val="accent1"/>
-          </a:effectRef>
-          <a:fontRef idx="minor">
-            <a:schemeClr val="lt1"/>
-          </a:fontRef>
-        </p:style>
-        <p:txBody>
-          <a:bodyPr rtlCol="0" anchor="ctr"/>
-          <a:lstStyle/>
-          <a:p>
-            <a:pPr algn="ctr"/>
-          </a:p>
-        </p:txBody>
-      </p:sp>
-      <p:sp>
-        <p:nvSpPr>
-          <p:cNvPr id="13" name="TextBox 12"/>
-          <p:cNvSpPr txBox="1"/>
-          <p:nvPr/>
-        </p:nvSpPr>
-        <p:spPr>
-          <a:xfrm>
-            <a:off x="1005840" y="4270248"/>
-            <a:ext cx="10104120" cy="704088"/>
-          </a:xfrm>
-          <a:prstGeom prst="rect">
-            <a:avLst/>
-          </a:prstGeom>
-          <a:noFill/>
-        </p:spPr>
-        <p:txBody>
-          <a:bodyPr wrap="square" lIns="0" rIns="0">
-            <a:spAutoFit/>
-          </a:bodyPr>
-          <a:lstStyle/>
-          <a:p>
-            <a:pPr>
-              <a:defRPr b="1" sz="1500">
-                <a:solidFill>
-                  <a:srgbClr val="1E2761"/>
-                </a:solidFill>
-                <a:latin typeface="Aptos Display"/>
-              </a:defRPr>
-            </a:pPr>
-            <a:r>
-              <a:t>Lab connection</a:t>
-            </a:r>
-          </a:p>
-          <a:p>
-            <a:pPr>
-              <a:spcBef>
-                <a:spcPts val="400"/>
-              </a:spcBef>
-              <a:defRPr sz="1050">
-                <a:solidFill>
-                  <a:srgbClr val="242424"/>
-                </a:solidFill>
-                <a:latin typeface="Aptos"/>
-              </a:defRPr>
-            </a:pPr>
-            <a:r>
-              <a:t>Coverage: Covered. Use the lab README to demonstrate or discuss this topic. Review terms: production, screenshot.</a:t>
+              <a:t>In the lab, you will apply this pattern, validate the expected behavior, and discuss where it fits in a real Power BI solution.</a:t>
             </a:r>
           </a:p>
         </p:txBody>
@@ -10117,42 +9733,6 @@
       </p:sp>
       <p:sp>
         <p:nvSpPr>
-          <p:cNvPr id="4" name="TextBox 3"/>
-          <p:cNvSpPr txBox="1"/>
-          <p:nvPr/>
-        </p:nvSpPr>
-        <p:spPr>
-          <a:xfrm>
-            <a:off x="530352" y="914400"/>
-            <a:ext cx="10515600" cy="320040"/>
-          </a:xfrm>
-          <a:prstGeom prst="rect">
-            <a:avLst/>
-          </a:prstGeom>
-          <a:noFill/>
-        </p:spPr>
-        <p:txBody>
-          <a:bodyPr wrap="none">
-            <a:spAutoFit/>
-          </a:bodyPr>
-          <a:lstStyle/>
-          <a:p>
-            <a:pPr>
-              <a:defRPr sz="1200">
-                <a:solidFill>
-                  <a:srgbClr val="5C5C5C"/>
-                </a:solidFill>
-                <a:latin typeface="Aptos"/>
-              </a:defRPr>
-            </a:pPr>
-            <a:r>
-              <a:t>Use this to introduce the section before hands-on labs.</a:t>
-            </a:r>
-          </a:p>
-        </p:txBody>
-      </p:sp>
-      <p:sp>
-        <p:nvSpPr>
           <p:cNvPr id="5" name="Rounded Rectangle 4"/>
           <p:cNvSpPr/>
           <p:nvPr/>
@@ -11405,42 +10985,6 @@
       </p:sp>
       <p:sp>
         <p:nvSpPr>
-          <p:cNvPr id="4" name="TextBox 3"/>
-          <p:cNvSpPr txBox="1"/>
-          <p:nvPr/>
-        </p:nvSpPr>
-        <p:spPr>
-          <a:xfrm>
-            <a:off x="530352" y="914400"/>
-            <a:ext cx="10515600" cy="320040"/>
-          </a:xfrm>
-          <a:prstGeom prst="rect">
-            <a:avLst/>
-          </a:prstGeom>
-          <a:noFill/>
-        </p:spPr>
-        <p:txBody>
-          <a:bodyPr wrap="none">
-            <a:spAutoFit/>
-          </a:bodyPr>
-          <a:lstStyle/>
-          <a:p>
-            <a:pPr>
-              <a:defRPr sz="1200">
-                <a:solidFill>
-                  <a:srgbClr val="5C5C5C"/>
-                </a:solidFill>
-                <a:latin typeface="Aptos"/>
-              </a:defRPr>
-            </a:pPr>
-            <a:r>
-              <a:t>Talking points, learner value, and lab connection</a:t>
-            </a:r>
-          </a:p>
-        </p:txBody>
-      </p:sp>
-      <p:sp>
-        <p:nvSpPr>
           <p:cNvPr id="5" name="Rounded Rectangle 4"/>
           <p:cNvSpPr/>
           <p:nvPr/>
@@ -11558,7 +11102,139 @@
               </a:defRPr>
             </a:pPr>
             <a:r>
-              <a:t>Talking points</a:t>
+              <a:t>Key ideas</a:t>
+            </a:r>
+            <a:br/>
+            <a:r>
+              <a:t>• Reports are decision interfaces.</a:t>
+            </a:r>
+            <a:br/>
+            <a:r>
+              <a:t>• Layout should follow audience and task.</a:t>
+            </a:r>
+          </a:p>
+        </p:txBody>
+      </p:sp>
+      <p:sp>
+        <p:nvSpPr>
+          <p:cNvPr id="8" name="Rounded Rectangle 7"/>
+          <p:cNvSpPr/>
+          <p:nvPr/>
+        </p:nvSpPr>
+        <p:spPr>
+          <a:xfrm>
+            <a:off x="6263640" y="1234440"/>
+            <a:ext cx="5303520" cy="1828800"/>
+          </a:xfrm>
+          <a:prstGeom prst="roundRect">
+            <a:avLst/>
+          </a:prstGeom>
+          <a:solidFill>
+            <a:srgbClr val="FFFFFF"/>
+          </a:solidFill>
+          <a:ln>
+            <a:solidFill>
+              <a:srgbClr val="DCDCDC"/>
+            </a:solidFill>
+          </a:ln>
+        </p:spPr>
+        <p:style>
+          <a:lnRef idx="1">
+            <a:schemeClr val="accent1"/>
+          </a:lnRef>
+          <a:fillRef idx="3">
+            <a:schemeClr val="accent1"/>
+          </a:fillRef>
+          <a:effectRef idx="2">
+            <a:schemeClr val="accent1"/>
+          </a:effectRef>
+          <a:fontRef idx="minor">
+            <a:schemeClr val="lt1"/>
+          </a:fontRef>
+        </p:style>
+        <p:txBody>
+          <a:bodyPr rtlCol="0" anchor="ctr"/>
+          <a:lstStyle/>
+          <a:p>
+            <a:pPr algn="ctr"/>
+          </a:p>
+        </p:txBody>
+      </p:sp>
+      <p:sp>
+        <p:nvSpPr>
+          <p:cNvPr id="9" name="Rectangle 8"/>
+          <p:cNvSpPr/>
+          <p:nvPr/>
+        </p:nvSpPr>
+        <p:spPr>
+          <a:xfrm>
+            <a:off x="6263640" y="1234440"/>
+            <a:ext cx="91440" cy="1828800"/>
+          </a:xfrm>
+          <a:prstGeom prst="rect">
+            <a:avLst/>
+          </a:prstGeom>
+          <a:solidFill>
+            <a:srgbClr val="02C39A"/>
+          </a:solidFill>
+          <a:ln>
+            <a:noFill/>
+          </a:ln>
+        </p:spPr>
+        <p:style>
+          <a:lnRef idx="1">
+            <a:schemeClr val="accent1"/>
+          </a:lnRef>
+          <a:fillRef idx="3">
+            <a:schemeClr val="accent1"/>
+          </a:fillRef>
+          <a:effectRef idx="2">
+            <a:schemeClr val="accent1"/>
+          </a:effectRef>
+          <a:fontRef idx="minor">
+            <a:schemeClr val="lt1"/>
+          </a:fontRef>
+        </p:style>
+        <p:txBody>
+          <a:bodyPr rtlCol="0" anchor="ctr"/>
+          <a:lstStyle/>
+          <a:p>
+            <a:pPr algn="ctr"/>
+          </a:p>
+        </p:txBody>
+      </p:sp>
+      <p:sp>
+        <p:nvSpPr>
+          <p:cNvPr id="10" name="TextBox 9"/>
+          <p:cNvSpPr txBox="1"/>
+          <p:nvPr/>
+        </p:nvSpPr>
+        <p:spPr>
+          <a:xfrm>
+            <a:off x="6446520" y="1344168"/>
+            <a:ext cx="4983480" cy="1664208"/>
+          </a:xfrm>
+          <a:prstGeom prst="rect">
+            <a:avLst/>
+          </a:prstGeom>
+          <a:noFill/>
+        </p:spPr>
+        <p:txBody>
+          <a:bodyPr wrap="square" lIns="0" rIns="0">
+            <a:spAutoFit/>
+          </a:bodyPr>
+          <a:lstStyle/>
+          <a:p>
+            <a:pPr>
+              <a:defRPr b="1" sz="1500">
+                <a:solidFill>
+                  <a:srgbClr val="1E2761"/>
+                </a:solidFill>
+                <a:latin typeface="Aptos Display"/>
+              </a:defRPr>
+            </a:pPr>
+            <a:r>
+              <a:t>Why it helps</a:t>
             </a:r>
           </a:p>
           <a:p>
@@ -11574,25 +11250,21 @@
               </a:defRPr>
             </a:pPr>
             <a:r>
-              <a:t>• Reports are decision interfaces.</a:t>
-            </a:r>
-            <a:br/>
-            <a:r>
-              <a:t>• Layout should follow audience and task.</a:t>
-            </a:r>
-          </a:p>
-        </p:txBody>
-      </p:sp>
-      <p:sp>
-        <p:nvSpPr>
-          <p:cNvPr id="8" name="Rounded Rectangle 7"/>
+              <a:t>• Interactivity should reduce cognitive load.</a:t>
+            </a:r>
+          </a:p>
+        </p:txBody>
+      </p:sp>
+      <p:sp>
+        <p:nvSpPr>
+          <p:cNvPr id="11" name="Rounded Rectangle 10"/>
           <p:cNvSpPr/>
           <p:nvPr/>
         </p:nvSpPr>
         <p:spPr>
           <a:xfrm>
-            <a:off x="6263640" y="1234440"/>
-            <a:ext cx="5303520" cy="1828800"/>
+            <a:off x="822960" y="4160520"/>
+            <a:ext cx="10424160" cy="868680"/>
           </a:xfrm>
           <a:prstGeom prst="roundRect">
             <a:avLst/>
@@ -11630,20 +11302,20 @@
       </p:sp>
       <p:sp>
         <p:nvSpPr>
-          <p:cNvPr id="9" name="Rectangle 8"/>
+          <p:cNvPr id="12" name="Rectangle 11"/>
           <p:cNvSpPr/>
           <p:nvPr/>
         </p:nvSpPr>
         <p:spPr>
           <a:xfrm>
-            <a:off x="6263640" y="1234440"/>
-            <a:ext cx="91440" cy="1828800"/>
+            <a:off x="822960" y="4160520"/>
+            <a:ext cx="91440" cy="868680"/>
           </a:xfrm>
           <a:prstGeom prst="rect">
             <a:avLst/>
           </a:prstGeom>
           <a:solidFill>
-            <a:srgbClr val="02C39A"/>
+            <a:srgbClr val="F9B700"/>
           </a:solidFill>
           <a:ln>
             <a:noFill/>
@@ -11673,14 +11345,14 @@
       </p:sp>
       <p:sp>
         <p:nvSpPr>
-          <p:cNvPr id="10" name="TextBox 9"/>
+          <p:cNvPr id="13" name="TextBox 12"/>
           <p:cNvSpPr txBox="1"/>
           <p:nvPr/>
         </p:nvSpPr>
         <p:spPr>
           <a:xfrm>
-            <a:off x="6446520" y="1344168"/>
-            <a:ext cx="4983480" cy="1664208"/>
+            <a:off x="1005840" y="4270248"/>
+            <a:ext cx="10104120" cy="704088"/>
           </a:xfrm>
           <a:prstGeom prst="rect">
             <a:avLst/>
@@ -11702,163 +11374,7 @@
               </a:defRPr>
             </a:pPr>
             <a:r>
-              <a:t>Why it helps</a:t>
-            </a:r>
-          </a:p>
-          <a:p>
-            <a:pPr>
-              <a:spcBef>
-                <a:spcPts val="400"/>
-              </a:spcBef>
-              <a:defRPr sz="1050">
-                <a:solidFill>
-                  <a:srgbClr val="242424"/>
-                </a:solidFill>
-                <a:latin typeface="Aptos"/>
-              </a:defRPr>
-            </a:pPr>
-            <a:r>
-              <a:t>• Interactivity should reduce cognitive load.</a:t>
-            </a:r>
-          </a:p>
-        </p:txBody>
-      </p:sp>
-      <p:sp>
-        <p:nvSpPr>
-          <p:cNvPr id="11" name="Rounded Rectangle 10"/>
-          <p:cNvSpPr/>
-          <p:nvPr/>
-        </p:nvSpPr>
-        <p:spPr>
-          <a:xfrm>
-            <a:off x="822960" y="4160520"/>
-            <a:ext cx="10424160" cy="868680"/>
-          </a:xfrm>
-          <a:prstGeom prst="roundRect">
-            <a:avLst/>
-          </a:prstGeom>
-          <a:solidFill>
-            <a:srgbClr val="FFFFFF"/>
-          </a:solidFill>
-          <a:ln>
-            <a:solidFill>
-              <a:srgbClr val="DCDCDC"/>
-            </a:solidFill>
-          </a:ln>
-        </p:spPr>
-        <p:style>
-          <a:lnRef idx="1">
-            <a:schemeClr val="accent1"/>
-          </a:lnRef>
-          <a:fillRef idx="3">
-            <a:schemeClr val="accent1"/>
-          </a:fillRef>
-          <a:effectRef idx="2">
-            <a:schemeClr val="accent1"/>
-          </a:effectRef>
-          <a:fontRef idx="minor">
-            <a:schemeClr val="lt1"/>
-          </a:fontRef>
-        </p:style>
-        <p:txBody>
-          <a:bodyPr rtlCol="0" anchor="ctr"/>
-          <a:lstStyle/>
-          <a:p>
-            <a:pPr algn="ctr"/>
-          </a:p>
-        </p:txBody>
-      </p:sp>
-      <p:sp>
-        <p:nvSpPr>
-          <p:cNvPr id="12" name="Rectangle 11"/>
-          <p:cNvSpPr/>
-          <p:nvPr/>
-        </p:nvSpPr>
-        <p:spPr>
-          <a:xfrm>
-            <a:off x="822960" y="4160520"/>
-            <a:ext cx="91440" cy="868680"/>
-          </a:xfrm>
-          <a:prstGeom prst="rect">
-            <a:avLst/>
-          </a:prstGeom>
-          <a:solidFill>
-            <a:srgbClr val="F9B700"/>
-          </a:solidFill>
-          <a:ln>
-            <a:noFill/>
-          </a:ln>
-        </p:spPr>
-        <p:style>
-          <a:lnRef idx="1">
-            <a:schemeClr val="accent1"/>
-          </a:lnRef>
-          <a:fillRef idx="3">
-            <a:schemeClr val="accent1"/>
-          </a:fillRef>
-          <a:effectRef idx="2">
-            <a:schemeClr val="accent1"/>
-          </a:effectRef>
-          <a:fontRef idx="minor">
-            <a:schemeClr val="lt1"/>
-          </a:fontRef>
-        </p:style>
-        <p:txBody>
-          <a:bodyPr rtlCol="0" anchor="ctr"/>
-          <a:lstStyle/>
-          <a:p>
-            <a:pPr algn="ctr"/>
-          </a:p>
-        </p:txBody>
-      </p:sp>
-      <p:sp>
-        <p:nvSpPr>
-          <p:cNvPr id="13" name="TextBox 12"/>
-          <p:cNvSpPr txBox="1"/>
-          <p:nvPr/>
-        </p:nvSpPr>
-        <p:spPr>
-          <a:xfrm>
-            <a:off x="1005840" y="4270248"/>
-            <a:ext cx="10104120" cy="704088"/>
-          </a:xfrm>
-          <a:prstGeom prst="rect">
-            <a:avLst/>
-          </a:prstGeom>
-          <a:noFill/>
-        </p:spPr>
-        <p:txBody>
-          <a:bodyPr wrap="square" lIns="0" rIns="0">
-            <a:spAutoFit/>
-          </a:bodyPr>
-          <a:lstStyle/>
-          <a:p>
-            <a:pPr>
-              <a:defRPr b="1" sz="1500">
-                <a:solidFill>
-                  <a:srgbClr val="1E2761"/>
-                </a:solidFill>
-                <a:latin typeface="Aptos Display"/>
-              </a:defRPr>
-            </a:pPr>
-            <a:r>
-              <a:t>Lab connection</a:t>
-            </a:r>
-          </a:p>
-          <a:p>
-            <a:pPr>
-              <a:spcBef>
-                <a:spcPts val="400"/>
-              </a:spcBef>
-              <a:defRPr sz="1050">
-                <a:solidFill>
-                  <a:srgbClr val="242424"/>
-                </a:solidFill>
-                <a:latin typeface="Aptos"/>
-              </a:defRPr>
-            </a:pPr>
-            <a:r>
-              <a:t>Coverage: Partial. Use the lab README to demonstrate or discuss this topic. Review terms: cognitive, decision, follow, interactivity, interfaces.</a:t>
+              <a:t>In the lab, you will apply this pattern, validate the expected behavior, and discuss where it fits in a real Power BI solution.</a:t>
             </a:r>
           </a:p>
         </p:txBody>
@@ -11997,42 +11513,6 @@
       </p:sp>
       <p:sp>
         <p:nvSpPr>
-          <p:cNvPr id="4" name="TextBox 3"/>
-          <p:cNvSpPr txBox="1"/>
-          <p:nvPr/>
-        </p:nvSpPr>
-        <p:spPr>
-          <a:xfrm>
-            <a:off x="530352" y="914400"/>
-            <a:ext cx="10515600" cy="320040"/>
-          </a:xfrm>
-          <a:prstGeom prst="rect">
-            <a:avLst/>
-          </a:prstGeom>
-          <a:noFill/>
-        </p:spPr>
-        <p:txBody>
-          <a:bodyPr wrap="none">
-            <a:spAutoFit/>
-          </a:bodyPr>
-          <a:lstStyle/>
-          <a:p>
-            <a:pPr>
-              <a:defRPr sz="1200">
-                <a:solidFill>
-                  <a:srgbClr val="5C5C5C"/>
-                </a:solidFill>
-                <a:latin typeface="Aptos"/>
-              </a:defRPr>
-            </a:pPr>
-            <a:r>
-              <a:t>Talking points, learner value, and lab connection</a:t>
-            </a:r>
-          </a:p>
-        </p:txBody>
-      </p:sp>
-      <p:sp>
-        <p:nvSpPr>
           <p:cNvPr id="5" name="Rounded Rectangle 4"/>
           <p:cNvSpPr/>
           <p:nvPr/>
@@ -12150,7 +11630,139 @@
               </a:defRPr>
             </a:pPr>
             <a:r>
-              <a:t>Talking points</a:t>
+              <a:t>Key ideas</a:t>
+            </a:r>
+            <a:br/>
+            <a:r>
+              <a:t>• Executive summary</a:t>
+            </a:r>
+            <a:br/>
+            <a:r>
+              <a:t>• Analyst exploration</a:t>
+            </a:r>
+          </a:p>
+        </p:txBody>
+      </p:sp>
+      <p:sp>
+        <p:nvSpPr>
+          <p:cNvPr id="8" name="Rounded Rectangle 7"/>
+          <p:cNvSpPr/>
+          <p:nvPr/>
+        </p:nvSpPr>
+        <p:spPr>
+          <a:xfrm>
+            <a:off x="6263640" y="1234440"/>
+            <a:ext cx="5303520" cy="1828800"/>
+          </a:xfrm>
+          <a:prstGeom prst="roundRect">
+            <a:avLst/>
+          </a:prstGeom>
+          <a:solidFill>
+            <a:srgbClr val="FFFFFF"/>
+          </a:solidFill>
+          <a:ln>
+            <a:solidFill>
+              <a:srgbClr val="DCDCDC"/>
+            </a:solidFill>
+          </a:ln>
+        </p:spPr>
+        <p:style>
+          <a:lnRef idx="1">
+            <a:schemeClr val="accent1"/>
+          </a:lnRef>
+          <a:fillRef idx="3">
+            <a:schemeClr val="accent1"/>
+          </a:fillRef>
+          <a:effectRef idx="2">
+            <a:schemeClr val="accent1"/>
+          </a:effectRef>
+          <a:fontRef idx="minor">
+            <a:schemeClr val="lt1"/>
+          </a:fontRef>
+        </p:style>
+        <p:txBody>
+          <a:bodyPr rtlCol="0" anchor="ctr"/>
+          <a:lstStyle/>
+          <a:p>
+            <a:pPr algn="ctr"/>
+          </a:p>
+        </p:txBody>
+      </p:sp>
+      <p:sp>
+        <p:nvSpPr>
+          <p:cNvPr id="9" name="Rectangle 8"/>
+          <p:cNvSpPr/>
+          <p:nvPr/>
+        </p:nvSpPr>
+        <p:spPr>
+          <a:xfrm>
+            <a:off x="6263640" y="1234440"/>
+            <a:ext cx="91440" cy="1828800"/>
+          </a:xfrm>
+          <a:prstGeom prst="rect">
+            <a:avLst/>
+          </a:prstGeom>
+          <a:solidFill>
+            <a:srgbClr val="02C39A"/>
+          </a:solidFill>
+          <a:ln>
+            <a:noFill/>
+          </a:ln>
+        </p:spPr>
+        <p:style>
+          <a:lnRef idx="1">
+            <a:schemeClr val="accent1"/>
+          </a:lnRef>
+          <a:fillRef idx="3">
+            <a:schemeClr val="accent1"/>
+          </a:fillRef>
+          <a:effectRef idx="2">
+            <a:schemeClr val="accent1"/>
+          </a:effectRef>
+          <a:fontRef idx="minor">
+            <a:schemeClr val="lt1"/>
+          </a:fontRef>
+        </p:style>
+        <p:txBody>
+          <a:bodyPr rtlCol="0" anchor="ctr"/>
+          <a:lstStyle/>
+          <a:p>
+            <a:pPr algn="ctr"/>
+          </a:p>
+        </p:txBody>
+      </p:sp>
+      <p:sp>
+        <p:nvSpPr>
+          <p:cNvPr id="10" name="TextBox 9"/>
+          <p:cNvSpPr txBox="1"/>
+          <p:nvPr/>
+        </p:nvSpPr>
+        <p:spPr>
+          <a:xfrm>
+            <a:off x="6446520" y="1344168"/>
+            <a:ext cx="4983480" cy="1664208"/>
+          </a:xfrm>
+          <a:prstGeom prst="rect">
+            <a:avLst/>
+          </a:prstGeom>
+          <a:noFill/>
+        </p:spPr>
+        <p:txBody>
+          <a:bodyPr wrap="square" lIns="0" rIns="0">
+            <a:spAutoFit/>
+          </a:bodyPr>
+          <a:lstStyle/>
+          <a:p>
+            <a:pPr>
+              <a:defRPr b="1" sz="1500">
+                <a:solidFill>
+                  <a:srgbClr val="1E2761"/>
+                </a:solidFill>
+                <a:latin typeface="Aptos Display"/>
+              </a:defRPr>
+            </a:pPr>
+            <a:r>
+              <a:t>Why it helps</a:t>
             </a:r>
           </a:p>
           <a:p>
@@ -12166,25 +11778,25 @@
               </a:defRPr>
             </a:pPr>
             <a:r>
-              <a:t>• Executive summary</a:t>
+              <a:t>• Operational monitoring</a:t>
             </a:r>
             <a:br/>
             <a:r>
-              <a:t>• Analyst exploration</a:t>
-            </a:r>
-          </a:p>
-        </p:txBody>
-      </p:sp>
-      <p:sp>
-        <p:nvSpPr>
-          <p:cNvPr id="8" name="Rounded Rectangle 7"/>
+              <a:t>• Detail and exception handling</a:t>
+            </a:r>
+          </a:p>
+        </p:txBody>
+      </p:sp>
+      <p:sp>
+        <p:nvSpPr>
+          <p:cNvPr id="11" name="Rounded Rectangle 10"/>
           <p:cNvSpPr/>
           <p:nvPr/>
         </p:nvSpPr>
         <p:spPr>
           <a:xfrm>
-            <a:off x="6263640" y="1234440"/>
-            <a:ext cx="5303520" cy="1828800"/>
+            <a:off x="822960" y="4160520"/>
+            <a:ext cx="10424160" cy="868680"/>
           </a:xfrm>
           <a:prstGeom prst="roundRect">
             <a:avLst/>
@@ -12222,20 +11834,20 @@
       </p:sp>
       <p:sp>
         <p:nvSpPr>
-          <p:cNvPr id="9" name="Rectangle 8"/>
+          <p:cNvPr id="12" name="Rectangle 11"/>
           <p:cNvSpPr/>
           <p:nvPr/>
         </p:nvSpPr>
         <p:spPr>
           <a:xfrm>
-            <a:off x="6263640" y="1234440"/>
-            <a:ext cx="91440" cy="1828800"/>
+            <a:off x="822960" y="4160520"/>
+            <a:ext cx="91440" cy="868680"/>
           </a:xfrm>
           <a:prstGeom prst="rect">
             <a:avLst/>
           </a:prstGeom>
           <a:solidFill>
-            <a:srgbClr val="02C39A"/>
+            <a:srgbClr val="F9B700"/>
           </a:solidFill>
           <a:ln>
             <a:noFill/>
@@ -12265,14 +11877,14 @@
       </p:sp>
       <p:sp>
         <p:nvSpPr>
-          <p:cNvPr id="10" name="TextBox 9"/>
+          <p:cNvPr id="13" name="TextBox 12"/>
           <p:cNvSpPr txBox="1"/>
           <p:nvPr/>
         </p:nvSpPr>
         <p:spPr>
           <a:xfrm>
-            <a:off x="6446520" y="1344168"/>
-            <a:ext cx="4983480" cy="1664208"/>
+            <a:off x="1005840" y="4270248"/>
+            <a:ext cx="10104120" cy="704088"/>
           </a:xfrm>
           <a:prstGeom prst="rect">
             <a:avLst/>
@@ -12294,167 +11906,7 @@
               </a:defRPr>
             </a:pPr>
             <a:r>
-              <a:t>Why it helps</a:t>
-            </a:r>
-          </a:p>
-          <a:p>
-            <a:pPr>
-              <a:spcBef>
-                <a:spcPts val="400"/>
-              </a:spcBef>
-              <a:defRPr sz="1050">
-                <a:solidFill>
-                  <a:srgbClr val="242424"/>
-                </a:solidFill>
-                <a:latin typeface="Aptos"/>
-              </a:defRPr>
-            </a:pPr>
-            <a:r>
-              <a:t>• Operational monitoring</a:t>
-            </a:r>
-            <a:br/>
-            <a:r>
-              <a:t>• Detail and exception handling</a:t>
-            </a:r>
-          </a:p>
-        </p:txBody>
-      </p:sp>
-      <p:sp>
-        <p:nvSpPr>
-          <p:cNvPr id="11" name="Rounded Rectangle 10"/>
-          <p:cNvSpPr/>
-          <p:nvPr/>
-        </p:nvSpPr>
-        <p:spPr>
-          <a:xfrm>
-            <a:off x="822960" y="4160520"/>
-            <a:ext cx="10424160" cy="868680"/>
-          </a:xfrm>
-          <a:prstGeom prst="roundRect">
-            <a:avLst/>
-          </a:prstGeom>
-          <a:solidFill>
-            <a:srgbClr val="FFFFFF"/>
-          </a:solidFill>
-          <a:ln>
-            <a:solidFill>
-              <a:srgbClr val="DCDCDC"/>
-            </a:solidFill>
-          </a:ln>
-        </p:spPr>
-        <p:style>
-          <a:lnRef idx="1">
-            <a:schemeClr val="accent1"/>
-          </a:lnRef>
-          <a:fillRef idx="3">
-            <a:schemeClr val="accent1"/>
-          </a:fillRef>
-          <a:effectRef idx="2">
-            <a:schemeClr val="accent1"/>
-          </a:effectRef>
-          <a:fontRef idx="minor">
-            <a:schemeClr val="lt1"/>
-          </a:fontRef>
-        </p:style>
-        <p:txBody>
-          <a:bodyPr rtlCol="0" anchor="ctr"/>
-          <a:lstStyle/>
-          <a:p>
-            <a:pPr algn="ctr"/>
-          </a:p>
-        </p:txBody>
-      </p:sp>
-      <p:sp>
-        <p:nvSpPr>
-          <p:cNvPr id="12" name="Rectangle 11"/>
-          <p:cNvSpPr/>
-          <p:nvPr/>
-        </p:nvSpPr>
-        <p:spPr>
-          <a:xfrm>
-            <a:off x="822960" y="4160520"/>
-            <a:ext cx="91440" cy="868680"/>
-          </a:xfrm>
-          <a:prstGeom prst="rect">
-            <a:avLst/>
-          </a:prstGeom>
-          <a:solidFill>
-            <a:srgbClr val="F9B700"/>
-          </a:solidFill>
-          <a:ln>
-            <a:noFill/>
-          </a:ln>
-        </p:spPr>
-        <p:style>
-          <a:lnRef idx="1">
-            <a:schemeClr val="accent1"/>
-          </a:lnRef>
-          <a:fillRef idx="3">
-            <a:schemeClr val="accent1"/>
-          </a:fillRef>
-          <a:effectRef idx="2">
-            <a:schemeClr val="accent1"/>
-          </a:effectRef>
-          <a:fontRef idx="minor">
-            <a:schemeClr val="lt1"/>
-          </a:fontRef>
-        </p:style>
-        <p:txBody>
-          <a:bodyPr rtlCol="0" anchor="ctr"/>
-          <a:lstStyle/>
-          <a:p>
-            <a:pPr algn="ctr"/>
-          </a:p>
-        </p:txBody>
-      </p:sp>
-      <p:sp>
-        <p:nvSpPr>
-          <p:cNvPr id="13" name="TextBox 12"/>
-          <p:cNvSpPr txBox="1"/>
-          <p:nvPr/>
-        </p:nvSpPr>
-        <p:spPr>
-          <a:xfrm>
-            <a:off x="1005840" y="4270248"/>
-            <a:ext cx="10104120" cy="704088"/>
-          </a:xfrm>
-          <a:prstGeom prst="rect">
-            <a:avLst/>
-          </a:prstGeom>
-          <a:noFill/>
-        </p:spPr>
-        <p:txBody>
-          <a:bodyPr wrap="square" lIns="0" rIns="0">
-            <a:spAutoFit/>
-          </a:bodyPr>
-          <a:lstStyle/>
-          <a:p>
-            <a:pPr>
-              <a:defRPr b="1" sz="1500">
-                <a:solidFill>
-                  <a:srgbClr val="1E2761"/>
-                </a:solidFill>
-                <a:latin typeface="Aptos Display"/>
-              </a:defRPr>
-            </a:pPr>
-            <a:r>
-              <a:t>Lab connection</a:t>
-            </a:r>
-          </a:p>
-          <a:p>
-            <a:pPr>
-              <a:spcBef>
-                <a:spcPts val="400"/>
-              </a:spcBef>
-              <a:defRPr sz="1050">
-                <a:solidFill>
-                  <a:srgbClr val="242424"/>
-                </a:solidFill>
-                <a:latin typeface="Aptos"/>
-              </a:defRPr>
-            </a:pPr>
-            <a:r>
-              <a:t>Coverage: Partial. Use the lab README to demonstrate or discuss this topic. Review terms: analyst, driven, executive, handling, monitoring.</a:t>
+              <a:t>In the lab, you will apply this pattern, validate the expected behavior, and discuss where it fits in a real Power BI solution.</a:t>
             </a:r>
           </a:p>
         </p:txBody>
@@ -12593,42 +12045,6 @@
       </p:sp>
       <p:sp>
         <p:nvSpPr>
-          <p:cNvPr id="4" name="TextBox 3"/>
-          <p:cNvSpPr txBox="1"/>
-          <p:nvPr/>
-        </p:nvSpPr>
-        <p:spPr>
-          <a:xfrm>
-            <a:off x="530352" y="914400"/>
-            <a:ext cx="10515600" cy="320040"/>
-          </a:xfrm>
-          <a:prstGeom prst="rect">
-            <a:avLst/>
-          </a:prstGeom>
-          <a:noFill/>
-        </p:spPr>
-        <p:txBody>
-          <a:bodyPr wrap="none">
-            <a:spAutoFit/>
-          </a:bodyPr>
-          <a:lstStyle/>
-          <a:p>
-            <a:pPr>
-              <a:defRPr sz="1200">
-                <a:solidFill>
-                  <a:srgbClr val="5C5C5C"/>
-                </a:solidFill>
-                <a:latin typeface="Aptos"/>
-              </a:defRPr>
-            </a:pPr>
-            <a:r>
-              <a:t>Talking points, learner value, and lab connection</a:t>
-            </a:r>
-          </a:p>
-        </p:txBody>
-      </p:sp>
-      <p:sp>
-        <p:nvSpPr>
           <p:cNvPr id="5" name="Rounded Rectangle 4"/>
           <p:cNvSpPr/>
           <p:nvPr/>
@@ -12746,7 +12162,139 @@
               </a:defRPr>
             </a:pPr>
             <a:r>
-              <a:t>Talking points</a:t>
+              <a:t>Key ideas</a:t>
+            </a:r>
+            <a:br/>
+            <a:r>
+              <a:t>• Page filters vs. visual filters</a:t>
+            </a:r>
+            <a:br/>
+            <a:r>
+              <a:t>• Slicer placement</a:t>
+            </a:r>
+          </a:p>
+        </p:txBody>
+      </p:sp>
+      <p:sp>
+        <p:nvSpPr>
+          <p:cNvPr id="8" name="Rounded Rectangle 7"/>
+          <p:cNvSpPr/>
+          <p:nvPr/>
+        </p:nvSpPr>
+        <p:spPr>
+          <a:xfrm>
+            <a:off x="6263640" y="1234440"/>
+            <a:ext cx="5303520" cy="1828800"/>
+          </a:xfrm>
+          <a:prstGeom prst="roundRect">
+            <a:avLst/>
+          </a:prstGeom>
+          <a:solidFill>
+            <a:srgbClr val="FFFFFF"/>
+          </a:solidFill>
+          <a:ln>
+            <a:solidFill>
+              <a:srgbClr val="DCDCDC"/>
+            </a:solidFill>
+          </a:ln>
+        </p:spPr>
+        <p:style>
+          <a:lnRef idx="1">
+            <a:schemeClr val="accent1"/>
+          </a:lnRef>
+          <a:fillRef idx="3">
+            <a:schemeClr val="accent1"/>
+          </a:fillRef>
+          <a:effectRef idx="2">
+            <a:schemeClr val="accent1"/>
+          </a:effectRef>
+          <a:fontRef idx="minor">
+            <a:schemeClr val="lt1"/>
+          </a:fontRef>
+        </p:style>
+        <p:txBody>
+          <a:bodyPr rtlCol="0" anchor="ctr"/>
+          <a:lstStyle/>
+          <a:p>
+            <a:pPr algn="ctr"/>
+          </a:p>
+        </p:txBody>
+      </p:sp>
+      <p:sp>
+        <p:nvSpPr>
+          <p:cNvPr id="9" name="Rectangle 8"/>
+          <p:cNvSpPr/>
+          <p:nvPr/>
+        </p:nvSpPr>
+        <p:spPr>
+          <a:xfrm>
+            <a:off x="6263640" y="1234440"/>
+            <a:ext cx="91440" cy="1828800"/>
+          </a:xfrm>
+          <a:prstGeom prst="rect">
+            <a:avLst/>
+          </a:prstGeom>
+          <a:solidFill>
+            <a:srgbClr val="02C39A"/>
+          </a:solidFill>
+          <a:ln>
+            <a:noFill/>
+          </a:ln>
+        </p:spPr>
+        <p:style>
+          <a:lnRef idx="1">
+            <a:schemeClr val="accent1"/>
+          </a:lnRef>
+          <a:fillRef idx="3">
+            <a:schemeClr val="accent1"/>
+          </a:fillRef>
+          <a:effectRef idx="2">
+            <a:schemeClr val="accent1"/>
+          </a:effectRef>
+          <a:fontRef idx="minor">
+            <a:schemeClr val="lt1"/>
+          </a:fontRef>
+        </p:style>
+        <p:txBody>
+          <a:bodyPr rtlCol="0" anchor="ctr"/>
+          <a:lstStyle/>
+          <a:p>
+            <a:pPr algn="ctr"/>
+          </a:p>
+        </p:txBody>
+      </p:sp>
+      <p:sp>
+        <p:nvSpPr>
+          <p:cNvPr id="10" name="TextBox 9"/>
+          <p:cNvSpPr txBox="1"/>
+          <p:nvPr/>
+        </p:nvSpPr>
+        <p:spPr>
+          <a:xfrm>
+            <a:off x="6446520" y="1344168"/>
+            <a:ext cx="4983480" cy="1664208"/>
+          </a:xfrm>
+          <a:prstGeom prst="rect">
+            <a:avLst/>
+          </a:prstGeom>
+          <a:noFill/>
+        </p:spPr>
+        <p:txBody>
+          <a:bodyPr wrap="square" lIns="0" rIns="0">
+            <a:spAutoFit/>
+          </a:bodyPr>
+          <a:lstStyle/>
+          <a:p>
+            <a:pPr>
+              <a:defRPr b="1" sz="1500">
+                <a:solidFill>
+                  <a:srgbClr val="1E2761"/>
+                </a:solidFill>
+                <a:latin typeface="Aptos Display"/>
+              </a:defRPr>
+            </a:pPr>
+            <a:r>
+              <a:t>Why it helps</a:t>
             </a:r>
           </a:p>
           <a:p>
@@ -12762,25 +12310,25 @@
               </a:defRPr>
             </a:pPr>
             <a:r>
-              <a:t>• Page filters vs. visual filters</a:t>
+              <a:t>• Sync slicers</a:t>
             </a:r>
             <a:br/>
             <a:r>
-              <a:t>• Slicer placement</a:t>
-            </a:r>
-          </a:p>
-        </p:txBody>
-      </p:sp>
-      <p:sp>
-        <p:nvSpPr>
-          <p:cNvPr id="8" name="Rounded Rectangle 7"/>
+              <a:t>• Avoiding filter confusion</a:t>
+            </a:r>
+          </a:p>
+        </p:txBody>
+      </p:sp>
+      <p:sp>
+        <p:nvSpPr>
+          <p:cNvPr id="11" name="Rounded Rectangle 10"/>
           <p:cNvSpPr/>
           <p:nvPr/>
         </p:nvSpPr>
         <p:spPr>
           <a:xfrm>
-            <a:off x="6263640" y="1234440"/>
-            <a:ext cx="5303520" cy="1828800"/>
+            <a:off x="822960" y="4160520"/>
+            <a:ext cx="10424160" cy="868680"/>
           </a:xfrm>
           <a:prstGeom prst="roundRect">
             <a:avLst/>
@@ -12818,20 +12366,20 @@
       </p:sp>
       <p:sp>
         <p:nvSpPr>
-          <p:cNvPr id="9" name="Rectangle 8"/>
+          <p:cNvPr id="12" name="Rectangle 11"/>
           <p:cNvSpPr/>
           <p:nvPr/>
         </p:nvSpPr>
         <p:spPr>
           <a:xfrm>
-            <a:off x="6263640" y="1234440"/>
-            <a:ext cx="91440" cy="1828800"/>
+            <a:off x="822960" y="4160520"/>
+            <a:ext cx="91440" cy="868680"/>
           </a:xfrm>
           <a:prstGeom prst="rect">
             <a:avLst/>
           </a:prstGeom>
           <a:solidFill>
-            <a:srgbClr val="02C39A"/>
+            <a:srgbClr val="F9B700"/>
           </a:solidFill>
           <a:ln>
             <a:noFill/>
@@ -12861,14 +12409,14 @@
       </p:sp>
       <p:sp>
         <p:nvSpPr>
-          <p:cNvPr id="10" name="TextBox 9"/>
+          <p:cNvPr id="13" name="TextBox 12"/>
           <p:cNvSpPr txBox="1"/>
           <p:nvPr/>
         </p:nvSpPr>
         <p:spPr>
           <a:xfrm>
-            <a:off x="6446520" y="1344168"/>
-            <a:ext cx="4983480" cy="1664208"/>
+            <a:off x="1005840" y="4270248"/>
+            <a:ext cx="10104120" cy="704088"/>
           </a:xfrm>
           <a:prstGeom prst="rect">
             <a:avLst/>
@@ -12890,167 +12438,7 @@
               </a:defRPr>
             </a:pPr>
             <a:r>
-              <a:t>Why it helps</a:t>
-            </a:r>
-          </a:p>
-          <a:p>
-            <a:pPr>
-              <a:spcBef>
-                <a:spcPts val="400"/>
-              </a:spcBef>
-              <a:defRPr sz="1050">
-                <a:solidFill>
-                  <a:srgbClr val="242424"/>
-                </a:solidFill>
-                <a:latin typeface="Aptos"/>
-              </a:defRPr>
-            </a:pPr>
-            <a:r>
-              <a:t>• Sync slicers</a:t>
-            </a:r>
-            <a:br/>
-            <a:r>
-              <a:t>• Avoiding filter confusion</a:t>
-            </a:r>
-          </a:p>
-        </p:txBody>
-      </p:sp>
-      <p:sp>
-        <p:nvSpPr>
-          <p:cNvPr id="11" name="Rounded Rectangle 10"/>
-          <p:cNvSpPr/>
-          <p:nvPr/>
-        </p:nvSpPr>
-        <p:spPr>
-          <a:xfrm>
-            <a:off x="822960" y="4160520"/>
-            <a:ext cx="10424160" cy="868680"/>
-          </a:xfrm>
-          <a:prstGeom prst="roundRect">
-            <a:avLst/>
-          </a:prstGeom>
-          <a:solidFill>
-            <a:srgbClr val="FFFFFF"/>
-          </a:solidFill>
-          <a:ln>
-            <a:solidFill>
-              <a:srgbClr val="DCDCDC"/>
-            </a:solidFill>
-          </a:ln>
-        </p:spPr>
-        <p:style>
-          <a:lnRef idx="1">
-            <a:schemeClr val="accent1"/>
-          </a:lnRef>
-          <a:fillRef idx="3">
-            <a:schemeClr val="accent1"/>
-          </a:fillRef>
-          <a:effectRef idx="2">
-            <a:schemeClr val="accent1"/>
-          </a:effectRef>
-          <a:fontRef idx="minor">
-            <a:schemeClr val="lt1"/>
-          </a:fontRef>
-        </p:style>
-        <p:txBody>
-          <a:bodyPr rtlCol="0" anchor="ctr"/>
-          <a:lstStyle/>
-          <a:p>
-            <a:pPr algn="ctr"/>
-          </a:p>
-        </p:txBody>
-      </p:sp>
-      <p:sp>
-        <p:nvSpPr>
-          <p:cNvPr id="12" name="Rectangle 11"/>
-          <p:cNvSpPr/>
-          <p:nvPr/>
-        </p:nvSpPr>
-        <p:spPr>
-          <a:xfrm>
-            <a:off x="822960" y="4160520"/>
-            <a:ext cx="91440" cy="868680"/>
-          </a:xfrm>
-          <a:prstGeom prst="rect">
-            <a:avLst/>
-          </a:prstGeom>
-          <a:solidFill>
-            <a:srgbClr val="F9B700"/>
-          </a:solidFill>
-          <a:ln>
-            <a:noFill/>
-          </a:ln>
-        </p:spPr>
-        <p:style>
-          <a:lnRef idx="1">
-            <a:schemeClr val="accent1"/>
-          </a:lnRef>
-          <a:fillRef idx="3">
-            <a:schemeClr val="accent1"/>
-          </a:fillRef>
-          <a:effectRef idx="2">
-            <a:schemeClr val="accent1"/>
-          </a:effectRef>
-          <a:fontRef idx="minor">
-            <a:schemeClr val="lt1"/>
-          </a:fontRef>
-        </p:style>
-        <p:txBody>
-          <a:bodyPr rtlCol="0" anchor="ctr"/>
-          <a:lstStyle/>
-          <a:p>
-            <a:pPr algn="ctr"/>
-          </a:p>
-        </p:txBody>
-      </p:sp>
-      <p:sp>
-        <p:nvSpPr>
-          <p:cNvPr id="13" name="TextBox 12"/>
-          <p:cNvSpPr txBox="1"/>
-          <p:nvPr/>
-        </p:nvSpPr>
-        <p:spPr>
-          <a:xfrm>
-            <a:off x="1005840" y="4270248"/>
-            <a:ext cx="10104120" cy="704088"/>
-          </a:xfrm>
-          <a:prstGeom prst="rect">
-            <a:avLst/>
-          </a:prstGeom>
-          <a:noFill/>
-        </p:spPr>
-        <p:txBody>
-          <a:bodyPr wrap="square" lIns="0" rIns="0">
-            <a:spAutoFit/>
-          </a:bodyPr>
-          <a:lstStyle/>
-          <a:p>
-            <a:pPr>
-              <a:defRPr b="1" sz="1500">
-                <a:solidFill>
-                  <a:srgbClr val="1E2761"/>
-                </a:solidFill>
-                <a:latin typeface="Aptos Display"/>
-              </a:defRPr>
-            </a:pPr>
-            <a:r>
-              <a:t>Lab connection</a:t>
-            </a:r>
-          </a:p>
-          <a:p>
-            <a:pPr>
-              <a:spcBef>
-                <a:spcPts val="400"/>
-              </a:spcBef>
-              <a:defRPr sz="1050">
-                <a:solidFill>
-                  <a:srgbClr val="242424"/>
-                </a:solidFill>
-                <a:latin typeface="Aptos"/>
-              </a:defRPr>
-            </a:pPr>
-            <a:r>
-              <a:t>Coverage: Partial. Use the lab README to demonstrate or discuss this topic. Review terms: avoiding, confusion, filters, slicers.</a:t>
+              <a:t>In the lab, you will apply this pattern, validate the expected behavior, and discuss where it fits in a real Power BI solution.</a:t>
             </a:r>
           </a:p>
         </p:txBody>
@@ -13189,42 +12577,6 @@
       </p:sp>
       <p:sp>
         <p:nvSpPr>
-          <p:cNvPr id="4" name="TextBox 3"/>
-          <p:cNvSpPr txBox="1"/>
-          <p:nvPr/>
-        </p:nvSpPr>
-        <p:spPr>
-          <a:xfrm>
-            <a:off x="530352" y="914400"/>
-            <a:ext cx="10515600" cy="320040"/>
-          </a:xfrm>
-          <a:prstGeom prst="rect">
-            <a:avLst/>
-          </a:prstGeom>
-          <a:noFill/>
-        </p:spPr>
-        <p:txBody>
-          <a:bodyPr wrap="none">
-            <a:spAutoFit/>
-          </a:bodyPr>
-          <a:lstStyle/>
-          <a:p>
-            <a:pPr>
-              <a:defRPr sz="1200">
-                <a:solidFill>
-                  <a:srgbClr val="5C5C5C"/>
-                </a:solidFill>
-                <a:latin typeface="Aptos"/>
-              </a:defRPr>
-            </a:pPr>
-            <a:r>
-              <a:t>Talking points, learner value, and lab connection</a:t>
-            </a:r>
-          </a:p>
-        </p:txBody>
-      </p:sp>
-      <p:sp>
-        <p:nvSpPr>
           <p:cNvPr id="5" name="Rounded Rectangle 4"/>
           <p:cNvSpPr/>
           <p:nvPr/>
@@ -13342,7 +12694,139 @@
               </a:defRPr>
             </a:pPr>
             <a:r>
-              <a:t>Talking points</a:t>
+              <a:t>Key ideas</a:t>
+            </a:r>
+            <a:br/>
+            <a:r>
+              <a:t>• Summary-to-detail analysis</a:t>
+            </a:r>
+            <a:br/>
+            <a:r>
+              <a:t>• Drillthrough fields</a:t>
+            </a:r>
+          </a:p>
+        </p:txBody>
+      </p:sp>
+      <p:sp>
+        <p:nvSpPr>
+          <p:cNvPr id="8" name="Rounded Rectangle 7"/>
+          <p:cNvSpPr/>
+          <p:nvPr/>
+        </p:nvSpPr>
+        <p:spPr>
+          <a:xfrm>
+            <a:off x="6263640" y="1234440"/>
+            <a:ext cx="5303520" cy="1828800"/>
+          </a:xfrm>
+          <a:prstGeom prst="roundRect">
+            <a:avLst/>
+          </a:prstGeom>
+          <a:solidFill>
+            <a:srgbClr val="FFFFFF"/>
+          </a:solidFill>
+          <a:ln>
+            <a:solidFill>
+              <a:srgbClr val="DCDCDC"/>
+            </a:solidFill>
+          </a:ln>
+        </p:spPr>
+        <p:style>
+          <a:lnRef idx="1">
+            <a:schemeClr val="accent1"/>
+          </a:lnRef>
+          <a:fillRef idx="3">
+            <a:schemeClr val="accent1"/>
+          </a:fillRef>
+          <a:effectRef idx="2">
+            <a:schemeClr val="accent1"/>
+          </a:effectRef>
+          <a:fontRef idx="minor">
+            <a:schemeClr val="lt1"/>
+          </a:fontRef>
+        </p:style>
+        <p:txBody>
+          <a:bodyPr rtlCol="0" anchor="ctr"/>
+          <a:lstStyle/>
+          <a:p>
+            <a:pPr algn="ctr"/>
+          </a:p>
+        </p:txBody>
+      </p:sp>
+      <p:sp>
+        <p:nvSpPr>
+          <p:cNvPr id="9" name="Rectangle 8"/>
+          <p:cNvSpPr/>
+          <p:nvPr/>
+        </p:nvSpPr>
+        <p:spPr>
+          <a:xfrm>
+            <a:off x="6263640" y="1234440"/>
+            <a:ext cx="91440" cy="1828800"/>
+          </a:xfrm>
+          <a:prstGeom prst="rect">
+            <a:avLst/>
+          </a:prstGeom>
+          <a:solidFill>
+            <a:srgbClr val="02C39A"/>
+          </a:solidFill>
+          <a:ln>
+            <a:noFill/>
+          </a:ln>
+        </p:spPr>
+        <p:style>
+          <a:lnRef idx="1">
+            <a:schemeClr val="accent1"/>
+          </a:lnRef>
+          <a:fillRef idx="3">
+            <a:schemeClr val="accent1"/>
+          </a:fillRef>
+          <a:effectRef idx="2">
+            <a:schemeClr val="accent1"/>
+          </a:effectRef>
+          <a:fontRef idx="minor">
+            <a:schemeClr val="lt1"/>
+          </a:fontRef>
+        </p:style>
+        <p:txBody>
+          <a:bodyPr rtlCol="0" anchor="ctr"/>
+          <a:lstStyle/>
+          <a:p>
+            <a:pPr algn="ctr"/>
+          </a:p>
+        </p:txBody>
+      </p:sp>
+      <p:sp>
+        <p:nvSpPr>
+          <p:cNvPr id="10" name="TextBox 9"/>
+          <p:cNvSpPr txBox="1"/>
+          <p:nvPr/>
+        </p:nvSpPr>
+        <p:spPr>
+          <a:xfrm>
+            <a:off x="6446520" y="1344168"/>
+            <a:ext cx="4983480" cy="1664208"/>
+          </a:xfrm>
+          <a:prstGeom prst="rect">
+            <a:avLst/>
+          </a:prstGeom>
+          <a:noFill/>
+        </p:spPr>
+        <p:txBody>
+          <a:bodyPr wrap="square" lIns="0" rIns="0">
+            <a:spAutoFit/>
+          </a:bodyPr>
+          <a:lstStyle/>
+          <a:p>
+            <a:pPr>
+              <a:defRPr b="1" sz="1500">
+                <a:solidFill>
+                  <a:srgbClr val="1E2761"/>
+                </a:solidFill>
+                <a:latin typeface="Aptos Display"/>
+              </a:defRPr>
+            </a:pPr>
+            <a:r>
+              <a:t>Why it helps</a:t>
             </a:r>
           </a:p>
           <a:p>
@@ -13358,25 +12842,25 @@
               </a:defRPr>
             </a:pPr>
             <a:r>
-              <a:t>• Summary-to-detail analysis</a:t>
+              <a:t>• Back button</a:t>
             </a:r>
             <a:br/>
             <a:r>
-              <a:t>• Drillthrough fields</a:t>
-            </a:r>
-          </a:p>
-        </p:txBody>
-      </p:sp>
-      <p:sp>
-        <p:nvSpPr>
-          <p:cNvPr id="8" name="Rounded Rectangle 7"/>
+              <a:t>• Detail page design</a:t>
+            </a:r>
+          </a:p>
+        </p:txBody>
+      </p:sp>
+      <p:sp>
+        <p:nvSpPr>
+          <p:cNvPr id="11" name="Rounded Rectangle 10"/>
           <p:cNvSpPr/>
           <p:nvPr/>
         </p:nvSpPr>
         <p:spPr>
           <a:xfrm>
-            <a:off x="6263640" y="1234440"/>
-            <a:ext cx="5303520" cy="1828800"/>
+            <a:off x="822960" y="4160520"/>
+            <a:ext cx="10424160" cy="868680"/>
           </a:xfrm>
           <a:prstGeom prst="roundRect">
             <a:avLst/>
@@ -13414,20 +12898,20 @@
       </p:sp>
       <p:sp>
         <p:nvSpPr>
-          <p:cNvPr id="9" name="Rectangle 8"/>
+          <p:cNvPr id="12" name="Rectangle 11"/>
           <p:cNvSpPr/>
           <p:nvPr/>
         </p:nvSpPr>
         <p:spPr>
           <a:xfrm>
-            <a:off x="6263640" y="1234440"/>
-            <a:ext cx="91440" cy="1828800"/>
+            <a:off x="822960" y="4160520"/>
+            <a:ext cx="91440" cy="868680"/>
           </a:xfrm>
           <a:prstGeom prst="rect">
             <a:avLst/>
           </a:prstGeom>
           <a:solidFill>
-            <a:srgbClr val="02C39A"/>
+            <a:srgbClr val="F9B700"/>
           </a:solidFill>
           <a:ln>
             <a:noFill/>
@@ -13457,14 +12941,14 @@
       </p:sp>
       <p:sp>
         <p:nvSpPr>
-          <p:cNvPr id="10" name="TextBox 9"/>
+          <p:cNvPr id="13" name="TextBox 12"/>
           <p:cNvSpPr txBox="1"/>
           <p:nvPr/>
         </p:nvSpPr>
         <p:spPr>
           <a:xfrm>
-            <a:off x="6446520" y="1344168"/>
-            <a:ext cx="4983480" cy="1664208"/>
+            <a:off x="1005840" y="4270248"/>
+            <a:ext cx="10104120" cy="704088"/>
           </a:xfrm>
           <a:prstGeom prst="rect">
             <a:avLst/>
@@ -13486,167 +12970,7 @@
               </a:defRPr>
             </a:pPr>
             <a:r>
-              <a:t>Why it helps</a:t>
-            </a:r>
-          </a:p>
-          <a:p>
-            <a:pPr>
-              <a:spcBef>
-                <a:spcPts val="400"/>
-              </a:spcBef>
-              <a:defRPr sz="1050">
-                <a:solidFill>
-                  <a:srgbClr val="242424"/>
-                </a:solidFill>
-                <a:latin typeface="Aptos"/>
-              </a:defRPr>
-            </a:pPr>
-            <a:r>
-              <a:t>• Back button</a:t>
-            </a:r>
-            <a:br/>
-            <a:r>
-              <a:t>• Detail page design</a:t>
-            </a:r>
-          </a:p>
-        </p:txBody>
-      </p:sp>
-      <p:sp>
-        <p:nvSpPr>
-          <p:cNvPr id="11" name="Rounded Rectangle 10"/>
-          <p:cNvSpPr/>
-          <p:nvPr/>
-        </p:nvSpPr>
-        <p:spPr>
-          <a:xfrm>
-            <a:off x="822960" y="4160520"/>
-            <a:ext cx="10424160" cy="868680"/>
-          </a:xfrm>
-          <a:prstGeom prst="roundRect">
-            <a:avLst/>
-          </a:prstGeom>
-          <a:solidFill>
-            <a:srgbClr val="FFFFFF"/>
-          </a:solidFill>
-          <a:ln>
-            <a:solidFill>
-              <a:srgbClr val="DCDCDC"/>
-            </a:solidFill>
-          </a:ln>
-        </p:spPr>
-        <p:style>
-          <a:lnRef idx="1">
-            <a:schemeClr val="accent1"/>
-          </a:lnRef>
-          <a:fillRef idx="3">
-            <a:schemeClr val="accent1"/>
-          </a:fillRef>
-          <a:effectRef idx="2">
-            <a:schemeClr val="accent1"/>
-          </a:effectRef>
-          <a:fontRef idx="minor">
-            <a:schemeClr val="lt1"/>
-          </a:fontRef>
-        </p:style>
-        <p:txBody>
-          <a:bodyPr rtlCol="0" anchor="ctr"/>
-          <a:lstStyle/>
-          <a:p>
-            <a:pPr algn="ctr"/>
-          </a:p>
-        </p:txBody>
-      </p:sp>
-      <p:sp>
-        <p:nvSpPr>
-          <p:cNvPr id="12" name="Rectangle 11"/>
-          <p:cNvSpPr/>
-          <p:nvPr/>
-        </p:nvSpPr>
-        <p:spPr>
-          <a:xfrm>
-            <a:off x="822960" y="4160520"/>
-            <a:ext cx="91440" cy="868680"/>
-          </a:xfrm>
-          <a:prstGeom prst="rect">
-            <a:avLst/>
-          </a:prstGeom>
-          <a:solidFill>
-            <a:srgbClr val="F9B700"/>
-          </a:solidFill>
-          <a:ln>
-            <a:noFill/>
-          </a:ln>
-        </p:spPr>
-        <p:style>
-          <a:lnRef idx="1">
-            <a:schemeClr val="accent1"/>
-          </a:lnRef>
-          <a:fillRef idx="3">
-            <a:schemeClr val="accent1"/>
-          </a:fillRef>
-          <a:effectRef idx="2">
-            <a:schemeClr val="accent1"/>
-          </a:effectRef>
-          <a:fontRef idx="minor">
-            <a:schemeClr val="lt1"/>
-          </a:fontRef>
-        </p:style>
-        <p:txBody>
-          <a:bodyPr rtlCol="0" anchor="ctr"/>
-          <a:lstStyle/>
-          <a:p>
-            <a:pPr algn="ctr"/>
-          </a:p>
-        </p:txBody>
-      </p:sp>
-      <p:sp>
-        <p:nvSpPr>
-          <p:cNvPr id="13" name="TextBox 12"/>
-          <p:cNvSpPr txBox="1"/>
-          <p:nvPr/>
-        </p:nvSpPr>
-        <p:spPr>
-          <a:xfrm>
-            <a:off x="1005840" y="4270248"/>
-            <a:ext cx="10104120" cy="704088"/>
-          </a:xfrm>
-          <a:prstGeom prst="rect">
-            <a:avLst/>
-          </a:prstGeom>
-          <a:noFill/>
-        </p:spPr>
-        <p:txBody>
-          <a:bodyPr wrap="square" lIns="0" rIns="0">
-            <a:spAutoFit/>
-          </a:bodyPr>
-          <a:lstStyle/>
-          <a:p>
-            <a:pPr>
-              <a:defRPr b="1" sz="1500">
-                <a:solidFill>
-                  <a:srgbClr val="1E2761"/>
-                </a:solidFill>
-                <a:latin typeface="Aptos Display"/>
-              </a:defRPr>
-            </a:pPr>
-            <a:r>
-              <a:t>Lab connection</a:t>
-            </a:r>
-          </a:p>
-          <a:p>
-            <a:pPr>
-              <a:spcBef>
-                <a:spcPts val="400"/>
-              </a:spcBef>
-              <a:defRPr sz="1050">
-                <a:solidFill>
-                  <a:srgbClr val="242424"/>
-                </a:solidFill>
-                <a:latin typeface="Aptos"/>
-              </a:defRPr>
-            </a:pPr>
-            <a:r>
-              <a:t>Coverage: Covered. Use the lab README to demonstrate or discuss this topic. Review terms: none.</a:t>
+              <a:t>In the lab, you will apply this pattern, validate the expected behavior, and discuss where it fits in a real Power BI solution.</a:t>
             </a:r>
           </a:p>
         </p:txBody>
@@ -13785,42 +13109,6 @@
       </p:sp>
       <p:sp>
         <p:nvSpPr>
-          <p:cNvPr id="4" name="TextBox 3"/>
-          <p:cNvSpPr txBox="1"/>
-          <p:nvPr/>
-        </p:nvSpPr>
-        <p:spPr>
-          <a:xfrm>
-            <a:off x="530352" y="914400"/>
-            <a:ext cx="10515600" cy="320040"/>
-          </a:xfrm>
-          <a:prstGeom prst="rect">
-            <a:avLst/>
-          </a:prstGeom>
-          <a:noFill/>
-        </p:spPr>
-        <p:txBody>
-          <a:bodyPr wrap="none">
-            <a:spAutoFit/>
-          </a:bodyPr>
-          <a:lstStyle/>
-          <a:p>
-            <a:pPr>
-              <a:defRPr sz="1200">
-                <a:solidFill>
-                  <a:srgbClr val="5C5C5C"/>
-                </a:solidFill>
-                <a:latin typeface="Aptos"/>
-              </a:defRPr>
-            </a:pPr>
-            <a:r>
-              <a:t>Talking points, learner value, and lab connection</a:t>
-            </a:r>
-          </a:p>
-        </p:txBody>
-      </p:sp>
-      <p:sp>
-        <p:nvSpPr>
           <p:cNvPr id="5" name="Rounded Rectangle 4"/>
           <p:cNvSpPr/>
           <p:nvPr/>
@@ -13938,7 +13226,139 @@
               </a:defRPr>
             </a:pPr>
             <a:r>
-              <a:t>Talking points</a:t>
+              <a:t>Key ideas</a:t>
+            </a:r>
+            <a:br/>
+            <a:r>
+              <a:t>• Context without clutter</a:t>
+            </a:r>
+            <a:br/>
+            <a:r>
+              <a:t>• Tooltip page size</a:t>
+            </a:r>
+          </a:p>
+        </p:txBody>
+      </p:sp>
+      <p:sp>
+        <p:nvSpPr>
+          <p:cNvPr id="8" name="Rounded Rectangle 7"/>
+          <p:cNvSpPr/>
+          <p:nvPr/>
+        </p:nvSpPr>
+        <p:spPr>
+          <a:xfrm>
+            <a:off x="6263640" y="1234440"/>
+            <a:ext cx="5303520" cy="1828800"/>
+          </a:xfrm>
+          <a:prstGeom prst="roundRect">
+            <a:avLst/>
+          </a:prstGeom>
+          <a:solidFill>
+            <a:srgbClr val="FFFFFF"/>
+          </a:solidFill>
+          <a:ln>
+            <a:solidFill>
+              <a:srgbClr val="DCDCDC"/>
+            </a:solidFill>
+          </a:ln>
+        </p:spPr>
+        <p:style>
+          <a:lnRef idx="1">
+            <a:schemeClr val="accent1"/>
+          </a:lnRef>
+          <a:fillRef idx="3">
+            <a:schemeClr val="accent1"/>
+          </a:fillRef>
+          <a:effectRef idx="2">
+            <a:schemeClr val="accent1"/>
+          </a:effectRef>
+          <a:fontRef idx="minor">
+            <a:schemeClr val="lt1"/>
+          </a:fontRef>
+        </p:style>
+        <p:txBody>
+          <a:bodyPr rtlCol="0" anchor="ctr"/>
+          <a:lstStyle/>
+          <a:p>
+            <a:pPr algn="ctr"/>
+          </a:p>
+        </p:txBody>
+      </p:sp>
+      <p:sp>
+        <p:nvSpPr>
+          <p:cNvPr id="9" name="Rectangle 8"/>
+          <p:cNvSpPr/>
+          <p:nvPr/>
+        </p:nvSpPr>
+        <p:spPr>
+          <a:xfrm>
+            <a:off x="6263640" y="1234440"/>
+            <a:ext cx="91440" cy="1828800"/>
+          </a:xfrm>
+          <a:prstGeom prst="rect">
+            <a:avLst/>
+          </a:prstGeom>
+          <a:solidFill>
+            <a:srgbClr val="02C39A"/>
+          </a:solidFill>
+          <a:ln>
+            <a:noFill/>
+          </a:ln>
+        </p:spPr>
+        <p:style>
+          <a:lnRef idx="1">
+            <a:schemeClr val="accent1"/>
+          </a:lnRef>
+          <a:fillRef idx="3">
+            <a:schemeClr val="accent1"/>
+          </a:fillRef>
+          <a:effectRef idx="2">
+            <a:schemeClr val="accent1"/>
+          </a:effectRef>
+          <a:fontRef idx="minor">
+            <a:schemeClr val="lt1"/>
+          </a:fontRef>
+        </p:style>
+        <p:txBody>
+          <a:bodyPr rtlCol="0" anchor="ctr"/>
+          <a:lstStyle/>
+          <a:p>
+            <a:pPr algn="ctr"/>
+          </a:p>
+        </p:txBody>
+      </p:sp>
+      <p:sp>
+        <p:nvSpPr>
+          <p:cNvPr id="10" name="TextBox 9"/>
+          <p:cNvSpPr txBox="1"/>
+          <p:nvPr/>
+        </p:nvSpPr>
+        <p:spPr>
+          <a:xfrm>
+            <a:off x="6446520" y="1344168"/>
+            <a:ext cx="4983480" cy="1664208"/>
+          </a:xfrm>
+          <a:prstGeom prst="rect">
+            <a:avLst/>
+          </a:prstGeom>
+          <a:noFill/>
+        </p:spPr>
+        <p:txBody>
+          <a:bodyPr wrap="square" lIns="0" rIns="0">
+            <a:spAutoFit/>
+          </a:bodyPr>
+          <a:lstStyle/>
+          <a:p>
+            <a:pPr>
+              <a:defRPr b="1" sz="1500">
+                <a:solidFill>
+                  <a:srgbClr val="1E2761"/>
+                </a:solidFill>
+                <a:latin typeface="Aptos Display"/>
+              </a:defRPr>
+            </a:pPr>
+            <a:r>
+              <a:t>Why it helps</a:t>
             </a:r>
           </a:p>
           <a:p>
@@ -13954,25 +13374,25 @@
               </a:defRPr>
             </a:pPr>
             <a:r>
-              <a:t>• Context without clutter</a:t>
+              <a:t>• Tooltip assignment</a:t>
             </a:r>
             <a:br/>
             <a:r>
-              <a:t>• Tooltip page size</a:t>
-            </a:r>
-          </a:p>
-        </p:txBody>
-      </p:sp>
-      <p:sp>
-        <p:nvSpPr>
-          <p:cNvPr id="8" name="Rounded Rectangle 7"/>
+              <a:t>• Design constraints</a:t>
+            </a:r>
+          </a:p>
+        </p:txBody>
+      </p:sp>
+      <p:sp>
+        <p:nvSpPr>
+          <p:cNvPr id="11" name="Rounded Rectangle 10"/>
           <p:cNvSpPr/>
           <p:nvPr/>
         </p:nvSpPr>
         <p:spPr>
           <a:xfrm>
-            <a:off x="6263640" y="1234440"/>
-            <a:ext cx="5303520" cy="1828800"/>
+            <a:off x="822960" y="4160520"/>
+            <a:ext cx="10424160" cy="868680"/>
           </a:xfrm>
           <a:prstGeom prst="roundRect">
             <a:avLst/>
@@ -14010,20 +13430,20 @@
       </p:sp>
       <p:sp>
         <p:nvSpPr>
-          <p:cNvPr id="9" name="Rectangle 8"/>
+          <p:cNvPr id="12" name="Rectangle 11"/>
           <p:cNvSpPr/>
           <p:nvPr/>
         </p:nvSpPr>
         <p:spPr>
           <a:xfrm>
-            <a:off x="6263640" y="1234440"/>
-            <a:ext cx="91440" cy="1828800"/>
+            <a:off x="822960" y="4160520"/>
+            <a:ext cx="91440" cy="868680"/>
           </a:xfrm>
           <a:prstGeom prst="rect">
             <a:avLst/>
           </a:prstGeom>
           <a:solidFill>
-            <a:srgbClr val="02C39A"/>
+            <a:srgbClr val="F9B700"/>
           </a:solidFill>
           <a:ln>
             <a:noFill/>
@@ -14053,14 +13473,14 @@
       </p:sp>
       <p:sp>
         <p:nvSpPr>
-          <p:cNvPr id="10" name="TextBox 9"/>
+          <p:cNvPr id="13" name="TextBox 12"/>
           <p:cNvSpPr txBox="1"/>
           <p:nvPr/>
         </p:nvSpPr>
         <p:spPr>
           <a:xfrm>
-            <a:off x="6446520" y="1344168"/>
-            <a:ext cx="4983480" cy="1664208"/>
+            <a:off x="1005840" y="4270248"/>
+            <a:ext cx="10104120" cy="704088"/>
           </a:xfrm>
           <a:prstGeom prst="rect">
             <a:avLst/>
@@ -14082,167 +13502,7 @@
               </a:defRPr>
             </a:pPr>
             <a:r>
-              <a:t>Why it helps</a:t>
-            </a:r>
-          </a:p>
-          <a:p>
-            <a:pPr>
-              <a:spcBef>
-                <a:spcPts val="400"/>
-              </a:spcBef>
-              <a:defRPr sz="1050">
-                <a:solidFill>
-                  <a:srgbClr val="242424"/>
-                </a:solidFill>
-                <a:latin typeface="Aptos"/>
-              </a:defRPr>
-            </a:pPr>
-            <a:r>
-              <a:t>• Tooltip assignment</a:t>
-            </a:r>
-            <a:br/>
-            <a:r>
-              <a:t>• Design constraints</a:t>
-            </a:r>
-          </a:p>
-        </p:txBody>
-      </p:sp>
-      <p:sp>
-        <p:nvSpPr>
-          <p:cNvPr id="11" name="Rounded Rectangle 10"/>
-          <p:cNvSpPr/>
-          <p:nvPr/>
-        </p:nvSpPr>
-        <p:spPr>
-          <a:xfrm>
-            <a:off x="822960" y="4160520"/>
-            <a:ext cx="10424160" cy="868680"/>
-          </a:xfrm>
-          <a:prstGeom prst="roundRect">
-            <a:avLst/>
-          </a:prstGeom>
-          <a:solidFill>
-            <a:srgbClr val="FFFFFF"/>
-          </a:solidFill>
-          <a:ln>
-            <a:solidFill>
-              <a:srgbClr val="DCDCDC"/>
-            </a:solidFill>
-          </a:ln>
-        </p:spPr>
-        <p:style>
-          <a:lnRef idx="1">
-            <a:schemeClr val="accent1"/>
-          </a:lnRef>
-          <a:fillRef idx="3">
-            <a:schemeClr val="accent1"/>
-          </a:fillRef>
-          <a:effectRef idx="2">
-            <a:schemeClr val="accent1"/>
-          </a:effectRef>
-          <a:fontRef idx="minor">
-            <a:schemeClr val="lt1"/>
-          </a:fontRef>
-        </p:style>
-        <p:txBody>
-          <a:bodyPr rtlCol="0" anchor="ctr"/>
-          <a:lstStyle/>
-          <a:p>
-            <a:pPr algn="ctr"/>
-          </a:p>
-        </p:txBody>
-      </p:sp>
-      <p:sp>
-        <p:nvSpPr>
-          <p:cNvPr id="12" name="Rectangle 11"/>
-          <p:cNvSpPr/>
-          <p:nvPr/>
-        </p:nvSpPr>
-        <p:spPr>
-          <a:xfrm>
-            <a:off x="822960" y="4160520"/>
-            <a:ext cx="91440" cy="868680"/>
-          </a:xfrm>
-          <a:prstGeom prst="rect">
-            <a:avLst/>
-          </a:prstGeom>
-          <a:solidFill>
-            <a:srgbClr val="F9B700"/>
-          </a:solidFill>
-          <a:ln>
-            <a:noFill/>
-          </a:ln>
-        </p:spPr>
-        <p:style>
-          <a:lnRef idx="1">
-            <a:schemeClr val="accent1"/>
-          </a:lnRef>
-          <a:fillRef idx="3">
-            <a:schemeClr val="accent1"/>
-          </a:fillRef>
-          <a:effectRef idx="2">
-            <a:schemeClr val="accent1"/>
-          </a:effectRef>
-          <a:fontRef idx="minor">
-            <a:schemeClr val="lt1"/>
-          </a:fontRef>
-        </p:style>
-        <p:txBody>
-          <a:bodyPr rtlCol="0" anchor="ctr"/>
-          <a:lstStyle/>
-          <a:p>
-            <a:pPr algn="ctr"/>
-          </a:p>
-        </p:txBody>
-      </p:sp>
-      <p:sp>
-        <p:nvSpPr>
-          <p:cNvPr id="13" name="TextBox 12"/>
-          <p:cNvSpPr txBox="1"/>
-          <p:nvPr/>
-        </p:nvSpPr>
-        <p:spPr>
-          <a:xfrm>
-            <a:off x="1005840" y="4270248"/>
-            <a:ext cx="10104120" cy="704088"/>
-          </a:xfrm>
-          <a:prstGeom prst="rect">
-            <a:avLst/>
-          </a:prstGeom>
-          <a:noFill/>
-        </p:spPr>
-        <p:txBody>
-          <a:bodyPr wrap="square" lIns="0" rIns="0">
-            <a:spAutoFit/>
-          </a:bodyPr>
-          <a:lstStyle/>
-          <a:p>
-            <a:pPr>
-              <a:defRPr b="1" sz="1500">
-                <a:solidFill>
-                  <a:srgbClr val="1E2761"/>
-                </a:solidFill>
-                <a:latin typeface="Aptos Display"/>
-              </a:defRPr>
-            </a:pPr>
-            <a:r>
-              <a:t>Lab connection</a:t>
-            </a:r>
-          </a:p>
-          <a:p>
-            <a:pPr>
-              <a:spcBef>
-                <a:spcPts val="400"/>
-              </a:spcBef>
-              <a:defRPr sz="1050">
-                <a:solidFill>
-                  <a:srgbClr val="242424"/>
-                </a:solidFill>
-                <a:latin typeface="Aptos"/>
-              </a:defRPr>
-            </a:pPr>
-            <a:r>
-              <a:t>Coverage: Covered. Use the lab README to demonstrate or discuss this topic. Review terms: assignment, constraints.</a:t>
+              <a:t>In the lab, you will apply this pattern, validate the expected behavior, and discuss where it fits in a real Power BI solution.</a:t>
             </a:r>
           </a:p>
         </p:txBody>
@@ -14381,42 +13641,6 @@
       </p:sp>
       <p:sp>
         <p:nvSpPr>
-          <p:cNvPr id="4" name="TextBox 3"/>
-          <p:cNvSpPr txBox="1"/>
-          <p:nvPr/>
-        </p:nvSpPr>
-        <p:spPr>
-          <a:xfrm>
-            <a:off x="530352" y="914400"/>
-            <a:ext cx="10515600" cy="320040"/>
-          </a:xfrm>
-          <a:prstGeom prst="rect">
-            <a:avLst/>
-          </a:prstGeom>
-          <a:noFill/>
-        </p:spPr>
-        <p:txBody>
-          <a:bodyPr wrap="none">
-            <a:spAutoFit/>
-          </a:bodyPr>
-          <a:lstStyle/>
-          <a:p>
-            <a:pPr>
-              <a:defRPr sz="1200">
-                <a:solidFill>
-                  <a:srgbClr val="5C5C5C"/>
-                </a:solidFill>
-                <a:latin typeface="Aptos"/>
-              </a:defRPr>
-            </a:pPr>
-            <a:r>
-              <a:t>Talking points, learner value, and lab connection</a:t>
-            </a:r>
-          </a:p>
-        </p:txBody>
-      </p:sp>
-      <p:sp>
-        <p:nvSpPr>
           <p:cNvPr id="5" name="Rounded Rectangle 4"/>
           <p:cNvSpPr/>
           <p:nvPr/>
@@ -14534,7 +13758,139 @@
               </a:defRPr>
             </a:pPr>
             <a:r>
-              <a:t>Talking points</a:t>
+              <a:t>Key ideas</a:t>
+            </a:r>
+            <a:br/>
+            <a:r>
+              <a:t>• Guided experiences</a:t>
+            </a:r>
+            <a:br/>
+            <a:r>
+              <a:t>• Show/hide panels</a:t>
+            </a:r>
+          </a:p>
+        </p:txBody>
+      </p:sp>
+      <p:sp>
+        <p:nvSpPr>
+          <p:cNvPr id="8" name="Rounded Rectangle 7"/>
+          <p:cNvSpPr/>
+          <p:nvPr/>
+        </p:nvSpPr>
+        <p:spPr>
+          <a:xfrm>
+            <a:off x="6263640" y="1234440"/>
+            <a:ext cx="5303520" cy="1828800"/>
+          </a:xfrm>
+          <a:prstGeom prst="roundRect">
+            <a:avLst/>
+          </a:prstGeom>
+          <a:solidFill>
+            <a:srgbClr val="FFFFFF"/>
+          </a:solidFill>
+          <a:ln>
+            <a:solidFill>
+              <a:srgbClr val="DCDCDC"/>
+            </a:solidFill>
+          </a:ln>
+        </p:spPr>
+        <p:style>
+          <a:lnRef idx="1">
+            <a:schemeClr val="accent1"/>
+          </a:lnRef>
+          <a:fillRef idx="3">
+            <a:schemeClr val="accent1"/>
+          </a:fillRef>
+          <a:effectRef idx="2">
+            <a:schemeClr val="accent1"/>
+          </a:effectRef>
+          <a:fontRef idx="minor">
+            <a:schemeClr val="lt1"/>
+          </a:fontRef>
+        </p:style>
+        <p:txBody>
+          <a:bodyPr rtlCol="0" anchor="ctr"/>
+          <a:lstStyle/>
+          <a:p>
+            <a:pPr algn="ctr"/>
+          </a:p>
+        </p:txBody>
+      </p:sp>
+      <p:sp>
+        <p:nvSpPr>
+          <p:cNvPr id="9" name="Rectangle 8"/>
+          <p:cNvSpPr/>
+          <p:nvPr/>
+        </p:nvSpPr>
+        <p:spPr>
+          <a:xfrm>
+            <a:off x="6263640" y="1234440"/>
+            <a:ext cx="91440" cy="1828800"/>
+          </a:xfrm>
+          <a:prstGeom prst="rect">
+            <a:avLst/>
+          </a:prstGeom>
+          <a:solidFill>
+            <a:srgbClr val="02C39A"/>
+          </a:solidFill>
+          <a:ln>
+            <a:noFill/>
+          </a:ln>
+        </p:spPr>
+        <p:style>
+          <a:lnRef idx="1">
+            <a:schemeClr val="accent1"/>
+          </a:lnRef>
+          <a:fillRef idx="3">
+            <a:schemeClr val="accent1"/>
+          </a:fillRef>
+          <a:effectRef idx="2">
+            <a:schemeClr val="accent1"/>
+          </a:effectRef>
+          <a:fontRef idx="minor">
+            <a:schemeClr val="lt1"/>
+          </a:fontRef>
+        </p:style>
+        <p:txBody>
+          <a:bodyPr rtlCol="0" anchor="ctr"/>
+          <a:lstStyle/>
+          <a:p>
+            <a:pPr algn="ctr"/>
+          </a:p>
+        </p:txBody>
+      </p:sp>
+      <p:sp>
+        <p:nvSpPr>
+          <p:cNvPr id="10" name="TextBox 9"/>
+          <p:cNvSpPr txBox="1"/>
+          <p:nvPr/>
+        </p:nvSpPr>
+        <p:spPr>
+          <a:xfrm>
+            <a:off x="6446520" y="1344168"/>
+            <a:ext cx="4983480" cy="1664208"/>
+          </a:xfrm>
+          <a:prstGeom prst="rect">
+            <a:avLst/>
+          </a:prstGeom>
+          <a:noFill/>
+        </p:spPr>
+        <p:txBody>
+          <a:bodyPr wrap="square" lIns="0" rIns="0">
+            <a:spAutoFit/>
+          </a:bodyPr>
+          <a:lstStyle/>
+          <a:p>
+            <a:pPr>
+              <a:defRPr b="1" sz="1500">
+                <a:solidFill>
+                  <a:srgbClr val="1E2761"/>
+                </a:solidFill>
+                <a:latin typeface="Aptos Display"/>
+              </a:defRPr>
+            </a:pPr>
+            <a:r>
+              <a:t>Why it helps</a:t>
             </a:r>
           </a:p>
           <a:p>
@@ -14550,25 +13906,25 @@
               </a:defRPr>
             </a:pPr>
             <a:r>
-              <a:t>• Guided experiences</a:t>
+              <a:t>• Reset filters</a:t>
             </a:r>
             <a:br/>
             <a:r>
-              <a:t>• Show/hide panels</a:t>
-            </a:r>
-          </a:p>
-        </p:txBody>
-      </p:sp>
-      <p:sp>
-        <p:nvSpPr>
-          <p:cNvPr id="8" name="Rounded Rectangle 7"/>
+              <a:t>• Bookmark options</a:t>
+            </a:r>
+          </a:p>
+        </p:txBody>
+      </p:sp>
+      <p:sp>
+        <p:nvSpPr>
+          <p:cNvPr id="11" name="Rounded Rectangle 10"/>
           <p:cNvSpPr/>
           <p:nvPr/>
         </p:nvSpPr>
         <p:spPr>
           <a:xfrm>
-            <a:off x="6263640" y="1234440"/>
-            <a:ext cx="5303520" cy="1828800"/>
+            <a:off x="822960" y="4160520"/>
+            <a:ext cx="10424160" cy="868680"/>
           </a:xfrm>
           <a:prstGeom prst="roundRect">
             <a:avLst/>
@@ -14606,20 +13962,20 @@
       </p:sp>
       <p:sp>
         <p:nvSpPr>
-          <p:cNvPr id="9" name="Rectangle 8"/>
+          <p:cNvPr id="12" name="Rectangle 11"/>
           <p:cNvSpPr/>
           <p:nvPr/>
         </p:nvSpPr>
         <p:spPr>
           <a:xfrm>
-            <a:off x="6263640" y="1234440"/>
-            <a:ext cx="91440" cy="1828800"/>
+            <a:off x="822960" y="4160520"/>
+            <a:ext cx="91440" cy="868680"/>
           </a:xfrm>
           <a:prstGeom prst="rect">
             <a:avLst/>
           </a:prstGeom>
           <a:solidFill>
-            <a:srgbClr val="02C39A"/>
+            <a:srgbClr val="F9B700"/>
           </a:solidFill>
           <a:ln>
             <a:noFill/>
@@ -14649,14 +14005,14 @@
       </p:sp>
       <p:sp>
         <p:nvSpPr>
-          <p:cNvPr id="10" name="TextBox 9"/>
+          <p:cNvPr id="13" name="TextBox 12"/>
           <p:cNvSpPr txBox="1"/>
           <p:nvPr/>
         </p:nvSpPr>
         <p:spPr>
           <a:xfrm>
-            <a:off x="6446520" y="1344168"/>
-            <a:ext cx="4983480" cy="1664208"/>
+            <a:off x="1005840" y="4270248"/>
+            <a:ext cx="10104120" cy="704088"/>
           </a:xfrm>
           <a:prstGeom prst="rect">
             <a:avLst/>
@@ -14678,167 +14034,7 @@
               </a:defRPr>
             </a:pPr>
             <a:r>
-              <a:t>Why it helps</a:t>
-            </a:r>
-          </a:p>
-          <a:p>
-            <a:pPr>
-              <a:spcBef>
-                <a:spcPts val="400"/>
-              </a:spcBef>
-              <a:defRPr sz="1050">
-                <a:solidFill>
-                  <a:srgbClr val="242424"/>
-                </a:solidFill>
-                <a:latin typeface="Aptos"/>
-              </a:defRPr>
-            </a:pPr>
-            <a:r>
-              <a:t>• Reset filters</a:t>
-            </a:r>
-            <a:br/>
-            <a:r>
-              <a:t>• Bookmark options</a:t>
-            </a:r>
-          </a:p>
-        </p:txBody>
-      </p:sp>
-      <p:sp>
-        <p:nvSpPr>
-          <p:cNvPr id="11" name="Rounded Rectangle 10"/>
-          <p:cNvSpPr/>
-          <p:nvPr/>
-        </p:nvSpPr>
-        <p:spPr>
-          <a:xfrm>
-            <a:off x="822960" y="4160520"/>
-            <a:ext cx="10424160" cy="868680"/>
-          </a:xfrm>
-          <a:prstGeom prst="roundRect">
-            <a:avLst/>
-          </a:prstGeom>
-          <a:solidFill>
-            <a:srgbClr val="FFFFFF"/>
-          </a:solidFill>
-          <a:ln>
-            <a:solidFill>
-              <a:srgbClr val="DCDCDC"/>
-            </a:solidFill>
-          </a:ln>
-        </p:spPr>
-        <p:style>
-          <a:lnRef idx="1">
-            <a:schemeClr val="accent1"/>
-          </a:lnRef>
-          <a:fillRef idx="3">
-            <a:schemeClr val="accent1"/>
-          </a:fillRef>
-          <a:effectRef idx="2">
-            <a:schemeClr val="accent1"/>
-          </a:effectRef>
-          <a:fontRef idx="minor">
-            <a:schemeClr val="lt1"/>
-          </a:fontRef>
-        </p:style>
-        <p:txBody>
-          <a:bodyPr rtlCol="0" anchor="ctr"/>
-          <a:lstStyle/>
-          <a:p>
-            <a:pPr algn="ctr"/>
-          </a:p>
-        </p:txBody>
-      </p:sp>
-      <p:sp>
-        <p:nvSpPr>
-          <p:cNvPr id="12" name="Rectangle 11"/>
-          <p:cNvSpPr/>
-          <p:nvPr/>
-        </p:nvSpPr>
-        <p:spPr>
-          <a:xfrm>
-            <a:off x="822960" y="4160520"/>
-            <a:ext cx="91440" cy="868680"/>
-          </a:xfrm>
-          <a:prstGeom prst="rect">
-            <a:avLst/>
-          </a:prstGeom>
-          <a:solidFill>
-            <a:srgbClr val="F9B700"/>
-          </a:solidFill>
-          <a:ln>
-            <a:noFill/>
-          </a:ln>
-        </p:spPr>
-        <p:style>
-          <a:lnRef idx="1">
-            <a:schemeClr val="accent1"/>
-          </a:lnRef>
-          <a:fillRef idx="3">
-            <a:schemeClr val="accent1"/>
-          </a:fillRef>
-          <a:effectRef idx="2">
-            <a:schemeClr val="accent1"/>
-          </a:effectRef>
-          <a:fontRef idx="minor">
-            <a:schemeClr val="lt1"/>
-          </a:fontRef>
-        </p:style>
-        <p:txBody>
-          <a:bodyPr rtlCol="0" anchor="ctr"/>
-          <a:lstStyle/>
-          <a:p>
-            <a:pPr algn="ctr"/>
-          </a:p>
-        </p:txBody>
-      </p:sp>
-      <p:sp>
-        <p:nvSpPr>
-          <p:cNvPr id="13" name="TextBox 12"/>
-          <p:cNvSpPr txBox="1"/>
-          <p:nvPr/>
-        </p:nvSpPr>
-        <p:spPr>
-          <a:xfrm>
-            <a:off x="1005840" y="4270248"/>
-            <a:ext cx="10104120" cy="704088"/>
-          </a:xfrm>
-          <a:prstGeom prst="rect">
-            <a:avLst/>
-          </a:prstGeom>
-          <a:noFill/>
-        </p:spPr>
-        <p:txBody>
-          <a:bodyPr wrap="square" lIns="0" rIns="0">
-            <a:spAutoFit/>
-          </a:bodyPr>
-          <a:lstStyle/>
-          <a:p>
-            <a:pPr>
-              <a:defRPr b="1" sz="1500">
-                <a:solidFill>
-                  <a:srgbClr val="1E2761"/>
-                </a:solidFill>
-                <a:latin typeface="Aptos Display"/>
-              </a:defRPr>
-            </a:pPr>
-            <a:r>
-              <a:t>Lab connection</a:t>
-            </a:r>
-          </a:p>
-          <a:p>
-            <a:pPr>
-              <a:spcBef>
-                <a:spcPts val="400"/>
-              </a:spcBef>
-              <a:defRPr sz="1050">
-                <a:solidFill>
-                  <a:srgbClr val="242424"/>
-                </a:solidFill>
-                <a:latin typeface="Aptos"/>
-              </a:defRPr>
-            </a:pPr>
-            <a:r>
-              <a:t>Coverage: Covered. Use the lab README to demonstrate or discuss this topic. Review terms: experiences, filters, panels.</a:t>
+              <a:t>In the lab, you will apply this pattern, validate the expected behavior, and discuss where it fits in a real Power BI solution.</a:t>
             </a:r>
           </a:p>
         </p:txBody>
@@ -14977,42 +14173,6 @@
       </p:sp>
       <p:sp>
         <p:nvSpPr>
-          <p:cNvPr id="4" name="TextBox 3"/>
-          <p:cNvSpPr txBox="1"/>
-          <p:nvPr/>
-        </p:nvSpPr>
-        <p:spPr>
-          <a:xfrm>
-            <a:off x="530352" y="914400"/>
-            <a:ext cx="10515600" cy="320040"/>
-          </a:xfrm>
-          <a:prstGeom prst="rect">
-            <a:avLst/>
-          </a:prstGeom>
-          <a:noFill/>
-        </p:spPr>
-        <p:txBody>
-          <a:bodyPr wrap="none">
-            <a:spAutoFit/>
-          </a:bodyPr>
-          <a:lstStyle/>
-          <a:p>
-            <a:pPr>
-              <a:defRPr sz="1200">
-                <a:solidFill>
-                  <a:srgbClr val="5C5C5C"/>
-                </a:solidFill>
-                <a:latin typeface="Aptos"/>
-              </a:defRPr>
-            </a:pPr>
-            <a:r>
-              <a:t>Talking points, learner value, and lab connection</a:t>
-            </a:r>
-          </a:p>
-        </p:txBody>
-      </p:sp>
-      <p:sp>
-        <p:nvSpPr>
           <p:cNvPr id="5" name="Rounded Rectangle 4"/>
           <p:cNvSpPr/>
           <p:nvPr/>
@@ -15130,7 +14290,139 @@
               </a:defRPr>
             </a:pPr>
             <a:r>
-              <a:t>Talking points</a:t>
+              <a:t>Key ideas</a:t>
+            </a:r>
+            <a:br/>
+            <a:r>
+              <a:t>• Page navigation buttons</a:t>
+            </a:r>
+            <a:br/>
+            <a:r>
+              <a:t>• Navigator visuals</a:t>
+            </a:r>
+          </a:p>
+        </p:txBody>
+      </p:sp>
+      <p:sp>
+        <p:nvSpPr>
+          <p:cNvPr id="8" name="Rounded Rectangle 7"/>
+          <p:cNvSpPr/>
+          <p:nvPr/>
+        </p:nvSpPr>
+        <p:spPr>
+          <a:xfrm>
+            <a:off x="6263640" y="1234440"/>
+            <a:ext cx="5303520" cy="1828800"/>
+          </a:xfrm>
+          <a:prstGeom prst="roundRect">
+            <a:avLst/>
+          </a:prstGeom>
+          <a:solidFill>
+            <a:srgbClr val="FFFFFF"/>
+          </a:solidFill>
+          <a:ln>
+            <a:solidFill>
+              <a:srgbClr val="DCDCDC"/>
+            </a:solidFill>
+          </a:ln>
+        </p:spPr>
+        <p:style>
+          <a:lnRef idx="1">
+            <a:schemeClr val="accent1"/>
+          </a:lnRef>
+          <a:fillRef idx="3">
+            <a:schemeClr val="accent1"/>
+          </a:fillRef>
+          <a:effectRef idx="2">
+            <a:schemeClr val="accent1"/>
+          </a:effectRef>
+          <a:fontRef idx="minor">
+            <a:schemeClr val="lt1"/>
+          </a:fontRef>
+        </p:style>
+        <p:txBody>
+          <a:bodyPr rtlCol="0" anchor="ctr"/>
+          <a:lstStyle/>
+          <a:p>
+            <a:pPr algn="ctr"/>
+          </a:p>
+        </p:txBody>
+      </p:sp>
+      <p:sp>
+        <p:nvSpPr>
+          <p:cNvPr id="9" name="Rectangle 8"/>
+          <p:cNvSpPr/>
+          <p:nvPr/>
+        </p:nvSpPr>
+        <p:spPr>
+          <a:xfrm>
+            <a:off x="6263640" y="1234440"/>
+            <a:ext cx="91440" cy="1828800"/>
+          </a:xfrm>
+          <a:prstGeom prst="rect">
+            <a:avLst/>
+          </a:prstGeom>
+          <a:solidFill>
+            <a:srgbClr val="02C39A"/>
+          </a:solidFill>
+          <a:ln>
+            <a:noFill/>
+          </a:ln>
+        </p:spPr>
+        <p:style>
+          <a:lnRef idx="1">
+            <a:schemeClr val="accent1"/>
+          </a:lnRef>
+          <a:fillRef idx="3">
+            <a:schemeClr val="accent1"/>
+          </a:fillRef>
+          <a:effectRef idx="2">
+            <a:schemeClr val="accent1"/>
+          </a:effectRef>
+          <a:fontRef idx="minor">
+            <a:schemeClr val="lt1"/>
+          </a:fontRef>
+        </p:style>
+        <p:txBody>
+          <a:bodyPr rtlCol="0" anchor="ctr"/>
+          <a:lstStyle/>
+          <a:p>
+            <a:pPr algn="ctr"/>
+          </a:p>
+        </p:txBody>
+      </p:sp>
+      <p:sp>
+        <p:nvSpPr>
+          <p:cNvPr id="10" name="TextBox 9"/>
+          <p:cNvSpPr txBox="1"/>
+          <p:nvPr/>
+        </p:nvSpPr>
+        <p:spPr>
+          <a:xfrm>
+            <a:off x="6446520" y="1344168"/>
+            <a:ext cx="4983480" cy="1664208"/>
+          </a:xfrm>
+          <a:prstGeom prst="rect">
+            <a:avLst/>
+          </a:prstGeom>
+          <a:noFill/>
+        </p:spPr>
+        <p:txBody>
+          <a:bodyPr wrap="square" lIns="0" rIns="0">
+            <a:spAutoFit/>
+          </a:bodyPr>
+          <a:lstStyle/>
+          <a:p>
+            <a:pPr>
+              <a:defRPr b="1" sz="1500">
+                <a:solidFill>
+                  <a:srgbClr val="1E2761"/>
+                </a:solidFill>
+                <a:latin typeface="Aptos Display"/>
+              </a:defRPr>
+            </a:pPr>
+            <a:r>
+              <a:t>Why it helps</a:t>
             </a:r>
           </a:p>
           <a:p>
@@ -15146,25 +14438,25 @@
               </a:defRPr>
             </a:pPr>
             <a:r>
-              <a:t>• Page navigation buttons</a:t>
+              <a:t>• Conditional navigation concepts</a:t>
             </a:r>
             <a:br/>
             <a:r>
-              <a:t>• Navigator visuals</a:t>
-            </a:r>
-          </a:p>
-        </p:txBody>
-      </p:sp>
-      <p:sp>
-        <p:nvSpPr>
-          <p:cNvPr id="8" name="Rounded Rectangle 7"/>
+              <a:t>• Navigation labels</a:t>
+            </a:r>
+          </a:p>
+        </p:txBody>
+      </p:sp>
+      <p:sp>
+        <p:nvSpPr>
+          <p:cNvPr id="11" name="Rounded Rectangle 10"/>
           <p:cNvSpPr/>
           <p:nvPr/>
         </p:nvSpPr>
         <p:spPr>
           <a:xfrm>
-            <a:off x="6263640" y="1234440"/>
-            <a:ext cx="5303520" cy="1828800"/>
+            <a:off x="822960" y="4160520"/>
+            <a:ext cx="10424160" cy="868680"/>
           </a:xfrm>
           <a:prstGeom prst="roundRect">
             <a:avLst/>
@@ -15202,20 +14494,20 @@
       </p:sp>
       <p:sp>
         <p:nvSpPr>
-          <p:cNvPr id="9" name="Rectangle 8"/>
+          <p:cNvPr id="12" name="Rectangle 11"/>
           <p:cNvSpPr/>
           <p:nvPr/>
         </p:nvSpPr>
         <p:spPr>
           <a:xfrm>
-            <a:off x="6263640" y="1234440"/>
-            <a:ext cx="91440" cy="1828800"/>
+            <a:off x="822960" y="4160520"/>
+            <a:ext cx="91440" cy="868680"/>
           </a:xfrm>
           <a:prstGeom prst="rect">
             <a:avLst/>
           </a:prstGeom>
           <a:solidFill>
-            <a:srgbClr val="02C39A"/>
+            <a:srgbClr val="F9B700"/>
           </a:solidFill>
           <a:ln>
             <a:noFill/>
@@ -15245,14 +14537,14 @@
       </p:sp>
       <p:sp>
         <p:nvSpPr>
-          <p:cNvPr id="10" name="TextBox 9"/>
+          <p:cNvPr id="13" name="TextBox 12"/>
           <p:cNvSpPr txBox="1"/>
           <p:nvPr/>
         </p:nvSpPr>
         <p:spPr>
           <a:xfrm>
-            <a:off x="6446520" y="1344168"/>
-            <a:ext cx="4983480" cy="1664208"/>
+            <a:off x="1005840" y="4270248"/>
+            <a:ext cx="10104120" cy="704088"/>
           </a:xfrm>
           <a:prstGeom prst="rect">
             <a:avLst/>
@@ -15274,167 +14566,7 @@
               </a:defRPr>
             </a:pPr>
             <a:r>
-              <a:t>Why it helps</a:t>
-            </a:r>
-          </a:p>
-          <a:p>
-            <a:pPr>
-              <a:spcBef>
-                <a:spcPts val="400"/>
-              </a:spcBef>
-              <a:defRPr sz="1050">
-                <a:solidFill>
-                  <a:srgbClr val="242424"/>
-                </a:solidFill>
-                <a:latin typeface="Aptos"/>
-              </a:defRPr>
-            </a:pPr>
-            <a:r>
-              <a:t>• Conditional navigation concepts</a:t>
-            </a:r>
-            <a:br/>
-            <a:r>
-              <a:t>• Navigation labels</a:t>
-            </a:r>
-          </a:p>
-        </p:txBody>
-      </p:sp>
-      <p:sp>
-        <p:nvSpPr>
-          <p:cNvPr id="11" name="Rounded Rectangle 10"/>
-          <p:cNvSpPr/>
-          <p:nvPr/>
-        </p:nvSpPr>
-        <p:spPr>
-          <a:xfrm>
-            <a:off x="822960" y="4160520"/>
-            <a:ext cx="10424160" cy="868680"/>
-          </a:xfrm>
-          <a:prstGeom prst="roundRect">
-            <a:avLst/>
-          </a:prstGeom>
-          <a:solidFill>
-            <a:srgbClr val="FFFFFF"/>
-          </a:solidFill>
-          <a:ln>
-            <a:solidFill>
-              <a:srgbClr val="DCDCDC"/>
-            </a:solidFill>
-          </a:ln>
-        </p:spPr>
-        <p:style>
-          <a:lnRef idx="1">
-            <a:schemeClr val="accent1"/>
-          </a:lnRef>
-          <a:fillRef idx="3">
-            <a:schemeClr val="accent1"/>
-          </a:fillRef>
-          <a:effectRef idx="2">
-            <a:schemeClr val="accent1"/>
-          </a:effectRef>
-          <a:fontRef idx="minor">
-            <a:schemeClr val="lt1"/>
-          </a:fontRef>
-        </p:style>
-        <p:txBody>
-          <a:bodyPr rtlCol="0" anchor="ctr"/>
-          <a:lstStyle/>
-          <a:p>
-            <a:pPr algn="ctr"/>
-          </a:p>
-        </p:txBody>
-      </p:sp>
-      <p:sp>
-        <p:nvSpPr>
-          <p:cNvPr id="12" name="Rectangle 11"/>
-          <p:cNvSpPr/>
-          <p:nvPr/>
-        </p:nvSpPr>
-        <p:spPr>
-          <a:xfrm>
-            <a:off x="822960" y="4160520"/>
-            <a:ext cx="91440" cy="868680"/>
-          </a:xfrm>
-          <a:prstGeom prst="rect">
-            <a:avLst/>
-          </a:prstGeom>
-          <a:solidFill>
-            <a:srgbClr val="F9B700"/>
-          </a:solidFill>
-          <a:ln>
-            <a:noFill/>
-          </a:ln>
-        </p:spPr>
-        <p:style>
-          <a:lnRef idx="1">
-            <a:schemeClr val="accent1"/>
-          </a:lnRef>
-          <a:fillRef idx="3">
-            <a:schemeClr val="accent1"/>
-          </a:fillRef>
-          <a:effectRef idx="2">
-            <a:schemeClr val="accent1"/>
-          </a:effectRef>
-          <a:fontRef idx="minor">
-            <a:schemeClr val="lt1"/>
-          </a:fontRef>
-        </p:style>
-        <p:txBody>
-          <a:bodyPr rtlCol="0" anchor="ctr"/>
-          <a:lstStyle/>
-          <a:p>
-            <a:pPr algn="ctr"/>
-          </a:p>
-        </p:txBody>
-      </p:sp>
-      <p:sp>
-        <p:nvSpPr>
-          <p:cNvPr id="13" name="TextBox 12"/>
-          <p:cNvSpPr txBox="1"/>
-          <p:nvPr/>
-        </p:nvSpPr>
-        <p:spPr>
-          <a:xfrm>
-            <a:off x="1005840" y="4270248"/>
-            <a:ext cx="10104120" cy="704088"/>
-          </a:xfrm>
-          <a:prstGeom prst="rect">
-            <a:avLst/>
-          </a:prstGeom>
-          <a:noFill/>
-        </p:spPr>
-        <p:txBody>
-          <a:bodyPr wrap="square" lIns="0" rIns="0">
-            <a:spAutoFit/>
-          </a:bodyPr>
-          <a:lstStyle/>
-          <a:p>
-            <a:pPr>
-              <a:defRPr b="1" sz="1500">
-                <a:solidFill>
-                  <a:srgbClr val="1E2761"/>
-                </a:solidFill>
-                <a:latin typeface="Aptos Display"/>
-              </a:defRPr>
-            </a:pPr>
-            <a:r>
-              <a:t>Lab connection</a:t>
-            </a:r>
-          </a:p>
-          <a:p>
-            <a:pPr>
-              <a:spcBef>
-                <a:spcPts val="400"/>
-              </a:spcBef>
-              <a:defRPr sz="1050">
-                <a:solidFill>
-                  <a:srgbClr val="242424"/>
-                </a:solidFill>
-                <a:latin typeface="Aptos"/>
-              </a:defRPr>
-            </a:pPr>
-            <a:r>
-              <a:t>Coverage: Covered. Use the lab README to demonstrate or discuss this topic. Review terms: concepts.</a:t>
+              <a:t>In the lab, you will apply this pattern, validate the expected behavior, and discuss where it fits in a real Power BI solution.</a:t>
             </a:r>
           </a:p>
         </p:txBody>
